--- a/images/star-battle/templates/33-battle of the galaxies.pptx
+++ b/images/star-battle/templates/33-battle of the galaxies.pptx
@@ -6,6 +6,7 @@
   </p:sldMasterIdLst>
   <p:sldIdLst>
     <p:sldId id="266" r:id="rId2"/>
+    <p:sldId id="267" r:id="rId3"/>
   </p:sldIdLst>
   <p:sldSz cx="12192000" cy="6858000"/>
   <p:notesSz cx="6858000" cy="9144000"/>
@@ -272,7 +273,7 @@
           <a:p>
             <a:fld id="{082CB7C4-9810-433B-A50A-DC01EC0EDDAD}" type="datetimeFigureOut">
               <a:rPr lang="pt-PT" smtClean="0"/>
-              <a:t>02/01/2021</a:t>
+              <a:t>06/01/2021</a:t>
             </a:fld>
             <a:endParaRPr lang="pt-PT"/>
           </a:p>
@@ -472,7 +473,7 @@
           <a:p>
             <a:fld id="{082CB7C4-9810-433B-A50A-DC01EC0EDDAD}" type="datetimeFigureOut">
               <a:rPr lang="pt-PT" smtClean="0"/>
-              <a:t>02/01/2021</a:t>
+              <a:t>06/01/2021</a:t>
             </a:fld>
             <a:endParaRPr lang="pt-PT"/>
           </a:p>
@@ -682,7 +683,7 @@
           <a:p>
             <a:fld id="{082CB7C4-9810-433B-A50A-DC01EC0EDDAD}" type="datetimeFigureOut">
               <a:rPr lang="pt-PT" smtClean="0"/>
-              <a:t>02/01/2021</a:t>
+              <a:t>06/01/2021</a:t>
             </a:fld>
             <a:endParaRPr lang="pt-PT"/>
           </a:p>
@@ -882,7 +883,7 @@
           <a:p>
             <a:fld id="{082CB7C4-9810-433B-A50A-DC01EC0EDDAD}" type="datetimeFigureOut">
               <a:rPr lang="pt-PT" smtClean="0"/>
-              <a:t>02/01/2021</a:t>
+              <a:t>06/01/2021</a:t>
             </a:fld>
             <a:endParaRPr lang="pt-PT"/>
           </a:p>
@@ -1158,7 +1159,7 @@
           <a:p>
             <a:fld id="{082CB7C4-9810-433B-A50A-DC01EC0EDDAD}" type="datetimeFigureOut">
               <a:rPr lang="pt-PT" smtClean="0"/>
-              <a:t>02/01/2021</a:t>
+              <a:t>06/01/2021</a:t>
             </a:fld>
             <a:endParaRPr lang="pt-PT"/>
           </a:p>
@@ -1426,7 +1427,7 @@
           <a:p>
             <a:fld id="{082CB7C4-9810-433B-A50A-DC01EC0EDDAD}" type="datetimeFigureOut">
               <a:rPr lang="pt-PT" smtClean="0"/>
-              <a:t>02/01/2021</a:t>
+              <a:t>06/01/2021</a:t>
             </a:fld>
             <a:endParaRPr lang="pt-PT"/>
           </a:p>
@@ -1841,7 +1842,7 @@
           <a:p>
             <a:fld id="{082CB7C4-9810-433B-A50A-DC01EC0EDDAD}" type="datetimeFigureOut">
               <a:rPr lang="pt-PT" smtClean="0"/>
-              <a:t>02/01/2021</a:t>
+              <a:t>06/01/2021</a:t>
             </a:fld>
             <a:endParaRPr lang="pt-PT"/>
           </a:p>
@@ -1983,7 +1984,7 @@
           <a:p>
             <a:fld id="{082CB7C4-9810-433B-A50A-DC01EC0EDDAD}" type="datetimeFigureOut">
               <a:rPr lang="pt-PT" smtClean="0"/>
-              <a:t>02/01/2021</a:t>
+              <a:t>06/01/2021</a:t>
             </a:fld>
             <a:endParaRPr lang="pt-PT"/>
           </a:p>
@@ -2096,7 +2097,7 @@
           <a:p>
             <a:fld id="{082CB7C4-9810-433B-A50A-DC01EC0EDDAD}" type="datetimeFigureOut">
               <a:rPr lang="pt-PT" smtClean="0"/>
-              <a:t>02/01/2021</a:t>
+              <a:t>06/01/2021</a:t>
             </a:fld>
             <a:endParaRPr lang="pt-PT"/>
           </a:p>
@@ -2409,7 +2410,7 @@
           <a:p>
             <a:fld id="{082CB7C4-9810-433B-A50A-DC01EC0EDDAD}" type="datetimeFigureOut">
               <a:rPr lang="pt-PT" smtClean="0"/>
-              <a:t>02/01/2021</a:t>
+              <a:t>06/01/2021</a:t>
             </a:fld>
             <a:endParaRPr lang="pt-PT"/>
           </a:p>
@@ -2698,7 +2699,7 @@
           <a:p>
             <a:fld id="{082CB7C4-9810-433B-A50A-DC01EC0EDDAD}" type="datetimeFigureOut">
               <a:rPr lang="pt-PT" smtClean="0"/>
-              <a:t>02/01/2021</a:t>
+              <a:t>06/01/2021</a:t>
             </a:fld>
             <a:endParaRPr lang="pt-PT"/>
           </a:p>
@@ -2941,7 +2942,7 @@
           <a:p>
             <a:fld id="{082CB7C4-9810-433B-A50A-DC01EC0EDDAD}" type="datetimeFigureOut">
               <a:rPr lang="pt-PT" smtClean="0"/>
-              <a:t>02/01/2021</a:t>
+              <a:t>06/01/2021</a:t>
             </a:fld>
             <a:endParaRPr lang="pt-PT"/>
           </a:p>
@@ -3358,6 +3359,5130 @@
           <a:chExt cx="0" cy="0"/>
         </a:xfrm>
       </p:grpSpPr>
+      <p:grpSp>
+        <p:nvGrpSpPr>
+          <p:cNvPr id="14" name="Group 13">
+            <a:extLst>
+              <a:ext uri="{FF2B5EF4-FFF2-40B4-BE49-F238E27FC236}">
+                <a16:creationId xmlns:a16="http://schemas.microsoft.com/office/drawing/2014/main" id="{0A9854D6-B8D1-4B23-BBF1-2440B187452C}"/>
+              </a:ext>
+            </a:extLst>
+          </p:cNvPr>
+          <p:cNvGrpSpPr/>
+          <p:nvPr/>
+        </p:nvGrpSpPr>
+        <p:grpSpPr>
+          <a:xfrm>
+            <a:off x="1574563" y="-2686585"/>
+            <a:ext cx="12121982" cy="13964186"/>
+            <a:chOff x="1574563" y="-2686585"/>
+            <a:chExt cx="12121982" cy="13964186"/>
+          </a:xfrm>
+        </p:grpSpPr>
+        <p:sp>
+          <p:nvSpPr>
+            <p:cNvPr id="556" name="Rectangle 555">
+              <a:extLst>
+                <a:ext uri="{FF2B5EF4-FFF2-40B4-BE49-F238E27FC236}">
+                  <a16:creationId xmlns:a16="http://schemas.microsoft.com/office/drawing/2014/main" id="{7DADE265-DFD0-4CAF-B6D1-F40869120FD9}"/>
+                </a:ext>
+              </a:extLst>
+            </p:cNvPr>
+            <p:cNvSpPr/>
+            <p:nvPr/>
+          </p:nvSpPr>
+          <p:spPr>
+            <a:xfrm>
+              <a:off x="1574563" y="-2686585"/>
+              <a:ext cx="12121982" cy="13964186"/>
+            </a:xfrm>
+            <a:prstGeom prst="rect">
+              <a:avLst/>
+            </a:prstGeom>
+            <a:solidFill>
+              <a:schemeClr val="tx1"/>
+            </a:solidFill>
+            <a:ln w="76200">
+              <a:solidFill>
+                <a:schemeClr val="accent4"/>
+              </a:solidFill>
+            </a:ln>
+          </p:spPr>
+          <p:style>
+            <a:lnRef idx="2">
+              <a:schemeClr val="accent1">
+                <a:shade val="50000"/>
+              </a:schemeClr>
+            </a:lnRef>
+            <a:fillRef idx="1">
+              <a:schemeClr val="accent1"/>
+            </a:fillRef>
+            <a:effectRef idx="0">
+              <a:schemeClr val="accent1"/>
+            </a:effectRef>
+            <a:fontRef idx="minor">
+              <a:schemeClr val="lt1"/>
+            </a:fontRef>
+          </p:style>
+          <p:txBody>
+            <a:bodyPr rtlCol="0" anchor="ctr"/>
+            <a:lstStyle/>
+            <a:p>
+              <a:pPr algn="ctr"/>
+              <a:endParaRPr lang="pt-PT" dirty="0">
+                <a:latin typeface="Arial" panose="020B0604020202020204" pitchFamily="34" charset="0"/>
+                <a:cs typeface="Arial" panose="020B0604020202020204" pitchFamily="34" charset="0"/>
+              </a:endParaRPr>
+            </a:p>
+          </p:txBody>
+        </p:sp>
+        <p:sp>
+          <p:nvSpPr>
+            <p:cNvPr id="557" name="Rectangle 556">
+              <a:extLst>
+                <a:ext uri="{FF2B5EF4-FFF2-40B4-BE49-F238E27FC236}">
+                  <a16:creationId xmlns:a16="http://schemas.microsoft.com/office/drawing/2014/main" id="{CA929566-3B26-4AF5-9B12-74AE54BE3F4B}"/>
+                </a:ext>
+              </a:extLst>
+            </p:cNvPr>
+            <p:cNvSpPr/>
+            <p:nvPr/>
+          </p:nvSpPr>
+          <p:spPr>
+            <a:xfrm>
+              <a:off x="8364414" y="10282644"/>
+              <a:ext cx="5065066" cy="692497"/>
+            </a:xfrm>
+            <a:prstGeom prst="rect">
+              <a:avLst/>
+            </a:prstGeom>
+            <a:noFill/>
+          </p:spPr>
+          <p:txBody>
+            <a:bodyPr wrap="square">
+              <a:spAutoFit/>
+            </a:bodyPr>
+            <a:lstStyle/>
+            <a:p>
+              <a:pPr algn="r"/>
+              <a:endParaRPr lang="pt-PT" sz="300" i="1" dirty="0">
+                <a:solidFill>
+                  <a:schemeClr val="accent4"/>
+                </a:solidFill>
+                <a:latin typeface="Arial" panose="020B0604020202020204" pitchFamily="34" charset="0"/>
+                <a:cs typeface="Arial" panose="020B0604020202020204" pitchFamily="34" charset="0"/>
+              </a:endParaRPr>
+            </a:p>
+            <a:p>
+              <a:pPr algn="r"/>
+              <a:r>
+                <a:rPr lang="en-US" b="1" dirty="0">
+                  <a:solidFill>
+                    <a:schemeClr val="accent4"/>
+                  </a:solidFill>
+                  <a:latin typeface="Arial" panose="020B0604020202020204" pitchFamily="34" charset="0"/>
+                  <a:cs typeface="Arial" panose="020B0604020202020204" pitchFamily="34" charset="0"/>
+                </a:rPr>
+                <a:t>#33 by Pedro PSI – 6</a:t>
+              </a:r>
+              <a:r>
+                <a:rPr lang="en-US" b="1" baseline="30000" dirty="0">
+                  <a:solidFill>
+                    <a:schemeClr val="accent4"/>
+                  </a:solidFill>
+                  <a:latin typeface="Arial" panose="020B0604020202020204" pitchFamily="34" charset="0"/>
+                  <a:cs typeface="Arial" panose="020B0604020202020204" pitchFamily="34" charset="0"/>
+                </a:rPr>
+                <a:t>th</a:t>
+              </a:r>
+              <a:r>
+                <a:rPr lang="en-US" b="1" dirty="0">
+                  <a:solidFill>
+                    <a:schemeClr val="accent4"/>
+                  </a:solidFill>
+                  <a:latin typeface="Arial" panose="020B0604020202020204" pitchFamily="34" charset="0"/>
+                  <a:cs typeface="Arial" panose="020B0604020202020204" pitchFamily="34" charset="0"/>
+                </a:rPr>
+                <a:t> of January 2020</a:t>
+              </a:r>
+            </a:p>
+            <a:p>
+              <a:pPr algn="r"/>
+              <a:r>
+                <a:rPr lang="pt-PT" i="1" dirty="0">
+                  <a:solidFill>
+                    <a:schemeClr val="accent4"/>
+                  </a:solidFill>
+                  <a:latin typeface="Arial" panose="020B0604020202020204" pitchFamily="34" charset="0"/>
+                  <a:cs typeface="Arial" panose="020B0604020202020204" pitchFamily="34" charset="0"/>
+                </a:rPr>
+                <a:t>pedropsi.github.io/star-battle</a:t>
+              </a:r>
+            </a:p>
+          </p:txBody>
+        </p:sp>
+        <p:sp>
+          <p:nvSpPr>
+            <p:cNvPr id="558" name="TextBox 557">
+              <a:extLst>
+                <a:ext uri="{FF2B5EF4-FFF2-40B4-BE49-F238E27FC236}">
+                  <a16:creationId xmlns:a16="http://schemas.microsoft.com/office/drawing/2014/main" id="{71A1ECB2-9F07-4DDC-87C9-FCE9ED2B758E}"/>
+                </a:ext>
+              </a:extLst>
+            </p:cNvPr>
+            <p:cNvSpPr txBox="1"/>
+            <p:nvPr/>
+          </p:nvSpPr>
+          <p:spPr>
+            <a:xfrm>
+              <a:off x="1975390" y="-2098234"/>
+              <a:ext cx="11320328" cy="1015663"/>
+            </a:xfrm>
+            <a:prstGeom prst="rect">
+              <a:avLst/>
+            </a:prstGeom>
+            <a:noFill/>
+          </p:spPr>
+          <p:txBody>
+            <a:bodyPr wrap="square" rtlCol="0">
+              <a:spAutoFit/>
+            </a:bodyPr>
+            <a:lstStyle/>
+            <a:p>
+              <a:pPr algn="ctr"/>
+              <a:r>
+                <a:rPr lang="pt-PT" sz="6000" b="1" dirty="0">
+                  <a:solidFill>
+                    <a:schemeClr val="accent4"/>
+                  </a:solidFill>
+                  <a:latin typeface="Arial" panose="020B0604020202020204" pitchFamily="34" charset="0"/>
+                  <a:cs typeface="Arial" panose="020B0604020202020204" pitchFamily="34" charset="0"/>
+                </a:rPr>
+                <a:t>Star </a:t>
+              </a:r>
+              <a:r>
+                <a:rPr lang="pt-PT" sz="6000" b="1" dirty="0" err="1">
+                  <a:solidFill>
+                    <a:schemeClr val="accent4"/>
+                  </a:solidFill>
+                  <a:latin typeface="Arial" panose="020B0604020202020204" pitchFamily="34" charset="0"/>
+                  <a:cs typeface="Arial" panose="020B0604020202020204" pitchFamily="34" charset="0"/>
+                </a:rPr>
+                <a:t>Battle</a:t>
+              </a:r>
+              <a:r>
+                <a:rPr lang="pt-PT" sz="6000" b="1" dirty="0">
+                  <a:solidFill>
+                    <a:schemeClr val="accent4"/>
+                  </a:solidFill>
+                  <a:latin typeface="Arial" panose="020B0604020202020204" pitchFamily="34" charset="0"/>
+                  <a:cs typeface="Arial" panose="020B0604020202020204" pitchFamily="34" charset="0"/>
+                </a:rPr>
+                <a:t> </a:t>
+              </a:r>
+              <a:r>
+                <a:rPr lang="pt-PT" sz="6000" b="1" dirty="0" err="1">
+                  <a:solidFill>
+                    <a:schemeClr val="accent4"/>
+                  </a:solidFill>
+                  <a:latin typeface="Arial" panose="020B0604020202020204" pitchFamily="34" charset="0"/>
+                  <a:cs typeface="Arial" panose="020B0604020202020204" pitchFamily="34" charset="0"/>
+                </a:rPr>
+                <a:t>of</a:t>
+              </a:r>
+              <a:r>
+                <a:rPr lang="pt-PT" sz="6000" b="1" dirty="0">
+                  <a:solidFill>
+                    <a:schemeClr val="accent4"/>
+                  </a:solidFill>
+                  <a:latin typeface="Arial" panose="020B0604020202020204" pitchFamily="34" charset="0"/>
+                  <a:cs typeface="Arial" panose="020B0604020202020204" pitchFamily="34" charset="0"/>
+                </a:rPr>
+                <a:t> </a:t>
+              </a:r>
+              <a:r>
+                <a:rPr lang="pt-PT" sz="6000" b="1" dirty="0" err="1">
+                  <a:solidFill>
+                    <a:schemeClr val="accent4"/>
+                  </a:solidFill>
+                  <a:latin typeface="Arial" panose="020B0604020202020204" pitchFamily="34" charset="0"/>
+                  <a:cs typeface="Arial" panose="020B0604020202020204" pitchFamily="34" charset="0"/>
+                </a:rPr>
+                <a:t>the</a:t>
+              </a:r>
+              <a:r>
+                <a:rPr lang="pt-PT" sz="6000" b="1" dirty="0">
+                  <a:solidFill>
+                    <a:schemeClr val="accent4"/>
+                  </a:solidFill>
+                  <a:latin typeface="Arial" panose="020B0604020202020204" pitchFamily="34" charset="0"/>
+                  <a:cs typeface="Arial" panose="020B0604020202020204" pitchFamily="34" charset="0"/>
+                </a:rPr>
+                <a:t> </a:t>
+              </a:r>
+              <a:r>
+                <a:rPr lang="pt-PT" sz="6000" b="1" dirty="0" err="1">
+                  <a:solidFill>
+                    <a:schemeClr val="accent4"/>
+                  </a:solidFill>
+                  <a:latin typeface="Arial" panose="020B0604020202020204" pitchFamily="34" charset="0"/>
+                  <a:cs typeface="Arial" panose="020B0604020202020204" pitchFamily="34" charset="0"/>
+                </a:rPr>
+                <a:t>Galaxies</a:t>
+              </a:r>
+              <a:r>
+                <a:rPr lang="pt-PT" sz="6000" b="1" dirty="0">
+                  <a:solidFill>
+                    <a:schemeClr val="accent4"/>
+                  </a:solidFill>
+                  <a:latin typeface="Arial" panose="020B0604020202020204" pitchFamily="34" charset="0"/>
+                  <a:cs typeface="Arial" panose="020B0604020202020204" pitchFamily="34" charset="0"/>
+                </a:rPr>
+                <a:t> 2</a:t>
+              </a:r>
+              <a:r>
+                <a:rPr lang="pt-PT" sz="6000" dirty="0">
+                  <a:solidFill>
+                    <a:schemeClr val="accent4"/>
+                  </a:solidFill>
+                </a:rPr>
+                <a:t> ★</a:t>
+              </a:r>
+              <a:endParaRPr lang="pt-PT" sz="6000" b="1" dirty="0">
+                <a:solidFill>
+                  <a:schemeClr val="accent4"/>
+                </a:solidFill>
+                <a:latin typeface="Arial" panose="020B0604020202020204" pitchFamily="34" charset="0"/>
+                <a:cs typeface="Arial" panose="020B0604020202020204" pitchFamily="34" charset="0"/>
+              </a:endParaRPr>
+            </a:p>
+          </p:txBody>
+        </p:sp>
+        <p:grpSp>
+          <p:nvGrpSpPr>
+            <p:cNvPr id="11" name="Group 10">
+              <a:extLst>
+                <a:ext uri="{FF2B5EF4-FFF2-40B4-BE49-F238E27FC236}">
+                  <a16:creationId xmlns:a16="http://schemas.microsoft.com/office/drawing/2014/main" id="{22BE774C-8D60-4C98-B37B-564EA0CA3BD3}"/>
+                </a:ext>
+              </a:extLst>
+            </p:cNvPr>
+            <p:cNvGrpSpPr/>
+            <p:nvPr/>
+          </p:nvGrpSpPr>
+          <p:grpSpPr>
+            <a:xfrm>
+              <a:off x="3612264" y="1778849"/>
+              <a:ext cx="8046580" cy="8136568"/>
+              <a:chOff x="3612264" y="1778849"/>
+              <a:chExt cx="8046580" cy="8136568"/>
+            </a:xfrm>
+          </p:grpSpPr>
+          <p:grpSp>
+            <p:nvGrpSpPr>
+              <p:cNvPr id="13" name="Group 12">
+                <a:extLst>
+                  <a:ext uri="{FF2B5EF4-FFF2-40B4-BE49-F238E27FC236}">
+                    <a16:creationId xmlns:a16="http://schemas.microsoft.com/office/drawing/2014/main" id="{BB5A1D07-FBFA-4F6D-96E3-98DBB8DB287B}"/>
+                  </a:ext>
+                </a:extLst>
+              </p:cNvPr>
+              <p:cNvGrpSpPr/>
+              <p:nvPr/>
+            </p:nvGrpSpPr>
+            <p:grpSpPr>
+              <a:xfrm>
+                <a:off x="3612264" y="1778850"/>
+                <a:ext cx="8046575" cy="8136567"/>
+                <a:chOff x="4608272" y="206982"/>
+                <a:chExt cx="6028577" cy="6096000"/>
+              </a:xfrm>
+              <a:solidFill>
+                <a:schemeClr val="bg1"/>
+              </a:solidFill>
+            </p:grpSpPr>
+            <p:grpSp>
+              <p:nvGrpSpPr>
+                <p:cNvPr id="2" name="Group 1">
+                  <a:extLst>
+                    <a:ext uri="{FF2B5EF4-FFF2-40B4-BE49-F238E27FC236}">
+                      <a16:creationId xmlns:a16="http://schemas.microsoft.com/office/drawing/2014/main" id="{142F736F-0EFB-47EA-9775-101D6408E21F}"/>
+                    </a:ext>
+                  </a:extLst>
+                </p:cNvPr>
+                <p:cNvGrpSpPr/>
+                <p:nvPr/>
+              </p:nvGrpSpPr>
+              <p:grpSpPr>
+                <a:xfrm>
+                  <a:off x="4608272" y="206982"/>
+                  <a:ext cx="3027282" cy="6096000"/>
+                  <a:chOff x="7162880" y="206982"/>
+                  <a:chExt cx="3027282" cy="6096000"/>
+                </a:xfrm>
+                <a:grpFill/>
+              </p:grpSpPr>
+              <p:sp>
+                <p:nvSpPr>
+                  <p:cNvPr id="34" name="Rectangle 33">
+                    <a:extLst>
+                      <a:ext uri="{FF2B5EF4-FFF2-40B4-BE49-F238E27FC236}">
+                        <a16:creationId xmlns:a16="http://schemas.microsoft.com/office/drawing/2014/main" id="{8D382350-0104-480C-828B-B51DCDF1DFBB}"/>
+                      </a:ext>
+                    </a:extLst>
+                  </p:cNvPr>
+                  <p:cNvSpPr/>
+                  <p:nvPr/>
+                </p:nvSpPr>
+                <p:spPr>
+                  <a:xfrm>
+                    <a:off x="7924880" y="3254982"/>
+                    <a:ext cx="762000" cy="762000"/>
+                  </a:xfrm>
+                  <a:prstGeom prst="rect">
+                    <a:avLst/>
+                  </a:prstGeom>
+                  <a:grpFill/>
+                  <a:ln w="38100">
+                    <a:solidFill>
+                      <a:schemeClr val="accent4"/>
+                    </a:solidFill>
+                  </a:ln>
+                </p:spPr>
+                <p:style>
+                  <a:lnRef idx="2">
+                    <a:schemeClr val="accent1">
+                      <a:shade val="50000"/>
+                    </a:schemeClr>
+                  </a:lnRef>
+                  <a:fillRef idx="1">
+                    <a:schemeClr val="accent1"/>
+                  </a:fillRef>
+                  <a:effectRef idx="0">
+                    <a:schemeClr val="accent1"/>
+                  </a:effectRef>
+                  <a:fontRef idx="minor">
+                    <a:schemeClr val="lt1"/>
+                  </a:fontRef>
+                </p:style>
+                <p:txBody>
+                  <a:bodyPr rtlCol="0" anchor="ctr"/>
+                  <a:lstStyle/>
+                  <a:p>
+                    <a:pPr algn="ctr"/>
+                    <a:endParaRPr lang="pt-PT"/>
+                  </a:p>
+                </p:txBody>
+              </p:sp>
+              <p:sp>
+                <p:nvSpPr>
+                  <p:cNvPr id="35" name="Rectangle 34">
+                    <a:extLst>
+                      <a:ext uri="{FF2B5EF4-FFF2-40B4-BE49-F238E27FC236}">
+                        <a16:creationId xmlns:a16="http://schemas.microsoft.com/office/drawing/2014/main" id="{F897932E-3AFA-42DC-B0D0-107E0FF63B7F}"/>
+                      </a:ext>
+                    </a:extLst>
+                  </p:cNvPr>
+                  <p:cNvSpPr/>
+                  <p:nvPr/>
+                </p:nvSpPr>
+                <p:spPr>
+                  <a:xfrm>
+                    <a:off x="7924880" y="4016982"/>
+                    <a:ext cx="762000" cy="762000"/>
+                  </a:xfrm>
+                  <a:prstGeom prst="rect">
+                    <a:avLst/>
+                  </a:prstGeom>
+                  <a:grpFill/>
+                  <a:ln w="38100">
+                    <a:solidFill>
+                      <a:schemeClr val="accent4"/>
+                    </a:solidFill>
+                  </a:ln>
+                </p:spPr>
+                <p:style>
+                  <a:lnRef idx="2">
+                    <a:schemeClr val="accent1">
+                      <a:shade val="50000"/>
+                    </a:schemeClr>
+                  </a:lnRef>
+                  <a:fillRef idx="1">
+                    <a:schemeClr val="accent1"/>
+                  </a:fillRef>
+                  <a:effectRef idx="0">
+                    <a:schemeClr val="accent1"/>
+                  </a:effectRef>
+                  <a:fontRef idx="minor">
+                    <a:schemeClr val="lt1"/>
+                  </a:fontRef>
+                </p:style>
+                <p:txBody>
+                  <a:bodyPr rtlCol="0" anchor="ctr"/>
+                  <a:lstStyle/>
+                  <a:p>
+                    <a:pPr algn="ctr"/>
+                    <a:endParaRPr lang="pt-PT"/>
+                  </a:p>
+                </p:txBody>
+              </p:sp>
+              <p:sp>
+                <p:nvSpPr>
+                  <p:cNvPr id="38" name="Rectangle 37">
+                    <a:extLst>
+                      <a:ext uri="{FF2B5EF4-FFF2-40B4-BE49-F238E27FC236}">
+                        <a16:creationId xmlns:a16="http://schemas.microsoft.com/office/drawing/2014/main" id="{C64D7C50-6CC9-4035-A784-4D715FDC30EF}"/>
+                      </a:ext>
+                    </a:extLst>
+                  </p:cNvPr>
+                  <p:cNvSpPr/>
+                  <p:nvPr/>
+                </p:nvSpPr>
+                <p:spPr>
+                  <a:xfrm>
+                    <a:off x="7924880" y="4778982"/>
+                    <a:ext cx="762000" cy="762000"/>
+                  </a:xfrm>
+                  <a:prstGeom prst="rect">
+                    <a:avLst/>
+                  </a:prstGeom>
+                  <a:grpFill/>
+                  <a:ln w="38100">
+                    <a:solidFill>
+                      <a:schemeClr val="accent4"/>
+                    </a:solidFill>
+                  </a:ln>
+                </p:spPr>
+                <p:style>
+                  <a:lnRef idx="2">
+                    <a:schemeClr val="accent1">
+                      <a:shade val="50000"/>
+                    </a:schemeClr>
+                  </a:lnRef>
+                  <a:fillRef idx="1">
+                    <a:schemeClr val="accent1"/>
+                  </a:fillRef>
+                  <a:effectRef idx="0">
+                    <a:schemeClr val="accent1"/>
+                  </a:effectRef>
+                  <a:fontRef idx="minor">
+                    <a:schemeClr val="lt1"/>
+                  </a:fontRef>
+                </p:style>
+                <p:txBody>
+                  <a:bodyPr rtlCol="0" anchor="ctr"/>
+                  <a:lstStyle/>
+                  <a:p>
+                    <a:pPr algn="ctr"/>
+                    <a:endParaRPr lang="pt-PT"/>
+                  </a:p>
+                </p:txBody>
+              </p:sp>
+              <p:sp>
+                <p:nvSpPr>
+                  <p:cNvPr id="39" name="Rectangle 38">
+                    <a:extLst>
+                      <a:ext uri="{FF2B5EF4-FFF2-40B4-BE49-F238E27FC236}">
+                        <a16:creationId xmlns:a16="http://schemas.microsoft.com/office/drawing/2014/main" id="{67350C3C-5DBD-4D15-AD56-BEDA856F99F3}"/>
+                      </a:ext>
+                    </a:extLst>
+                  </p:cNvPr>
+                  <p:cNvSpPr/>
+                  <p:nvPr/>
+                </p:nvSpPr>
+                <p:spPr>
+                  <a:xfrm>
+                    <a:off x="7924880" y="5540982"/>
+                    <a:ext cx="762000" cy="762000"/>
+                  </a:xfrm>
+                  <a:prstGeom prst="rect">
+                    <a:avLst/>
+                  </a:prstGeom>
+                  <a:grpFill/>
+                  <a:ln w="38100">
+                    <a:solidFill>
+                      <a:schemeClr val="accent4"/>
+                    </a:solidFill>
+                  </a:ln>
+                </p:spPr>
+                <p:style>
+                  <a:lnRef idx="2">
+                    <a:schemeClr val="accent1">
+                      <a:shade val="50000"/>
+                    </a:schemeClr>
+                  </a:lnRef>
+                  <a:fillRef idx="1">
+                    <a:schemeClr val="accent1"/>
+                  </a:fillRef>
+                  <a:effectRef idx="0">
+                    <a:schemeClr val="accent1"/>
+                  </a:effectRef>
+                  <a:fontRef idx="minor">
+                    <a:schemeClr val="lt1"/>
+                  </a:fontRef>
+                </p:style>
+                <p:txBody>
+                  <a:bodyPr rtlCol="0" anchor="ctr"/>
+                  <a:lstStyle/>
+                  <a:p>
+                    <a:pPr algn="ctr"/>
+                    <a:endParaRPr lang="pt-PT"/>
+                  </a:p>
+                </p:txBody>
+              </p:sp>
+              <p:sp>
+                <p:nvSpPr>
+                  <p:cNvPr id="40" name="Rectangle 39">
+                    <a:extLst>
+                      <a:ext uri="{FF2B5EF4-FFF2-40B4-BE49-F238E27FC236}">
+                        <a16:creationId xmlns:a16="http://schemas.microsoft.com/office/drawing/2014/main" id="{E00B65AB-3728-4F9B-A25B-665D9A7195FF}"/>
+                      </a:ext>
+                    </a:extLst>
+                  </p:cNvPr>
+                  <p:cNvSpPr/>
+                  <p:nvPr/>
+                </p:nvSpPr>
+                <p:spPr>
+                  <a:xfrm>
+                    <a:off x="7162880" y="3254982"/>
+                    <a:ext cx="762000" cy="762000"/>
+                  </a:xfrm>
+                  <a:prstGeom prst="rect">
+                    <a:avLst/>
+                  </a:prstGeom>
+                  <a:grpFill/>
+                  <a:ln w="38100">
+                    <a:solidFill>
+                      <a:schemeClr val="accent4"/>
+                    </a:solidFill>
+                  </a:ln>
+                </p:spPr>
+                <p:style>
+                  <a:lnRef idx="2">
+                    <a:schemeClr val="accent1">
+                      <a:shade val="50000"/>
+                    </a:schemeClr>
+                  </a:lnRef>
+                  <a:fillRef idx="1">
+                    <a:schemeClr val="accent1"/>
+                  </a:fillRef>
+                  <a:effectRef idx="0">
+                    <a:schemeClr val="accent1"/>
+                  </a:effectRef>
+                  <a:fontRef idx="minor">
+                    <a:schemeClr val="lt1"/>
+                  </a:fontRef>
+                </p:style>
+                <p:txBody>
+                  <a:bodyPr rtlCol="0" anchor="ctr"/>
+                  <a:lstStyle/>
+                  <a:p>
+                    <a:pPr algn="ctr"/>
+                    <a:endParaRPr lang="pt-PT"/>
+                  </a:p>
+                </p:txBody>
+              </p:sp>
+              <p:sp>
+                <p:nvSpPr>
+                  <p:cNvPr id="41" name="Rectangle 40">
+                    <a:extLst>
+                      <a:ext uri="{FF2B5EF4-FFF2-40B4-BE49-F238E27FC236}">
+                        <a16:creationId xmlns:a16="http://schemas.microsoft.com/office/drawing/2014/main" id="{BBFCB338-A6DE-4E44-9AE8-92E36A550FA4}"/>
+                      </a:ext>
+                    </a:extLst>
+                  </p:cNvPr>
+                  <p:cNvSpPr/>
+                  <p:nvPr/>
+                </p:nvSpPr>
+                <p:spPr>
+                  <a:xfrm>
+                    <a:off x="7162880" y="4016982"/>
+                    <a:ext cx="762000" cy="762000"/>
+                  </a:xfrm>
+                  <a:prstGeom prst="rect">
+                    <a:avLst/>
+                  </a:prstGeom>
+                  <a:grpFill/>
+                  <a:ln w="38100">
+                    <a:solidFill>
+                      <a:schemeClr val="accent4"/>
+                    </a:solidFill>
+                  </a:ln>
+                </p:spPr>
+                <p:style>
+                  <a:lnRef idx="2">
+                    <a:schemeClr val="accent1">
+                      <a:shade val="50000"/>
+                    </a:schemeClr>
+                  </a:lnRef>
+                  <a:fillRef idx="1">
+                    <a:schemeClr val="accent1"/>
+                  </a:fillRef>
+                  <a:effectRef idx="0">
+                    <a:schemeClr val="accent1"/>
+                  </a:effectRef>
+                  <a:fontRef idx="minor">
+                    <a:schemeClr val="lt1"/>
+                  </a:fontRef>
+                </p:style>
+                <p:txBody>
+                  <a:bodyPr rtlCol="0" anchor="ctr"/>
+                  <a:lstStyle/>
+                  <a:p>
+                    <a:pPr algn="ctr"/>
+                    <a:endParaRPr lang="pt-PT"/>
+                  </a:p>
+                </p:txBody>
+              </p:sp>
+              <p:sp>
+                <p:nvSpPr>
+                  <p:cNvPr id="44" name="Rectangle 43">
+                    <a:extLst>
+                      <a:ext uri="{FF2B5EF4-FFF2-40B4-BE49-F238E27FC236}">
+                        <a16:creationId xmlns:a16="http://schemas.microsoft.com/office/drawing/2014/main" id="{ECF0AC2E-E672-4202-B79B-78E8417E39B5}"/>
+                      </a:ext>
+                    </a:extLst>
+                  </p:cNvPr>
+                  <p:cNvSpPr/>
+                  <p:nvPr/>
+                </p:nvSpPr>
+                <p:spPr>
+                  <a:xfrm>
+                    <a:off x="7162880" y="4778982"/>
+                    <a:ext cx="762000" cy="762000"/>
+                  </a:xfrm>
+                  <a:prstGeom prst="rect">
+                    <a:avLst/>
+                  </a:prstGeom>
+                  <a:grpFill/>
+                  <a:ln w="38100">
+                    <a:solidFill>
+                      <a:schemeClr val="accent4"/>
+                    </a:solidFill>
+                  </a:ln>
+                </p:spPr>
+                <p:style>
+                  <a:lnRef idx="2">
+                    <a:schemeClr val="accent1">
+                      <a:shade val="50000"/>
+                    </a:schemeClr>
+                  </a:lnRef>
+                  <a:fillRef idx="1">
+                    <a:schemeClr val="accent1"/>
+                  </a:fillRef>
+                  <a:effectRef idx="0">
+                    <a:schemeClr val="accent1"/>
+                  </a:effectRef>
+                  <a:fontRef idx="minor">
+                    <a:schemeClr val="lt1"/>
+                  </a:fontRef>
+                </p:style>
+                <p:txBody>
+                  <a:bodyPr rtlCol="0" anchor="ctr"/>
+                  <a:lstStyle/>
+                  <a:p>
+                    <a:pPr algn="ctr"/>
+                    <a:endParaRPr lang="pt-PT"/>
+                  </a:p>
+                </p:txBody>
+              </p:sp>
+              <p:sp>
+                <p:nvSpPr>
+                  <p:cNvPr id="45" name="Rectangle 44">
+                    <a:extLst>
+                      <a:ext uri="{FF2B5EF4-FFF2-40B4-BE49-F238E27FC236}">
+                        <a16:creationId xmlns:a16="http://schemas.microsoft.com/office/drawing/2014/main" id="{88396458-AE2A-44F7-9C1F-E6678F123E40}"/>
+                      </a:ext>
+                    </a:extLst>
+                  </p:cNvPr>
+                  <p:cNvSpPr/>
+                  <p:nvPr/>
+                </p:nvSpPr>
+                <p:spPr>
+                  <a:xfrm>
+                    <a:off x="7162880" y="5540982"/>
+                    <a:ext cx="762000" cy="762000"/>
+                  </a:xfrm>
+                  <a:prstGeom prst="rect">
+                    <a:avLst/>
+                  </a:prstGeom>
+                  <a:grpFill/>
+                  <a:ln w="38100">
+                    <a:solidFill>
+                      <a:schemeClr val="accent4"/>
+                    </a:solidFill>
+                  </a:ln>
+                </p:spPr>
+                <p:style>
+                  <a:lnRef idx="2">
+                    <a:schemeClr val="accent1">
+                      <a:shade val="50000"/>
+                    </a:schemeClr>
+                  </a:lnRef>
+                  <a:fillRef idx="1">
+                    <a:schemeClr val="accent1"/>
+                  </a:fillRef>
+                  <a:effectRef idx="0">
+                    <a:schemeClr val="accent1"/>
+                  </a:effectRef>
+                  <a:fontRef idx="minor">
+                    <a:schemeClr val="lt1"/>
+                  </a:fontRef>
+                </p:style>
+                <p:txBody>
+                  <a:bodyPr rtlCol="0" anchor="ctr"/>
+                  <a:lstStyle/>
+                  <a:p>
+                    <a:pPr algn="ctr"/>
+                    <a:endParaRPr lang="pt-PT"/>
+                  </a:p>
+                </p:txBody>
+              </p:sp>
+              <p:sp>
+                <p:nvSpPr>
+                  <p:cNvPr id="61" name="Rectangle 60">
+                    <a:extLst>
+                      <a:ext uri="{FF2B5EF4-FFF2-40B4-BE49-F238E27FC236}">
+                        <a16:creationId xmlns:a16="http://schemas.microsoft.com/office/drawing/2014/main" id="{84D0F51C-BD37-46C3-8D7F-D881865DCE5C}"/>
+                      </a:ext>
+                    </a:extLst>
+                  </p:cNvPr>
+                  <p:cNvSpPr/>
+                  <p:nvPr/>
+                </p:nvSpPr>
+                <p:spPr>
+                  <a:xfrm>
+                    <a:off x="7924880" y="206982"/>
+                    <a:ext cx="762000" cy="762000"/>
+                  </a:xfrm>
+                  <a:prstGeom prst="rect">
+                    <a:avLst/>
+                  </a:prstGeom>
+                  <a:grpFill/>
+                  <a:ln w="38100">
+                    <a:solidFill>
+                      <a:schemeClr val="accent4"/>
+                    </a:solidFill>
+                  </a:ln>
+                </p:spPr>
+                <p:style>
+                  <a:lnRef idx="2">
+                    <a:schemeClr val="accent1">
+                      <a:shade val="50000"/>
+                    </a:schemeClr>
+                  </a:lnRef>
+                  <a:fillRef idx="1">
+                    <a:schemeClr val="accent1"/>
+                  </a:fillRef>
+                  <a:effectRef idx="0">
+                    <a:schemeClr val="accent1"/>
+                  </a:effectRef>
+                  <a:fontRef idx="minor">
+                    <a:schemeClr val="lt1"/>
+                  </a:fontRef>
+                </p:style>
+                <p:txBody>
+                  <a:bodyPr rtlCol="0" anchor="ctr"/>
+                  <a:lstStyle/>
+                  <a:p>
+                    <a:pPr algn="ctr"/>
+                    <a:endParaRPr lang="pt-PT"/>
+                  </a:p>
+                </p:txBody>
+              </p:sp>
+              <p:sp>
+                <p:nvSpPr>
+                  <p:cNvPr id="64" name="Rectangle 63">
+                    <a:extLst>
+                      <a:ext uri="{FF2B5EF4-FFF2-40B4-BE49-F238E27FC236}">
+                        <a16:creationId xmlns:a16="http://schemas.microsoft.com/office/drawing/2014/main" id="{98FA8CA4-DE4A-4FE9-8687-263B95B14C02}"/>
+                      </a:ext>
+                    </a:extLst>
+                  </p:cNvPr>
+                  <p:cNvSpPr/>
+                  <p:nvPr/>
+                </p:nvSpPr>
+                <p:spPr>
+                  <a:xfrm>
+                    <a:off x="7924880" y="968982"/>
+                    <a:ext cx="762000" cy="762000"/>
+                  </a:xfrm>
+                  <a:prstGeom prst="rect">
+                    <a:avLst/>
+                  </a:prstGeom>
+                  <a:grpFill/>
+                  <a:ln w="38100">
+                    <a:solidFill>
+                      <a:schemeClr val="accent4"/>
+                    </a:solidFill>
+                  </a:ln>
+                </p:spPr>
+                <p:style>
+                  <a:lnRef idx="2">
+                    <a:schemeClr val="accent1">
+                      <a:shade val="50000"/>
+                    </a:schemeClr>
+                  </a:lnRef>
+                  <a:fillRef idx="1">
+                    <a:schemeClr val="accent1"/>
+                  </a:fillRef>
+                  <a:effectRef idx="0">
+                    <a:schemeClr val="accent1"/>
+                  </a:effectRef>
+                  <a:fontRef idx="minor">
+                    <a:schemeClr val="lt1"/>
+                  </a:fontRef>
+                </p:style>
+                <p:txBody>
+                  <a:bodyPr rtlCol="0" anchor="ctr"/>
+                  <a:lstStyle/>
+                  <a:p>
+                    <a:pPr algn="ctr"/>
+                    <a:endParaRPr lang="pt-PT"/>
+                  </a:p>
+                </p:txBody>
+              </p:sp>
+              <p:sp>
+                <p:nvSpPr>
+                  <p:cNvPr id="65" name="Rectangle 64">
+                    <a:extLst>
+                      <a:ext uri="{FF2B5EF4-FFF2-40B4-BE49-F238E27FC236}">
+                        <a16:creationId xmlns:a16="http://schemas.microsoft.com/office/drawing/2014/main" id="{B6E509D6-E01E-4959-93F1-685397C5BCB1}"/>
+                      </a:ext>
+                    </a:extLst>
+                  </p:cNvPr>
+                  <p:cNvSpPr/>
+                  <p:nvPr/>
+                </p:nvSpPr>
+                <p:spPr>
+                  <a:xfrm>
+                    <a:off x="7924880" y="1730982"/>
+                    <a:ext cx="762000" cy="762000"/>
+                  </a:xfrm>
+                  <a:prstGeom prst="rect">
+                    <a:avLst/>
+                  </a:prstGeom>
+                  <a:grpFill/>
+                  <a:ln w="38100">
+                    <a:solidFill>
+                      <a:schemeClr val="accent4"/>
+                    </a:solidFill>
+                  </a:ln>
+                </p:spPr>
+                <p:style>
+                  <a:lnRef idx="2">
+                    <a:schemeClr val="accent1">
+                      <a:shade val="50000"/>
+                    </a:schemeClr>
+                  </a:lnRef>
+                  <a:fillRef idx="1">
+                    <a:schemeClr val="accent1"/>
+                  </a:fillRef>
+                  <a:effectRef idx="0">
+                    <a:schemeClr val="accent1"/>
+                  </a:effectRef>
+                  <a:fontRef idx="minor">
+                    <a:schemeClr val="lt1"/>
+                  </a:fontRef>
+                </p:style>
+                <p:txBody>
+                  <a:bodyPr rtlCol="0" anchor="ctr"/>
+                  <a:lstStyle/>
+                  <a:p>
+                    <a:pPr algn="ctr"/>
+                    <a:endParaRPr lang="pt-PT"/>
+                  </a:p>
+                </p:txBody>
+              </p:sp>
+              <p:sp>
+                <p:nvSpPr>
+                  <p:cNvPr id="67" name="Rectangle 66">
+                    <a:extLst>
+                      <a:ext uri="{FF2B5EF4-FFF2-40B4-BE49-F238E27FC236}">
+                        <a16:creationId xmlns:a16="http://schemas.microsoft.com/office/drawing/2014/main" id="{9533336E-645C-4ACA-AEDF-887281445B7B}"/>
+                      </a:ext>
+                    </a:extLst>
+                  </p:cNvPr>
+                  <p:cNvSpPr/>
+                  <p:nvPr/>
+                </p:nvSpPr>
+                <p:spPr>
+                  <a:xfrm>
+                    <a:off x="7162880" y="206982"/>
+                    <a:ext cx="762000" cy="762000"/>
+                  </a:xfrm>
+                  <a:prstGeom prst="rect">
+                    <a:avLst/>
+                  </a:prstGeom>
+                  <a:grpFill/>
+                  <a:ln w="38100">
+                    <a:solidFill>
+                      <a:schemeClr val="accent4"/>
+                    </a:solidFill>
+                  </a:ln>
+                </p:spPr>
+                <p:style>
+                  <a:lnRef idx="2">
+                    <a:schemeClr val="accent1">
+                      <a:shade val="50000"/>
+                    </a:schemeClr>
+                  </a:lnRef>
+                  <a:fillRef idx="1">
+                    <a:schemeClr val="accent1"/>
+                  </a:fillRef>
+                  <a:effectRef idx="0">
+                    <a:schemeClr val="accent1"/>
+                  </a:effectRef>
+                  <a:fontRef idx="minor">
+                    <a:schemeClr val="lt1"/>
+                  </a:fontRef>
+                </p:style>
+                <p:txBody>
+                  <a:bodyPr rtlCol="0" anchor="ctr"/>
+                  <a:lstStyle/>
+                  <a:p>
+                    <a:pPr algn="ctr"/>
+                    <a:endParaRPr lang="pt-PT"/>
+                  </a:p>
+                </p:txBody>
+              </p:sp>
+              <p:sp>
+                <p:nvSpPr>
+                  <p:cNvPr id="70" name="Rectangle 69">
+                    <a:extLst>
+                      <a:ext uri="{FF2B5EF4-FFF2-40B4-BE49-F238E27FC236}">
+                        <a16:creationId xmlns:a16="http://schemas.microsoft.com/office/drawing/2014/main" id="{7F6B561F-17C5-4B16-A641-ADDF4C867680}"/>
+                      </a:ext>
+                    </a:extLst>
+                  </p:cNvPr>
+                  <p:cNvSpPr/>
+                  <p:nvPr/>
+                </p:nvSpPr>
+                <p:spPr>
+                  <a:xfrm>
+                    <a:off x="7162880" y="968982"/>
+                    <a:ext cx="762000" cy="762000"/>
+                  </a:xfrm>
+                  <a:prstGeom prst="rect">
+                    <a:avLst/>
+                  </a:prstGeom>
+                  <a:grpFill/>
+                  <a:ln w="38100">
+                    <a:solidFill>
+                      <a:schemeClr val="accent4"/>
+                    </a:solidFill>
+                  </a:ln>
+                </p:spPr>
+                <p:style>
+                  <a:lnRef idx="2">
+                    <a:schemeClr val="accent1">
+                      <a:shade val="50000"/>
+                    </a:schemeClr>
+                  </a:lnRef>
+                  <a:fillRef idx="1">
+                    <a:schemeClr val="accent1"/>
+                  </a:fillRef>
+                  <a:effectRef idx="0">
+                    <a:schemeClr val="accent1"/>
+                  </a:effectRef>
+                  <a:fontRef idx="minor">
+                    <a:schemeClr val="lt1"/>
+                  </a:fontRef>
+                </p:style>
+                <p:txBody>
+                  <a:bodyPr rtlCol="0" anchor="ctr"/>
+                  <a:lstStyle/>
+                  <a:p>
+                    <a:pPr algn="ctr"/>
+                    <a:endParaRPr lang="pt-PT"/>
+                  </a:p>
+                </p:txBody>
+              </p:sp>
+              <p:sp>
+                <p:nvSpPr>
+                  <p:cNvPr id="71" name="Rectangle 70">
+                    <a:extLst>
+                      <a:ext uri="{FF2B5EF4-FFF2-40B4-BE49-F238E27FC236}">
+                        <a16:creationId xmlns:a16="http://schemas.microsoft.com/office/drawing/2014/main" id="{317BF6A6-2600-4C52-808C-C47F3E15D655}"/>
+                      </a:ext>
+                    </a:extLst>
+                  </p:cNvPr>
+                  <p:cNvSpPr/>
+                  <p:nvPr/>
+                </p:nvSpPr>
+                <p:spPr>
+                  <a:xfrm>
+                    <a:off x="7162880" y="1730982"/>
+                    <a:ext cx="762000" cy="762000"/>
+                  </a:xfrm>
+                  <a:prstGeom prst="rect">
+                    <a:avLst/>
+                  </a:prstGeom>
+                  <a:grpFill/>
+                  <a:ln w="38100">
+                    <a:solidFill>
+                      <a:schemeClr val="accent4"/>
+                    </a:solidFill>
+                  </a:ln>
+                </p:spPr>
+                <p:style>
+                  <a:lnRef idx="2">
+                    <a:schemeClr val="accent1">
+                      <a:shade val="50000"/>
+                    </a:schemeClr>
+                  </a:lnRef>
+                  <a:fillRef idx="1">
+                    <a:schemeClr val="accent1"/>
+                  </a:fillRef>
+                  <a:effectRef idx="0">
+                    <a:schemeClr val="accent1"/>
+                  </a:effectRef>
+                  <a:fontRef idx="minor">
+                    <a:schemeClr val="lt1"/>
+                  </a:fontRef>
+                </p:style>
+                <p:txBody>
+                  <a:bodyPr rtlCol="0" anchor="ctr"/>
+                  <a:lstStyle/>
+                  <a:p>
+                    <a:pPr algn="ctr"/>
+                    <a:endParaRPr lang="pt-PT"/>
+                  </a:p>
+                </p:txBody>
+              </p:sp>
+              <p:sp>
+                <p:nvSpPr>
+                  <p:cNvPr id="75" name="Rectangle 74">
+                    <a:extLst>
+                      <a:ext uri="{FF2B5EF4-FFF2-40B4-BE49-F238E27FC236}">
+                        <a16:creationId xmlns:a16="http://schemas.microsoft.com/office/drawing/2014/main" id="{84B2534D-0B45-44E3-9FD9-512B1C0D9B83}"/>
+                      </a:ext>
+                    </a:extLst>
+                  </p:cNvPr>
+                  <p:cNvSpPr/>
+                  <p:nvPr/>
+                </p:nvSpPr>
+                <p:spPr>
+                  <a:xfrm>
+                    <a:off x="7924880" y="2492982"/>
+                    <a:ext cx="762000" cy="762000"/>
+                  </a:xfrm>
+                  <a:prstGeom prst="rect">
+                    <a:avLst/>
+                  </a:prstGeom>
+                  <a:grpFill/>
+                  <a:ln w="38100">
+                    <a:solidFill>
+                      <a:schemeClr val="accent4"/>
+                    </a:solidFill>
+                  </a:ln>
+                </p:spPr>
+                <p:style>
+                  <a:lnRef idx="2">
+                    <a:schemeClr val="accent1">
+                      <a:shade val="50000"/>
+                    </a:schemeClr>
+                  </a:lnRef>
+                  <a:fillRef idx="1">
+                    <a:schemeClr val="accent1"/>
+                  </a:fillRef>
+                  <a:effectRef idx="0">
+                    <a:schemeClr val="accent1"/>
+                  </a:effectRef>
+                  <a:fontRef idx="minor">
+                    <a:schemeClr val="lt1"/>
+                  </a:fontRef>
+                </p:style>
+                <p:txBody>
+                  <a:bodyPr rtlCol="0" anchor="ctr"/>
+                  <a:lstStyle/>
+                  <a:p>
+                    <a:pPr algn="ctr"/>
+                    <a:endParaRPr lang="pt-PT"/>
+                  </a:p>
+                </p:txBody>
+              </p:sp>
+              <p:sp>
+                <p:nvSpPr>
+                  <p:cNvPr id="76" name="Rectangle 75">
+                    <a:extLst>
+                      <a:ext uri="{FF2B5EF4-FFF2-40B4-BE49-F238E27FC236}">
+                        <a16:creationId xmlns:a16="http://schemas.microsoft.com/office/drawing/2014/main" id="{9017CD8C-10BF-45C5-BB0D-E7CA097D8FA0}"/>
+                      </a:ext>
+                    </a:extLst>
+                  </p:cNvPr>
+                  <p:cNvSpPr/>
+                  <p:nvPr/>
+                </p:nvSpPr>
+                <p:spPr>
+                  <a:xfrm>
+                    <a:off x="7162880" y="2492982"/>
+                    <a:ext cx="762000" cy="762000"/>
+                  </a:xfrm>
+                  <a:prstGeom prst="rect">
+                    <a:avLst/>
+                  </a:prstGeom>
+                  <a:grpFill/>
+                  <a:ln w="38100">
+                    <a:solidFill>
+                      <a:schemeClr val="accent4"/>
+                    </a:solidFill>
+                  </a:ln>
+                </p:spPr>
+                <p:style>
+                  <a:lnRef idx="2">
+                    <a:schemeClr val="accent1">
+                      <a:shade val="50000"/>
+                    </a:schemeClr>
+                  </a:lnRef>
+                  <a:fillRef idx="1">
+                    <a:schemeClr val="accent1"/>
+                  </a:fillRef>
+                  <a:effectRef idx="0">
+                    <a:schemeClr val="accent1"/>
+                  </a:effectRef>
+                  <a:fontRef idx="minor">
+                    <a:schemeClr val="lt1"/>
+                  </a:fontRef>
+                </p:style>
+                <p:txBody>
+                  <a:bodyPr rtlCol="0" anchor="ctr"/>
+                  <a:lstStyle/>
+                  <a:p>
+                    <a:pPr algn="ctr"/>
+                    <a:endParaRPr lang="pt-PT"/>
+                  </a:p>
+                </p:txBody>
+              </p:sp>
+              <p:sp>
+                <p:nvSpPr>
+                  <p:cNvPr id="687" name="Rectangle 686">
+                    <a:extLst>
+                      <a:ext uri="{FF2B5EF4-FFF2-40B4-BE49-F238E27FC236}">
+                        <a16:creationId xmlns:a16="http://schemas.microsoft.com/office/drawing/2014/main" id="{8F5A7AAB-EC98-4453-87A8-D6D55C281CBD}"/>
+                      </a:ext>
+                    </a:extLst>
+                  </p:cNvPr>
+                  <p:cNvSpPr/>
+                  <p:nvPr/>
+                </p:nvSpPr>
+                <p:spPr>
+                  <a:xfrm flipH="1">
+                    <a:off x="8666162" y="3254982"/>
+                    <a:ext cx="762000" cy="762000"/>
+                  </a:xfrm>
+                  <a:prstGeom prst="rect">
+                    <a:avLst/>
+                  </a:prstGeom>
+                  <a:grpFill/>
+                  <a:ln w="38100">
+                    <a:solidFill>
+                      <a:schemeClr val="accent4"/>
+                    </a:solidFill>
+                  </a:ln>
+                </p:spPr>
+                <p:style>
+                  <a:lnRef idx="2">
+                    <a:schemeClr val="accent1">
+                      <a:shade val="50000"/>
+                    </a:schemeClr>
+                  </a:lnRef>
+                  <a:fillRef idx="1">
+                    <a:schemeClr val="accent1"/>
+                  </a:fillRef>
+                  <a:effectRef idx="0">
+                    <a:schemeClr val="accent1"/>
+                  </a:effectRef>
+                  <a:fontRef idx="minor">
+                    <a:schemeClr val="lt1"/>
+                  </a:fontRef>
+                </p:style>
+                <p:txBody>
+                  <a:bodyPr rtlCol="0" anchor="ctr"/>
+                  <a:lstStyle/>
+                  <a:p>
+                    <a:pPr algn="ctr"/>
+                    <a:endParaRPr lang="pt-PT"/>
+                  </a:p>
+                </p:txBody>
+              </p:sp>
+              <p:sp>
+                <p:nvSpPr>
+                  <p:cNvPr id="688" name="Rectangle 687">
+                    <a:extLst>
+                      <a:ext uri="{FF2B5EF4-FFF2-40B4-BE49-F238E27FC236}">
+                        <a16:creationId xmlns:a16="http://schemas.microsoft.com/office/drawing/2014/main" id="{E0C33112-F1F9-4561-9E89-183484EEA7C4}"/>
+                      </a:ext>
+                    </a:extLst>
+                  </p:cNvPr>
+                  <p:cNvSpPr/>
+                  <p:nvPr/>
+                </p:nvSpPr>
+                <p:spPr>
+                  <a:xfrm flipH="1">
+                    <a:off x="8666162" y="4016982"/>
+                    <a:ext cx="762000" cy="762000"/>
+                  </a:xfrm>
+                  <a:prstGeom prst="rect">
+                    <a:avLst/>
+                  </a:prstGeom>
+                  <a:grpFill/>
+                  <a:ln w="38100">
+                    <a:solidFill>
+                      <a:schemeClr val="accent4"/>
+                    </a:solidFill>
+                  </a:ln>
+                </p:spPr>
+                <p:style>
+                  <a:lnRef idx="2">
+                    <a:schemeClr val="accent1">
+                      <a:shade val="50000"/>
+                    </a:schemeClr>
+                  </a:lnRef>
+                  <a:fillRef idx="1">
+                    <a:schemeClr val="accent1"/>
+                  </a:fillRef>
+                  <a:effectRef idx="0">
+                    <a:schemeClr val="accent1"/>
+                  </a:effectRef>
+                  <a:fontRef idx="minor">
+                    <a:schemeClr val="lt1"/>
+                  </a:fontRef>
+                </p:style>
+                <p:txBody>
+                  <a:bodyPr rtlCol="0" anchor="ctr"/>
+                  <a:lstStyle/>
+                  <a:p>
+                    <a:pPr algn="ctr"/>
+                    <a:endParaRPr lang="pt-PT"/>
+                  </a:p>
+                </p:txBody>
+              </p:sp>
+              <p:sp>
+                <p:nvSpPr>
+                  <p:cNvPr id="691" name="Rectangle 690">
+                    <a:extLst>
+                      <a:ext uri="{FF2B5EF4-FFF2-40B4-BE49-F238E27FC236}">
+                        <a16:creationId xmlns:a16="http://schemas.microsoft.com/office/drawing/2014/main" id="{CEE67627-C697-4DD8-875C-BB76E7756C40}"/>
+                      </a:ext>
+                    </a:extLst>
+                  </p:cNvPr>
+                  <p:cNvSpPr/>
+                  <p:nvPr/>
+                </p:nvSpPr>
+                <p:spPr>
+                  <a:xfrm flipH="1">
+                    <a:off x="8666162" y="4778982"/>
+                    <a:ext cx="762000" cy="762000"/>
+                  </a:xfrm>
+                  <a:prstGeom prst="rect">
+                    <a:avLst/>
+                  </a:prstGeom>
+                  <a:grpFill/>
+                  <a:ln w="38100">
+                    <a:solidFill>
+                      <a:schemeClr val="accent4"/>
+                    </a:solidFill>
+                  </a:ln>
+                </p:spPr>
+                <p:style>
+                  <a:lnRef idx="2">
+                    <a:schemeClr val="accent1">
+                      <a:shade val="50000"/>
+                    </a:schemeClr>
+                  </a:lnRef>
+                  <a:fillRef idx="1">
+                    <a:schemeClr val="accent1"/>
+                  </a:fillRef>
+                  <a:effectRef idx="0">
+                    <a:schemeClr val="accent1"/>
+                  </a:effectRef>
+                  <a:fontRef idx="minor">
+                    <a:schemeClr val="lt1"/>
+                  </a:fontRef>
+                </p:style>
+                <p:txBody>
+                  <a:bodyPr rtlCol="0" anchor="ctr"/>
+                  <a:lstStyle/>
+                  <a:p>
+                    <a:pPr algn="ctr"/>
+                    <a:endParaRPr lang="pt-PT"/>
+                  </a:p>
+                </p:txBody>
+              </p:sp>
+              <p:sp>
+                <p:nvSpPr>
+                  <p:cNvPr id="692" name="Rectangle 691">
+                    <a:extLst>
+                      <a:ext uri="{FF2B5EF4-FFF2-40B4-BE49-F238E27FC236}">
+                        <a16:creationId xmlns:a16="http://schemas.microsoft.com/office/drawing/2014/main" id="{F8038E57-24AF-4C71-A3B1-6AE9360C7B0F}"/>
+                      </a:ext>
+                    </a:extLst>
+                  </p:cNvPr>
+                  <p:cNvSpPr/>
+                  <p:nvPr/>
+                </p:nvSpPr>
+                <p:spPr>
+                  <a:xfrm flipH="1">
+                    <a:off x="8666162" y="5540982"/>
+                    <a:ext cx="762000" cy="762000"/>
+                  </a:xfrm>
+                  <a:prstGeom prst="rect">
+                    <a:avLst/>
+                  </a:prstGeom>
+                  <a:grpFill/>
+                  <a:ln w="38100">
+                    <a:solidFill>
+                      <a:schemeClr val="accent4"/>
+                    </a:solidFill>
+                  </a:ln>
+                </p:spPr>
+                <p:style>
+                  <a:lnRef idx="2">
+                    <a:schemeClr val="accent1">
+                      <a:shade val="50000"/>
+                    </a:schemeClr>
+                  </a:lnRef>
+                  <a:fillRef idx="1">
+                    <a:schemeClr val="accent1"/>
+                  </a:fillRef>
+                  <a:effectRef idx="0">
+                    <a:schemeClr val="accent1"/>
+                  </a:effectRef>
+                  <a:fontRef idx="minor">
+                    <a:schemeClr val="lt1"/>
+                  </a:fontRef>
+                </p:style>
+                <p:txBody>
+                  <a:bodyPr rtlCol="0" anchor="ctr"/>
+                  <a:lstStyle/>
+                  <a:p>
+                    <a:pPr algn="ctr"/>
+                    <a:endParaRPr lang="pt-PT"/>
+                  </a:p>
+                </p:txBody>
+              </p:sp>
+              <p:sp>
+                <p:nvSpPr>
+                  <p:cNvPr id="693" name="Rectangle 692">
+                    <a:extLst>
+                      <a:ext uri="{FF2B5EF4-FFF2-40B4-BE49-F238E27FC236}">
+                        <a16:creationId xmlns:a16="http://schemas.microsoft.com/office/drawing/2014/main" id="{1E4E75BD-9E48-454A-A516-183D4B5D966E}"/>
+                      </a:ext>
+                    </a:extLst>
+                  </p:cNvPr>
+                  <p:cNvSpPr/>
+                  <p:nvPr/>
+                </p:nvSpPr>
+                <p:spPr>
+                  <a:xfrm flipH="1">
+                    <a:off x="9428162" y="3254982"/>
+                    <a:ext cx="762000" cy="762000"/>
+                  </a:xfrm>
+                  <a:prstGeom prst="rect">
+                    <a:avLst/>
+                  </a:prstGeom>
+                  <a:grpFill/>
+                  <a:ln w="38100">
+                    <a:solidFill>
+                      <a:schemeClr val="accent4"/>
+                    </a:solidFill>
+                  </a:ln>
+                </p:spPr>
+                <p:style>
+                  <a:lnRef idx="2">
+                    <a:schemeClr val="accent1">
+                      <a:shade val="50000"/>
+                    </a:schemeClr>
+                  </a:lnRef>
+                  <a:fillRef idx="1">
+                    <a:schemeClr val="accent1"/>
+                  </a:fillRef>
+                  <a:effectRef idx="0">
+                    <a:schemeClr val="accent1"/>
+                  </a:effectRef>
+                  <a:fontRef idx="minor">
+                    <a:schemeClr val="lt1"/>
+                  </a:fontRef>
+                </p:style>
+                <p:txBody>
+                  <a:bodyPr rtlCol="0" anchor="ctr"/>
+                  <a:lstStyle/>
+                  <a:p>
+                    <a:pPr algn="ctr"/>
+                    <a:endParaRPr lang="pt-PT"/>
+                  </a:p>
+                </p:txBody>
+              </p:sp>
+              <p:sp>
+                <p:nvSpPr>
+                  <p:cNvPr id="694" name="Rectangle 693">
+                    <a:extLst>
+                      <a:ext uri="{FF2B5EF4-FFF2-40B4-BE49-F238E27FC236}">
+                        <a16:creationId xmlns:a16="http://schemas.microsoft.com/office/drawing/2014/main" id="{E3FA8480-4912-43C2-8B91-26124C4DA4AC}"/>
+                      </a:ext>
+                    </a:extLst>
+                  </p:cNvPr>
+                  <p:cNvSpPr/>
+                  <p:nvPr/>
+                </p:nvSpPr>
+                <p:spPr>
+                  <a:xfrm flipH="1">
+                    <a:off x="9428162" y="4016982"/>
+                    <a:ext cx="762000" cy="762000"/>
+                  </a:xfrm>
+                  <a:prstGeom prst="rect">
+                    <a:avLst/>
+                  </a:prstGeom>
+                  <a:grpFill/>
+                  <a:ln w="38100">
+                    <a:solidFill>
+                      <a:schemeClr val="accent4"/>
+                    </a:solidFill>
+                  </a:ln>
+                </p:spPr>
+                <p:style>
+                  <a:lnRef idx="2">
+                    <a:schemeClr val="accent1">
+                      <a:shade val="50000"/>
+                    </a:schemeClr>
+                  </a:lnRef>
+                  <a:fillRef idx="1">
+                    <a:schemeClr val="accent1"/>
+                  </a:fillRef>
+                  <a:effectRef idx="0">
+                    <a:schemeClr val="accent1"/>
+                  </a:effectRef>
+                  <a:fontRef idx="minor">
+                    <a:schemeClr val="lt1"/>
+                  </a:fontRef>
+                </p:style>
+                <p:txBody>
+                  <a:bodyPr rtlCol="0" anchor="ctr"/>
+                  <a:lstStyle/>
+                  <a:p>
+                    <a:pPr algn="ctr"/>
+                    <a:endParaRPr lang="pt-PT"/>
+                  </a:p>
+                </p:txBody>
+              </p:sp>
+              <p:sp>
+                <p:nvSpPr>
+                  <p:cNvPr id="695" name="Rectangle 694">
+                    <a:extLst>
+                      <a:ext uri="{FF2B5EF4-FFF2-40B4-BE49-F238E27FC236}">
+                        <a16:creationId xmlns:a16="http://schemas.microsoft.com/office/drawing/2014/main" id="{7450E499-13B3-4FD9-AAF8-FA1355D189E9}"/>
+                      </a:ext>
+                    </a:extLst>
+                  </p:cNvPr>
+                  <p:cNvSpPr/>
+                  <p:nvPr/>
+                </p:nvSpPr>
+                <p:spPr>
+                  <a:xfrm flipH="1">
+                    <a:off x="9428162" y="4778982"/>
+                    <a:ext cx="762000" cy="762000"/>
+                  </a:xfrm>
+                  <a:prstGeom prst="rect">
+                    <a:avLst/>
+                  </a:prstGeom>
+                  <a:grpFill/>
+                  <a:ln w="38100">
+                    <a:solidFill>
+                      <a:schemeClr val="accent4"/>
+                    </a:solidFill>
+                  </a:ln>
+                </p:spPr>
+                <p:style>
+                  <a:lnRef idx="2">
+                    <a:schemeClr val="accent1">
+                      <a:shade val="50000"/>
+                    </a:schemeClr>
+                  </a:lnRef>
+                  <a:fillRef idx="1">
+                    <a:schemeClr val="accent1"/>
+                  </a:fillRef>
+                  <a:effectRef idx="0">
+                    <a:schemeClr val="accent1"/>
+                  </a:effectRef>
+                  <a:fontRef idx="minor">
+                    <a:schemeClr val="lt1"/>
+                  </a:fontRef>
+                </p:style>
+                <p:txBody>
+                  <a:bodyPr rtlCol="0" anchor="ctr"/>
+                  <a:lstStyle/>
+                  <a:p>
+                    <a:pPr algn="ctr"/>
+                    <a:endParaRPr lang="pt-PT"/>
+                  </a:p>
+                </p:txBody>
+              </p:sp>
+              <p:sp>
+                <p:nvSpPr>
+                  <p:cNvPr id="696" name="Rectangle 695">
+                    <a:extLst>
+                      <a:ext uri="{FF2B5EF4-FFF2-40B4-BE49-F238E27FC236}">
+                        <a16:creationId xmlns:a16="http://schemas.microsoft.com/office/drawing/2014/main" id="{583A948E-8B66-499A-A36D-CCB7E17E61E0}"/>
+                      </a:ext>
+                    </a:extLst>
+                  </p:cNvPr>
+                  <p:cNvSpPr/>
+                  <p:nvPr/>
+                </p:nvSpPr>
+                <p:spPr>
+                  <a:xfrm flipH="1">
+                    <a:off x="9428162" y="5540982"/>
+                    <a:ext cx="762000" cy="762000"/>
+                  </a:xfrm>
+                  <a:prstGeom prst="rect">
+                    <a:avLst/>
+                  </a:prstGeom>
+                  <a:grpFill/>
+                  <a:ln w="38100">
+                    <a:solidFill>
+                      <a:schemeClr val="accent4"/>
+                    </a:solidFill>
+                  </a:ln>
+                </p:spPr>
+                <p:style>
+                  <a:lnRef idx="2">
+                    <a:schemeClr val="accent1">
+                      <a:shade val="50000"/>
+                    </a:schemeClr>
+                  </a:lnRef>
+                  <a:fillRef idx="1">
+                    <a:schemeClr val="accent1"/>
+                  </a:fillRef>
+                  <a:effectRef idx="0">
+                    <a:schemeClr val="accent1"/>
+                  </a:effectRef>
+                  <a:fontRef idx="minor">
+                    <a:schemeClr val="lt1"/>
+                  </a:fontRef>
+                </p:style>
+                <p:txBody>
+                  <a:bodyPr rtlCol="0" anchor="ctr"/>
+                  <a:lstStyle/>
+                  <a:p>
+                    <a:pPr algn="ctr"/>
+                    <a:endParaRPr lang="pt-PT"/>
+                  </a:p>
+                </p:txBody>
+              </p:sp>
+              <p:sp>
+                <p:nvSpPr>
+                  <p:cNvPr id="700" name="Rectangle 699">
+                    <a:extLst>
+                      <a:ext uri="{FF2B5EF4-FFF2-40B4-BE49-F238E27FC236}">
+                        <a16:creationId xmlns:a16="http://schemas.microsoft.com/office/drawing/2014/main" id="{90296AE4-6CE0-4959-9447-29364EBF7009}"/>
+                      </a:ext>
+                    </a:extLst>
+                  </p:cNvPr>
+                  <p:cNvSpPr/>
+                  <p:nvPr/>
+                </p:nvSpPr>
+                <p:spPr>
+                  <a:xfrm flipH="1">
+                    <a:off x="8666162" y="206982"/>
+                    <a:ext cx="762000" cy="762000"/>
+                  </a:xfrm>
+                  <a:prstGeom prst="rect">
+                    <a:avLst/>
+                  </a:prstGeom>
+                  <a:grpFill/>
+                  <a:ln w="38100">
+                    <a:solidFill>
+                      <a:schemeClr val="accent4"/>
+                    </a:solidFill>
+                  </a:ln>
+                </p:spPr>
+                <p:style>
+                  <a:lnRef idx="2">
+                    <a:schemeClr val="accent1">
+                      <a:shade val="50000"/>
+                    </a:schemeClr>
+                  </a:lnRef>
+                  <a:fillRef idx="1">
+                    <a:schemeClr val="accent1"/>
+                  </a:fillRef>
+                  <a:effectRef idx="0">
+                    <a:schemeClr val="accent1"/>
+                  </a:effectRef>
+                  <a:fontRef idx="minor">
+                    <a:schemeClr val="lt1"/>
+                  </a:fontRef>
+                </p:style>
+                <p:txBody>
+                  <a:bodyPr rtlCol="0" anchor="ctr"/>
+                  <a:lstStyle/>
+                  <a:p>
+                    <a:pPr algn="ctr"/>
+                    <a:endParaRPr lang="pt-PT"/>
+                  </a:p>
+                </p:txBody>
+              </p:sp>
+              <p:sp>
+                <p:nvSpPr>
+                  <p:cNvPr id="702" name="Rectangle 701">
+                    <a:extLst>
+                      <a:ext uri="{FF2B5EF4-FFF2-40B4-BE49-F238E27FC236}">
+                        <a16:creationId xmlns:a16="http://schemas.microsoft.com/office/drawing/2014/main" id="{A857E2DA-5F4C-4B43-9527-0788297FC693}"/>
+                      </a:ext>
+                    </a:extLst>
+                  </p:cNvPr>
+                  <p:cNvSpPr/>
+                  <p:nvPr/>
+                </p:nvSpPr>
+                <p:spPr>
+                  <a:xfrm flipH="1">
+                    <a:off x="8666162" y="968982"/>
+                    <a:ext cx="762000" cy="762000"/>
+                  </a:xfrm>
+                  <a:prstGeom prst="rect">
+                    <a:avLst/>
+                  </a:prstGeom>
+                  <a:grpFill/>
+                  <a:ln w="38100">
+                    <a:solidFill>
+                      <a:schemeClr val="accent4"/>
+                    </a:solidFill>
+                  </a:ln>
+                </p:spPr>
+                <p:style>
+                  <a:lnRef idx="2">
+                    <a:schemeClr val="accent1">
+                      <a:shade val="50000"/>
+                    </a:schemeClr>
+                  </a:lnRef>
+                  <a:fillRef idx="1">
+                    <a:schemeClr val="accent1"/>
+                  </a:fillRef>
+                  <a:effectRef idx="0">
+                    <a:schemeClr val="accent1"/>
+                  </a:effectRef>
+                  <a:fontRef idx="minor">
+                    <a:schemeClr val="lt1"/>
+                  </a:fontRef>
+                </p:style>
+                <p:txBody>
+                  <a:bodyPr rtlCol="0" anchor="ctr"/>
+                  <a:lstStyle/>
+                  <a:p>
+                    <a:pPr algn="ctr"/>
+                    <a:endParaRPr lang="pt-PT"/>
+                  </a:p>
+                </p:txBody>
+              </p:sp>
+              <p:sp>
+                <p:nvSpPr>
+                  <p:cNvPr id="703" name="Rectangle 702">
+                    <a:extLst>
+                      <a:ext uri="{FF2B5EF4-FFF2-40B4-BE49-F238E27FC236}">
+                        <a16:creationId xmlns:a16="http://schemas.microsoft.com/office/drawing/2014/main" id="{1EB3A2AB-961F-476B-8E44-D9168DDC2887}"/>
+                      </a:ext>
+                    </a:extLst>
+                  </p:cNvPr>
+                  <p:cNvSpPr/>
+                  <p:nvPr/>
+                </p:nvSpPr>
+                <p:spPr>
+                  <a:xfrm flipH="1">
+                    <a:off x="8666162" y="1730982"/>
+                    <a:ext cx="762000" cy="762000"/>
+                  </a:xfrm>
+                  <a:prstGeom prst="rect">
+                    <a:avLst/>
+                  </a:prstGeom>
+                  <a:grpFill/>
+                  <a:ln w="38100">
+                    <a:solidFill>
+                      <a:schemeClr val="accent4"/>
+                    </a:solidFill>
+                  </a:ln>
+                </p:spPr>
+                <p:style>
+                  <a:lnRef idx="2">
+                    <a:schemeClr val="accent1">
+                      <a:shade val="50000"/>
+                    </a:schemeClr>
+                  </a:lnRef>
+                  <a:fillRef idx="1">
+                    <a:schemeClr val="accent1"/>
+                  </a:fillRef>
+                  <a:effectRef idx="0">
+                    <a:schemeClr val="accent1"/>
+                  </a:effectRef>
+                  <a:fontRef idx="minor">
+                    <a:schemeClr val="lt1"/>
+                  </a:fontRef>
+                </p:style>
+                <p:txBody>
+                  <a:bodyPr rtlCol="0" anchor="ctr"/>
+                  <a:lstStyle/>
+                  <a:p>
+                    <a:pPr algn="ctr"/>
+                    <a:endParaRPr lang="pt-PT"/>
+                  </a:p>
+                </p:txBody>
+              </p:sp>
+              <p:sp>
+                <p:nvSpPr>
+                  <p:cNvPr id="704" name="Rectangle 703">
+                    <a:extLst>
+                      <a:ext uri="{FF2B5EF4-FFF2-40B4-BE49-F238E27FC236}">
+                        <a16:creationId xmlns:a16="http://schemas.microsoft.com/office/drawing/2014/main" id="{9DD141A0-C3E3-4A81-AD52-BE6D61600D41}"/>
+                      </a:ext>
+                    </a:extLst>
+                  </p:cNvPr>
+                  <p:cNvSpPr/>
+                  <p:nvPr/>
+                </p:nvSpPr>
+                <p:spPr>
+                  <a:xfrm flipH="1">
+                    <a:off x="9428162" y="206982"/>
+                    <a:ext cx="762000" cy="762000"/>
+                  </a:xfrm>
+                  <a:prstGeom prst="rect">
+                    <a:avLst/>
+                  </a:prstGeom>
+                  <a:grpFill/>
+                  <a:ln w="38100">
+                    <a:solidFill>
+                      <a:schemeClr val="accent4"/>
+                    </a:solidFill>
+                  </a:ln>
+                </p:spPr>
+                <p:style>
+                  <a:lnRef idx="2">
+                    <a:schemeClr val="accent1">
+                      <a:shade val="50000"/>
+                    </a:schemeClr>
+                  </a:lnRef>
+                  <a:fillRef idx="1">
+                    <a:schemeClr val="accent1"/>
+                  </a:fillRef>
+                  <a:effectRef idx="0">
+                    <a:schemeClr val="accent1"/>
+                  </a:effectRef>
+                  <a:fontRef idx="minor">
+                    <a:schemeClr val="lt1"/>
+                  </a:fontRef>
+                </p:style>
+                <p:txBody>
+                  <a:bodyPr rtlCol="0" anchor="ctr"/>
+                  <a:lstStyle/>
+                  <a:p>
+                    <a:pPr algn="ctr"/>
+                    <a:endParaRPr lang="pt-PT"/>
+                  </a:p>
+                </p:txBody>
+              </p:sp>
+              <p:sp>
+                <p:nvSpPr>
+                  <p:cNvPr id="705" name="Rectangle 704">
+                    <a:extLst>
+                      <a:ext uri="{FF2B5EF4-FFF2-40B4-BE49-F238E27FC236}">
+                        <a16:creationId xmlns:a16="http://schemas.microsoft.com/office/drawing/2014/main" id="{E43EF233-DEB4-4F22-8882-01C23804DC6E}"/>
+                      </a:ext>
+                    </a:extLst>
+                  </p:cNvPr>
+                  <p:cNvSpPr/>
+                  <p:nvPr/>
+                </p:nvSpPr>
+                <p:spPr>
+                  <a:xfrm flipH="1">
+                    <a:off x="9428162" y="968982"/>
+                    <a:ext cx="762000" cy="762000"/>
+                  </a:xfrm>
+                  <a:prstGeom prst="rect">
+                    <a:avLst/>
+                  </a:prstGeom>
+                  <a:grpFill/>
+                  <a:ln w="38100">
+                    <a:solidFill>
+                      <a:schemeClr val="accent4"/>
+                    </a:solidFill>
+                  </a:ln>
+                </p:spPr>
+                <p:style>
+                  <a:lnRef idx="2">
+                    <a:schemeClr val="accent1">
+                      <a:shade val="50000"/>
+                    </a:schemeClr>
+                  </a:lnRef>
+                  <a:fillRef idx="1">
+                    <a:schemeClr val="accent1"/>
+                  </a:fillRef>
+                  <a:effectRef idx="0">
+                    <a:schemeClr val="accent1"/>
+                  </a:effectRef>
+                  <a:fontRef idx="minor">
+                    <a:schemeClr val="lt1"/>
+                  </a:fontRef>
+                </p:style>
+                <p:txBody>
+                  <a:bodyPr rtlCol="0" anchor="ctr"/>
+                  <a:lstStyle/>
+                  <a:p>
+                    <a:pPr algn="ctr"/>
+                    <a:endParaRPr lang="pt-PT"/>
+                  </a:p>
+                </p:txBody>
+              </p:sp>
+              <p:sp>
+                <p:nvSpPr>
+                  <p:cNvPr id="706" name="Rectangle 705">
+                    <a:extLst>
+                      <a:ext uri="{FF2B5EF4-FFF2-40B4-BE49-F238E27FC236}">
+                        <a16:creationId xmlns:a16="http://schemas.microsoft.com/office/drawing/2014/main" id="{87C30096-07B8-406F-AF19-70285676FAB6}"/>
+                      </a:ext>
+                    </a:extLst>
+                  </p:cNvPr>
+                  <p:cNvSpPr/>
+                  <p:nvPr/>
+                </p:nvSpPr>
+                <p:spPr>
+                  <a:xfrm flipH="1">
+                    <a:off x="9428162" y="1730982"/>
+                    <a:ext cx="762000" cy="762000"/>
+                  </a:xfrm>
+                  <a:prstGeom prst="rect">
+                    <a:avLst/>
+                  </a:prstGeom>
+                  <a:grpFill/>
+                  <a:ln w="38100">
+                    <a:solidFill>
+                      <a:schemeClr val="accent4"/>
+                    </a:solidFill>
+                  </a:ln>
+                </p:spPr>
+                <p:style>
+                  <a:lnRef idx="2">
+                    <a:schemeClr val="accent1">
+                      <a:shade val="50000"/>
+                    </a:schemeClr>
+                  </a:lnRef>
+                  <a:fillRef idx="1">
+                    <a:schemeClr val="accent1"/>
+                  </a:fillRef>
+                  <a:effectRef idx="0">
+                    <a:schemeClr val="accent1"/>
+                  </a:effectRef>
+                  <a:fontRef idx="minor">
+                    <a:schemeClr val="lt1"/>
+                  </a:fontRef>
+                </p:style>
+                <p:txBody>
+                  <a:bodyPr rtlCol="0" anchor="ctr"/>
+                  <a:lstStyle/>
+                  <a:p>
+                    <a:pPr algn="ctr"/>
+                    <a:endParaRPr lang="pt-PT"/>
+                  </a:p>
+                </p:txBody>
+              </p:sp>
+              <p:sp>
+                <p:nvSpPr>
+                  <p:cNvPr id="707" name="Rectangle 706">
+                    <a:extLst>
+                      <a:ext uri="{FF2B5EF4-FFF2-40B4-BE49-F238E27FC236}">
+                        <a16:creationId xmlns:a16="http://schemas.microsoft.com/office/drawing/2014/main" id="{4FB9CB31-6DB3-4A07-B3EC-64AA8B46449C}"/>
+                      </a:ext>
+                    </a:extLst>
+                  </p:cNvPr>
+                  <p:cNvSpPr/>
+                  <p:nvPr/>
+                </p:nvSpPr>
+                <p:spPr>
+                  <a:xfrm flipH="1">
+                    <a:off x="8666162" y="2492982"/>
+                    <a:ext cx="762000" cy="762000"/>
+                  </a:xfrm>
+                  <a:prstGeom prst="rect">
+                    <a:avLst/>
+                  </a:prstGeom>
+                  <a:grpFill/>
+                  <a:ln w="38100">
+                    <a:solidFill>
+                      <a:schemeClr val="accent4"/>
+                    </a:solidFill>
+                  </a:ln>
+                </p:spPr>
+                <p:style>
+                  <a:lnRef idx="2">
+                    <a:schemeClr val="accent1">
+                      <a:shade val="50000"/>
+                    </a:schemeClr>
+                  </a:lnRef>
+                  <a:fillRef idx="1">
+                    <a:schemeClr val="accent1"/>
+                  </a:fillRef>
+                  <a:effectRef idx="0">
+                    <a:schemeClr val="accent1"/>
+                  </a:effectRef>
+                  <a:fontRef idx="minor">
+                    <a:schemeClr val="lt1"/>
+                  </a:fontRef>
+                </p:style>
+                <p:txBody>
+                  <a:bodyPr rtlCol="0" anchor="ctr"/>
+                  <a:lstStyle/>
+                  <a:p>
+                    <a:pPr algn="ctr"/>
+                    <a:endParaRPr lang="pt-PT"/>
+                  </a:p>
+                </p:txBody>
+              </p:sp>
+              <p:sp>
+                <p:nvSpPr>
+                  <p:cNvPr id="708" name="Rectangle 707">
+                    <a:extLst>
+                      <a:ext uri="{FF2B5EF4-FFF2-40B4-BE49-F238E27FC236}">
+                        <a16:creationId xmlns:a16="http://schemas.microsoft.com/office/drawing/2014/main" id="{C10F7115-A0B6-434F-B045-15DA71C6A6D1}"/>
+                      </a:ext>
+                    </a:extLst>
+                  </p:cNvPr>
+                  <p:cNvSpPr/>
+                  <p:nvPr/>
+                </p:nvSpPr>
+                <p:spPr>
+                  <a:xfrm flipH="1">
+                    <a:off x="9428162" y="2492982"/>
+                    <a:ext cx="762000" cy="762000"/>
+                  </a:xfrm>
+                  <a:prstGeom prst="rect">
+                    <a:avLst/>
+                  </a:prstGeom>
+                  <a:grpFill/>
+                  <a:ln w="38100">
+                    <a:solidFill>
+                      <a:schemeClr val="accent4"/>
+                    </a:solidFill>
+                  </a:ln>
+                </p:spPr>
+                <p:style>
+                  <a:lnRef idx="2">
+                    <a:schemeClr val="accent1">
+                      <a:shade val="50000"/>
+                    </a:schemeClr>
+                  </a:lnRef>
+                  <a:fillRef idx="1">
+                    <a:schemeClr val="accent1"/>
+                  </a:fillRef>
+                  <a:effectRef idx="0">
+                    <a:schemeClr val="accent1"/>
+                  </a:effectRef>
+                  <a:fontRef idx="minor">
+                    <a:schemeClr val="lt1"/>
+                  </a:fontRef>
+                </p:style>
+                <p:txBody>
+                  <a:bodyPr rtlCol="0" anchor="ctr"/>
+                  <a:lstStyle/>
+                  <a:p>
+                    <a:pPr algn="ctr"/>
+                    <a:endParaRPr lang="pt-PT"/>
+                  </a:p>
+                </p:txBody>
+              </p:sp>
+            </p:grpSp>
+            <p:grpSp>
+              <p:nvGrpSpPr>
+                <p:cNvPr id="497" name="Group 496">
+                  <a:extLst>
+                    <a:ext uri="{FF2B5EF4-FFF2-40B4-BE49-F238E27FC236}">
+                      <a16:creationId xmlns:a16="http://schemas.microsoft.com/office/drawing/2014/main" id="{A412731A-6613-4363-B357-DDD96C3808B4}"/>
+                    </a:ext>
+                  </a:extLst>
+                </p:cNvPr>
+                <p:cNvGrpSpPr/>
+                <p:nvPr/>
+              </p:nvGrpSpPr>
+              <p:grpSpPr>
+                <a:xfrm>
+                  <a:off x="7609567" y="206982"/>
+                  <a:ext cx="3027282" cy="6096000"/>
+                  <a:chOff x="7162880" y="206982"/>
+                  <a:chExt cx="3027282" cy="6096000"/>
+                </a:xfrm>
+                <a:grpFill/>
+              </p:grpSpPr>
+              <p:sp>
+                <p:nvSpPr>
+                  <p:cNvPr id="498" name="Rectangle 497">
+                    <a:extLst>
+                      <a:ext uri="{FF2B5EF4-FFF2-40B4-BE49-F238E27FC236}">
+                        <a16:creationId xmlns:a16="http://schemas.microsoft.com/office/drawing/2014/main" id="{CC067C85-EE11-4E02-99CA-63EA1F56C5F2}"/>
+                      </a:ext>
+                    </a:extLst>
+                  </p:cNvPr>
+                  <p:cNvSpPr/>
+                  <p:nvPr/>
+                </p:nvSpPr>
+                <p:spPr>
+                  <a:xfrm>
+                    <a:off x="7924880" y="3254982"/>
+                    <a:ext cx="762000" cy="762000"/>
+                  </a:xfrm>
+                  <a:prstGeom prst="rect">
+                    <a:avLst/>
+                  </a:prstGeom>
+                  <a:grpFill/>
+                  <a:ln w="38100">
+                    <a:solidFill>
+                      <a:schemeClr val="accent4"/>
+                    </a:solidFill>
+                  </a:ln>
+                </p:spPr>
+                <p:style>
+                  <a:lnRef idx="2">
+                    <a:schemeClr val="accent1">
+                      <a:shade val="50000"/>
+                    </a:schemeClr>
+                  </a:lnRef>
+                  <a:fillRef idx="1">
+                    <a:schemeClr val="accent1"/>
+                  </a:fillRef>
+                  <a:effectRef idx="0">
+                    <a:schemeClr val="accent1"/>
+                  </a:effectRef>
+                  <a:fontRef idx="minor">
+                    <a:schemeClr val="lt1"/>
+                  </a:fontRef>
+                </p:style>
+                <p:txBody>
+                  <a:bodyPr rtlCol="0" anchor="ctr"/>
+                  <a:lstStyle/>
+                  <a:p>
+                    <a:pPr algn="ctr"/>
+                    <a:endParaRPr lang="pt-PT"/>
+                  </a:p>
+                </p:txBody>
+              </p:sp>
+              <p:sp>
+                <p:nvSpPr>
+                  <p:cNvPr id="499" name="Rectangle 498">
+                    <a:extLst>
+                      <a:ext uri="{FF2B5EF4-FFF2-40B4-BE49-F238E27FC236}">
+                        <a16:creationId xmlns:a16="http://schemas.microsoft.com/office/drawing/2014/main" id="{EBF2E87A-B4E7-488D-9AB6-C007E65A671B}"/>
+                      </a:ext>
+                    </a:extLst>
+                  </p:cNvPr>
+                  <p:cNvSpPr/>
+                  <p:nvPr/>
+                </p:nvSpPr>
+                <p:spPr>
+                  <a:xfrm>
+                    <a:off x="7924880" y="4016982"/>
+                    <a:ext cx="762000" cy="762000"/>
+                  </a:xfrm>
+                  <a:prstGeom prst="rect">
+                    <a:avLst/>
+                  </a:prstGeom>
+                  <a:grpFill/>
+                  <a:ln w="38100">
+                    <a:solidFill>
+                      <a:schemeClr val="accent4"/>
+                    </a:solidFill>
+                  </a:ln>
+                </p:spPr>
+                <p:style>
+                  <a:lnRef idx="2">
+                    <a:schemeClr val="accent1">
+                      <a:shade val="50000"/>
+                    </a:schemeClr>
+                  </a:lnRef>
+                  <a:fillRef idx="1">
+                    <a:schemeClr val="accent1"/>
+                  </a:fillRef>
+                  <a:effectRef idx="0">
+                    <a:schemeClr val="accent1"/>
+                  </a:effectRef>
+                  <a:fontRef idx="minor">
+                    <a:schemeClr val="lt1"/>
+                  </a:fontRef>
+                </p:style>
+                <p:txBody>
+                  <a:bodyPr rtlCol="0" anchor="ctr"/>
+                  <a:lstStyle/>
+                  <a:p>
+                    <a:pPr algn="ctr"/>
+                    <a:endParaRPr lang="pt-PT"/>
+                  </a:p>
+                </p:txBody>
+              </p:sp>
+              <p:sp>
+                <p:nvSpPr>
+                  <p:cNvPr id="500" name="Rectangle 499">
+                    <a:extLst>
+                      <a:ext uri="{FF2B5EF4-FFF2-40B4-BE49-F238E27FC236}">
+                        <a16:creationId xmlns:a16="http://schemas.microsoft.com/office/drawing/2014/main" id="{B77C84AC-CD38-42E4-B834-7641BB48DAB3}"/>
+                      </a:ext>
+                    </a:extLst>
+                  </p:cNvPr>
+                  <p:cNvSpPr/>
+                  <p:nvPr/>
+                </p:nvSpPr>
+                <p:spPr>
+                  <a:xfrm>
+                    <a:off x="7924880" y="4778982"/>
+                    <a:ext cx="762000" cy="762000"/>
+                  </a:xfrm>
+                  <a:prstGeom prst="rect">
+                    <a:avLst/>
+                  </a:prstGeom>
+                  <a:grpFill/>
+                  <a:ln w="38100">
+                    <a:solidFill>
+                      <a:schemeClr val="accent4"/>
+                    </a:solidFill>
+                  </a:ln>
+                </p:spPr>
+                <p:style>
+                  <a:lnRef idx="2">
+                    <a:schemeClr val="accent1">
+                      <a:shade val="50000"/>
+                    </a:schemeClr>
+                  </a:lnRef>
+                  <a:fillRef idx="1">
+                    <a:schemeClr val="accent1"/>
+                  </a:fillRef>
+                  <a:effectRef idx="0">
+                    <a:schemeClr val="accent1"/>
+                  </a:effectRef>
+                  <a:fontRef idx="minor">
+                    <a:schemeClr val="lt1"/>
+                  </a:fontRef>
+                </p:style>
+                <p:txBody>
+                  <a:bodyPr rtlCol="0" anchor="ctr"/>
+                  <a:lstStyle/>
+                  <a:p>
+                    <a:pPr algn="ctr"/>
+                    <a:endParaRPr lang="pt-PT"/>
+                  </a:p>
+                </p:txBody>
+              </p:sp>
+              <p:sp>
+                <p:nvSpPr>
+                  <p:cNvPr id="501" name="Rectangle 500">
+                    <a:extLst>
+                      <a:ext uri="{FF2B5EF4-FFF2-40B4-BE49-F238E27FC236}">
+                        <a16:creationId xmlns:a16="http://schemas.microsoft.com/office/drawing/2014/main" id="{09648298-52E3-4468-BC98-C2E955C3588C}"/>
+                      </a:ext>
+                    </a:extLst>
+                  </p:cNvPr>
+                  <p:cNvSpPr/>
+                  <p:nvPr/>
+                </p:nvSpPr>
+                <p:spPr>
+                  <a:xfrm>
+                    <a:off x="7924880" y="5540982"/>
+                    <a:ext cx="762000" cy="762000"/>
+                  </a:xfrm>
+                  <a:prstGeom prst="rect">
+                    <a:avLst/>
+                  </a:prstGeom>
+                  <a:grpFill/>
+                  <a:ln w="38100">
+                    <a:solidFill>
+                      <a:schemeClr val="accent4"/>
+                    </a:solidFill>
+                  </a:ln>
+                </p:spPr>
+                <p:style>
+                  <a:lnRef idx="2">
+                    <a:schemeClr val="accent1">
+                      <a:shade val="50000"/>
+                    </a:schemeClr>
+                  </a:lnRef>
+                  <a:fillRef idx="1">
+                    <a:schemeClr val="accent1"/>
+                  </a:fillRef>
+                  <a:effectRef idx="0">
+                    <a:schemeClr val="accent1"/>
+                  </a:effectRef>
+                  <a:fontRef idx="minor">
+                    <a:schemeClr val="lt1"/>
+                  </a:fontRef>
+                </p:style>
+                <p:txBody>
+                  <a:bodyPr rtlCol="0" anchor="ctr"/>
+                  <a:lstStyle/>
+                  <a:p>
+                    <a:pPr algn="ctr"/>
+                    <a:endParaRPr lang="pt-PT"/>
+                  </a:p>
+                </p:txBody>
+              </p:sp>
+              <p:sp>
+                <p:nvSpPr>
+                  <p:cNvPr id="502" name="Rectangle 501">
+                    <a:extLst>
+                      <a:ext uri="{FF2B5EF4-FFF2-40B4-BE49-F238E27FC236}">
+                        <a16:creationId xmlns:a16="http://schemas.microsoft.com/office/drawing/2014/main" id="{5C2A35DD-72E9-474E-B8CF-276F5F25F749}"/>
+                      </a:ext>
+                    </a:extLst>
+                  </p:cNvPr>
+                  <p:cNvSpPr/>
+                  <p:nvPr/>
+                </p:nvSpPr>
+                <p:spPr>
+                  <a:xfrm>
+                    <a:off x="7162880" y="3254982"/>
+                    <a:ext cx="762000" cy="762000"/>
+                  </a:xfrm>
+                  <a:prstGeom prst="rect">
+                    <a:avLst/>
+                  </a:prstGeom>
+                  <a:grpFill/>
+                  <a:ln w="38100">
+                    <a:solidFill>
+                      <a:schemeClr val="accent4"/>
+                    </a:solidFill>
+                  </a:ln>
+                </p:spPr>
+                <p:style>
+                  <a:lnRef idx="2">
+                    <a:schemeClr val="accent1">
+                      <a:shade val="50000"/>
+                    </a:schemeClr>
+                  </a:lnRef>
+                  <a:fillRef idx="1">
+                    <a:schemeClr val="accent1"/>
+                  </a:fillRef>
+                  <a:effectRef idx="0">
+                    <a:schemeClr val="accent1"/>
+                  </a:effectRef>
+                  <a:fontRef idx="minor">
+                    <a:schemeClr val="lt1"/>
+                  </a:fontRef>
+                </p:style>
+                <p:txBody>
+                  <a:bodyPr rtlCol="0" anchor="ctr"/>
+                  <a:lstStyle/>
+                  <a:p>
+                    <a:pPr algn="ctr"/>
+                    <a:endParaRPr lang="pt-PT"/>
+                  </a:p>
+                </p:txBody>
+              </p:sp>
+              <p:sp>
+                <p:nvSpPr>
+                  <p:cNvPr id="503" name="Rectangle 502">
+                    <a:extLst>
+                      <a:ext uri="{FF2B5EF4-FFF2-40B4-BE49-F238E27FC236}">
+                        <a16:creationId xmlns:a16="http://schemas.microsoft.com/office/drawing/2014/main" id="{134B2FD2-0334-4335-A2FD-B0E83F1214B4}"/>
+                      </a:ext>
+                    </a:extLst>
+                  </p:cNvPr>
+                  <p:cNvSpPr/>
+                  <p:nvPr/>
+                </p:nvSpPr>
+                <p:spPr>
+                  <a:xfrm>
+                    <a:off x="7162880" y="4016982"/>
+                    <a:ext cx="762000" cy="762000"/>
+                  </a:xfrm>
+                  <a:prstGeom prst="rect">
+                    <a:avLst/>
+                  </a:prstGeom>
+                  <a:grpFill/>
+                  <a:ln w="38100">
+                    <a:solidFill>
+                      <a:schemeClr val="accent4"/>
+                    </a:solidFill>
+                  </a:ln>
+                </p:spPr>
+                <p:style>
+                  <a:lnRef idx="2">
+                    <a:schemeClr val="accent1">
+                      <a:shade val="50000"/>
+                    </a:schemeClr>
+                  </a:lnRef>
+                  <a:fillRef idx="1">
+                    <a:schemeClr val="accent1"/>
+                  </a:fillRef>
+                  <a:effectRef idx="0">
+                    <a:schemeClr val="accent1"/>
+                  </a:effectRef>
+                  <a:fontRef idx="minor">
+                    <a:schemeClr val="lt1"/>
+                  </a:fontRef>
+                </p:style>
+                <p:txBody>
+                  <a:bodyPr rtlCol="0" anchor="ctr"/>
+                  <a:lstStyle/>
+                  <a:p>
+                    <a:pPr algn="ctr"/>
+                    <a:endParaRPr lang="pt-PT"/>
+                  </a:p>
+                </p:txBody>
+              </p:sp>
+              <p:sp>
+                <p:nvSpPr>
+                  <p:cNvPr id="504" name="Rectangle 503">
+                    <a:extLst>
+                      <a:ext uri="{FF2B5EF4-FFF2-40B4-BE49-F238E27FC236}">
+                        <a16:creationId xmlns:a16="http://schemas.microsoft.com/office/drawing/2014/main" id="{C54FD50A-95B2-46ED-8C0C-3B9CCEDBCF7D}"/>
+                      </a:ext>
+                    </a:extLst>
+                  </p:cNvPr>
+                  <p:cNvSpPr/>
+                  <p:nvPr/>
+                </p:nvSpPr>
+                <p:spPr>
+                  <a:xfrm>
+                    <a:off x="7162880" y="4778982"/>
+                    <a:ext cx="762000" cy="762000"/>
+                  </a:xfrm>
+                  <a:prstGeom prst="rect">
+                    <a:avLst/>
+                  </a:prstGeom>
+                  <a:grpFill/>
+                  <a:ln w="38100">
+                    <a:solidFill>
+                      <a:schemeClr val="accent4"/>
+                    </a:solidFill>
+                  </a:ln>
+                </p:spPr>
+                <p:style>
+                  <a:lnRef idx="2">
+                    <a:schemeClr val="accent1">
+                      <a:shade val="50000"/>
+                    </a:schemeClr>
+                  </a:lnRef>
+                  <a:fillRef idx="1">
+                    <a:schemeClr val="accent1"/>
+                  </a:fillRef>
+                  <a:effectRef idx="0">
+                    <a:schemeClr val="accent1"/>
+                  </a:effectRef>
+                  <a:fontRef idx="minor">
+                    <a:schemeClr val="lt1"/>
+                  </a:fontRef>
+                </p:style>
+                <p:txBody>
+                  <a:bodyPr rtlCol="0" anchor="ctr"/>
+                  <a:lstStyle/>
+                  <a:p>
+                    <a:pPr algn="ctr"/>
+                    <a:endParaRPr lang="pt-PT"/>
+                  </a:p>
+                </p:txBody>
+              </p:sp>
+              <p:sp>
+                <p:nvSpPr>
+                  <p:cNvPr id="505" name="Rectangle 504">
+                    <a:extLst>
+                      <a:ext uri="{FF2B5EF4-FFF2-40B4-BE49-F238E27FC236}">
+                        <a16:creationId xmlns:a16="http://schemas.microsoft.com/office/drawing/2014/main" id="{6490D1A5-23E8-48C4-A646-ECE7394B5218}"/>
+                      </a:ext>
+                    </a:extLst>
+                  </p:cNvPr>
+                  <p:cNvSpPr/>
+                  <p:nvPr/>
+                </p:nvSpPr>
+                <p:spPr>
+                  <a:xfrm>
+                    <a:off x="7162880" y="5540982"/>
+                    <a:ext cx="762000" cy="762000"/>
+                  </a:xfrm>
+                  <a:prstGeom prst="rect">
+                    <a:avLst/>
+                  </a:prstGeom>
+                  <a:grpFill/>
+                  <a:ln w="38100">
+                    <a:solidFill>
+                      <a:schemeClr val="accent4"/>
+                    </a:solidFill>
+                  </a:ln>
+                </p:spPr>
+                <p:style>
+                  <a:lnRef idx="2">
+                    <a:schemeClr val="accent1">
+                      <a:shade val="50000"/>
+                    </a:schemeClr>
+                  </a:lnRef>
+                  <a:fillRef idx="1">
+                    <a:schemeClr val="accent1"/>
+                  </a:fillRef>
+                  <a:effectRef idx="0">
+                    <a:schemeClr val="accent1"/>
+                  </a:effectRef>
+                  <a:fontRef idx="minor">
+                    <a:schemeClr val="lt1"/>
+                  </a:fontRef>
+                </p:style>
+                <p:txBody>
+                  <a:bodyPr rtlCol="0" anchor="ctr"/>
+                  <a:lstStyle/>
+                  <a:p>
+                    <a:pPr algn="ctr"/>
+                    <a:endParaRPr lang="pt-PT"/>
+                  </a:p>
+                </p:txBody>
+              </p:sp>
+              <p:sp>
+                <p:nvSpPr>
+                  <p:cNvPr id="506" name="Rectangle 505">
+                    <a:extLst>
+                      <a:ext uri="{FF2B5EF4-FFF2-40B4-BE49-F238E27FC236}">
+                        <a16:creationId xmlns:a16="http://schemas.microsoft.com/office/drawing/2014/main" id="{4F147942-A0BA-433A-8416-BA59BF5AF9B6}"/>
+                      </a:ext>
+                    </a:extLst>
+                  </p:cNvPr>
+                  <p:cNvSpPr/>
+                  <p:nvPr/>
+                </p:nvSpPr>
+                <p:spPr>
+                  <a:xfrm>
+                    <a:off x="7924880" y="206982"/>
+                    <a:ext cx="762000" cy="762000"/>
+                  </a:xfrm>
+                  <a:prstGeom prst="rect">
+                    <a:avLst/>
+                  </a:prstGeom>
+                  <a:grpFill/>
+                  <a:ln w="38100">
+                    <a:solidFill>
+                      <a:schemeClr val="accent4"/>
+                    </a:solidFill>
+                  </a:ln>
+                </p:spPr>
+                <p:style>
+                  <a:lnRef idx="2">
+                    <a:schemeClr val="accent1">
+                      <a:shade val="50000"/>
+                    </a:schemeClr>
+                  </a:lnRef>
+                  <a:fillRef idx="1">
+                    <a:schemeClr val="accent1"/>
+                  </a:fillRef>
+                  <a:effectRef idx="0">
+                    <a:schemeClr val="accent1"/>
+                  </a:effectRef>
+                  <a:fontRef idx="minor">
+                    <a:schemeClr val="lt1"/>
+                  </a:fontRef>
+                </p:style>
+                <p:txBody>
+                  <a:bodyPr rtlCol="0" anchor="ctr"/>
+                  <a:lstStyle/>
+                  <a:p>
+                    <a:pPr algn="ctr"/>
+                    <a:endParaRPr lang="pt-PT"/>
+                  </a:p>
+                </p:txBody>
+              </p:sp>
+              <p:sp>
+                <p:nvSpPr>
+                  <p:cNvPr id="507" name="Rectangle 506">
+                    <a:extLst>
+                      <a:ext uri="{FF2B5EF4-FFF2-40B4-BE49-F238E27FC236}">
+                        <a16:creationId xmlns:a16="http://schemas.microsoft.com/office/drawing/2014/main" id="{4DA31590-4AFE-466B-A052-5F1BDCC8B208}"/>
+                      </a:ext>
+                    </a:extLst>
+                  </p:cNvPr>
+                  <p:cNvSpPr/>
+                  <p:nvPr/>
+                </p:nvSpPr>
+                <p:spPr>
+                  <a:xfrm>
+                    <a:off x="7924880" y="968982"/>
+                    <a:ext cx="762000" cy="762000"/>
+                  </a:xfrm>
+                  <a:prstGeom prst="rect">
+                    <a:avLst/>
+                  </a:prstGeom>
+                  <a:grpFill/>
+                  <a:ln w="38100">
+                    <a:solidFill>
+                      <a:schemeClr val="accent4"/>
+                    </a:solidFill>
+                  </a:ln>
+                </p:spPr>
+                <p:style>
+                  <a:lnRef idx="2">
+                    <a:schemeClr val="accent1">
+                      <a:shade val="50000"/>
+                    </a:schemeClr>
+                  </a:lnRef>
+                  <a:fillRef idx="1">
+                    <a:schemeClr val="accent1"/>
+                  </a:fillRef>
+                  <a:effectRef idx="0">
+                    <a:schemeClr val="accent1"/>
+                  </a:effectRef>
+                  <a:fontRef idx="minor">
+                    <a:schemeClr val="lt1"/>
+                  </a:fontRef>
+                </p:style>
+                <p:txBody>
+                  <a:bodyPr rtlCol="0" anchor="ctr"/>
+                  <a:lstStyle/>
+                  <a:p>
+                    <a:pPr algn="ctr"/>
+                    <a:endParaRPr lang="pt-PT"/>
+                  </a:p>
+                </p:txBody>
+              </p:sp>
+              <p:sp>
+                <p:nvSpPr>
+                  <p:cNvPr id="508" name="Rectangle 507">
+                    <a:extLst>
+                      <a:ext uri="{FF2B5EF4-FFF2-40B4-BE49-F238E27FC236}">
+                        <a16:creationId xmlns:a16="http://schemas.microsoft.com/office/drawing/2014/main" id="{EA7DF675-33C5-4485-B31B-EA306681B451}"/>
+                      </a:ext>
+                    </a:extLst>
+                  </p:cNvPr>
+                  <p:cNvSpPr/>
+                  <p:nvPr/>
+                </p:nvSpPr>
+                <p:spPr>
+                  <a:xfrm>
+                    <a:off x="7924880" y="1730982"/>
+                    <a:ext cx="762000" cy="762000"/>
+                  </a:xfrm>
+                  <a:prstGeom prst="rect">
+                    <a:avLst/>
+                  </a:prstGeom>
+                  <a:grpFill/>
+                  <a:ln w="38100">
+                    <a:solidFill>
+                      <a:schemeClr val="accent4"/>
+                    </a:solidFill>
+                  </a:ln>
+                </p:spPr>
+                <p:style>
+                  <a:lnRef idx="2">
+                    <a:schemeClr val="accent1">
+                      <a:shade val="50000"/>
+                    </a:schemeClr>
+                  </a:lnRef>
+                  <a:fillRef idx="1">
+                    <a:schemeClr val="accent1"/>
+                  </a:fillRef>
+                  <a:effectRef idx="0">
+                    <a:schemeClr val="accent1"/>
+                  </a:effectRef>
+                  <a:fontRef idx="minor">
+                    <a:schemeClr val="lt1"/>
+                  </a:fontRef>
+                </p:style>
+                <p:txBody>
+                  <a:bodyPr rtlCol="0" anchor="ctr"/>
+                  <a:lstStyle/>
+                  <a:p>
+                    <a:pPr algn="ctr"/>
+                    <a:endParaRPr lang="pt-PT"/>
+                  </a:p>
+                </p:txBody>
+              </p:sp>
+              <p:sp>
+                <p:nvSpPr>
+                  <p:cNvPr id="509" name="Rectangle 508">
+                    <a:extLst>
+                      <a:ext uri="{FF2B5EF4-FFF2-40B4-BE49-F238E27FC236}">
+                        <a16:creationId xmlns:a16="http://schemas.microsoft.com/office/drawing/2014/main" id="{DAB03677-C9E6-48F1-854C-C1C8FC9E0EF7}"/>
+                      </a:ext>
+                    </a:extLst>
+                  </p:cNvPr>
+                  <p:cNvSpPr/>
+                  <p:nvPr/>
+                </p:nvSpPr>
+                <p:spPr>
+                  <a:xfrm>
+                    <a:off x="7162880" y="206982"/>
+                    <a:ext cx="762000" cy="762000"/>
+                  </a:xfrm>
+                  <a:prstGeom prst="rect">
+                    <a:avLst/>
+                  </a:prstGeom>
+                  <a:grpFill/>
+                  <a:ln w="38100">
+                    <a:solidFill>
+                      <a:schemeClr val="accent4"/>
+                    </a:solidFill>
+                  </a:ln>
+                </p:spPr>
+                <p:style>
+                  <a:lnRef idx="2">
+                    <a:schemeClr val="accent1">
+                      <a:shade val="50000"/>
+                    </a:schemeClr>
+                  </a:lnRef>
+                  <a:fillRef idx="1">
+                    <a:schemeClr val="accent1"/>
+                  </a:fillRef>
+                  <a:effectRef idx="0">
+                    <a:schemeClr val="accent1"/>
+                  </a:effectRef>
+                  <a:fontRef idx="minor">
+                    <a:schemeClr val="lt1"/>
+                  </a:fontRef>
+                </p:style>
+                <p:txBody>
+                  <a:bodyPr rtlCol="0" anchor="ctr"/>
+                  <a:lstStyle/>
+                  <a:p>
+                    <a:pPr algn="ctr"/>
+                    <a:endParaRPr lang="pt-PT"/>
+                  </a:p>
+                </p:txBody>
+              </p:sp>
+              <p:sp>
+                <p:nvSpPr>
+                  <p:cNvPr id="510" name="Rectangle 509">
+                    <a:extLst>
+                      <a:ext uri="{FF2B5EF4-FFF2-40B4-BE49-F238E27FC236}">
+                        <a16:creationId xmlns:a16="http://schemas.microsoft.com/office/drawing/2014/main" id="{D01E467B-3924-470B-83C7-C11ACB16126C}"/>
+                      </a:ext>
+                    </a:extLst>
+                  </p:cNvPr>
+                  <p:cNvSpPr/>
+                  <p:nvPr/>
+                </p:nvSpPr>
+                <p:spPr>
+                  <a:xfrm>
+                    <a:off x="7162880" y="968982"/>
+                    <a:ext cx="762000" cy="762000"/>
+                  </a:xfrm>
+                  <a:prstGeom prst="rect">
+                    <a:avLst/>
+                  </a:prstGeom>
+                  <a:grpFill/>
+                  <a:ln w="38100">
+                    <a:solidFill>
+                      <a:schemeClr val="accent4"/>
+                    </a:solidFill>
+                  </a:ln>
+                </p:spPr>
+                <p:style>
+                  <a:lnRef idx="2">
+                    <a:schemeClr val="accent1">
+                      <a:shade val="50000"/>
+                    </a:schemeClr>
+                  </a:lnRef>
+                  <a:fillRef idx="1">
+                    <a:schemeClr val="accent1"/>
+                  </a:fillRef>
+                  <a:effectRef idx="0">
+                    <a:schemeClr val="accent1"/>
+                  </a:effectRef>
+                  <a:fontRef idx="minor">
+                    <a:schemeClr val="lt1"/>
+                  </a:fontRef>
+                </p:style>
+                <p:txBody>
+                  <a:bodyPr rtlCol="0" anchor="ctr"/>
+                  <a:lstStyle/>
+                  <a:p>
+                    <a:pPr algn="ctr"/>
+                    <a:endParaRPr lang="pt-PT"/>
+                  </a:p>
+                </p:txBody>
+              </p:sp>
+              <p:sp>
+                <p:nvSpPr>
+                  <p:cNvPr id="511" name="Rectangle 510">
+                    <a:extLst>
+                      <a:ext uri="{FF2B5EF4-FFF2-40B4-BE49-F238E27FC236}">
+                        <a16:creationId xmlns:a16="http://schemas.microsoft.com/office/drawing/2014/main" id="{C1FECB6F-D2EC-4CC4-80D4-66A174B61C64}"/>
+                      </a:ext>
+                    </a:extLst>
+                  </p:cNvPr>
+                  <p:cNvSpPr/>
+                  <p:nvPr/>
+                </p:nvSpPr>
+                <p:spPr>
+                  <a:xfrm>
+                    <a:off x="7162880" y="1730982"/>
+                    <a:ext cx="762000" cy="762000"/>
+                  </a:xfrm>
+                  <a:prstGeom prst="rect">
+                    <a:avLst/>
+                  </a:prstGeom>
+                  <a:grpFill/>
+                  <a:ln w="38100">
+                    <a:solidFill>
+                      <a:schemeClr val="accent4"/>
+                    </a:solidFill>
+                  </a:ln>
+                </p:spPr>
+                <p:style>
+                  <a:lnRef idx="2">
+                    <a:schemeClr val="accent1">
+                      <a:shade val="50000"/>
+                    </a:schemeClr>
+                  </a:lnRef>
+                  <a:fillRef idx="1">
+                    <a:schemeClr val="accent1"/>
+                  </a:fillRef>
+                  <a:effectRef idx="0">
+                    <a:schemeClr val="accent1"/>
+                  </a:effectRef>
+                  <a:fontRef idx="minor">
+                    <a:schemeClr val="lt1"/>
+                  </a:fontRef>
+                </p:style>
+                <p:txBody>
+                  <a:bodyPr rtlCol="0" anchor="ctr"/>
+                  <a:lstStyle/>
+                  <a:p>
+                    <a:pPr algn="ctr"/>
+                    <a:endParaRPr lang="pt-PT"/>
+                  </a:p>
+                </p:txBody>
+              </p:sp>
+              <p:sp>
+                <p:nvSpPr>
+                  <p:cNvPr id="512" name="Rectangle 511">
+                    <a:extLst>
+                      <a:ext uri="{FF2B5EF4-FFF2-40B4-BE49-F238E27FC236}">
+                        <a16:creationId xmlns:a16="http://schemas.microsoft.com/office/drawing/2014/main" id="{86FB5B7C-6AFC-4B43-90AD-A75190F587F9}"/>
+                      </a:ext>
+                    </a:extLst>
+                  </p:cNvPr>
+                  <p:cNvSpPr/>
+                  <p:nvPr/>
+                </p:nvSpPr>
+                <p:spPr>
+                  <a:xfrm>
+                    <a:off x="7924880" y="2492982"/>
+                    <a:ext cx="762000" cy="762000"/>
+                  </a:xfrm>
+                  <a:prstGeom prst="rect">
+                    <a:avLst/>
+                  </a:prstGeom>
+                  <a:grpFill/>
+                  <a:ln w="38100">
+                    <a:solidFill>
+                      <a:schemeClr val="accent4"/>
+                    </a:solidFill>
+                  </a:ln>
+                </p:spPr>
+                <p:style>
+                  <a:lnRef idx="2">
+                    <a:schemeClr val="accent1">
+                      <a:shade val="50000"/>
+                    </a:schemeClr>
+                  </a:lnRef>
+                  <a:fillRef idx="1">
+                    <a:schemeClr val="accent1"/>
+                  </a:fillRef>
+                  <a:effectRef idx="0">
+                    <a:schemeClr val="accent1"/>
+                  </a:effectRef>
+                  <a:fontRef idx="minor">
+                    <a:schemeClr val="lt1"/>
+                  </a:fontRef>
+                </p:style>
+                <p:txBody>
+                  <a:bodyPr rtlCol="0" anchor="ctr"/>
+                  <a:lstStyle/>
+                  <a:p>
+                    <a:pPr algn="ctr"/>
+                    <a:endParaRPr lang="pt-PT"/>
+                  </a:p>
+                </p:txBody>
+              </p:sp>
+              <p:sp>
+                <p:nvSpPr>
+                  <p:cNvPr id="513" name="Rectangle 512">
+                    <a:extLst>
+                      <a:ext uri="{FF2B5EF4-FFF2-40B4-BE49-F238E27FC236}">
+                        <a16:creationId xmlns:a16="http://schemas.microsoft.com/office/drawing/2014/main" id="{45892014-5D65-498D-8427-AC8588C1E8FD}"/>
+                      </a:ext>
+                    </a:extLst>
+                  </p:cNvPr>
+                  <p:cNvSpPr/>
+                  <p:nvPr/>
+                </p:nvSpPr>
+                <p:spPr>
+                  <a:xfrm>
+                    <a:off x="7162880" y="2492982"/>
+                    <a:ext cx="762000" cy="762000"/>
+                  </a:xfrm>
+                  <a:prstGeom prst="rect">
+                    <a:avLst/>
+                  </a:prstGeom>
+                  <a:grpFill/>
+                  <a:ln w="38100">
+                    <a:solidFill>
+                      <a:schemeClr val="accent4"/>
+                    </a:solidFill>
+                  </a:ln>
+                </p:spPr>
+                <p:style>
+                  <a:lnRef idx="2">
+                    <a:schemeClr val="accent1">
+                      <a:shade val="50000"/>
+                    </a:schemeClr>
+                  </a:lnRef>
+                  <a:fillRef idx="1">
+                    <a:schemeClr val="accent1"/>
+                  </a:fillRef>
+                  <a:effectRef idx="0">
+                    <a:schemeClr val="accent1"/>
+                  </a:effectRef>
+                  <a:fontRef idx="minor">
+                    <a:schemeClr val="lt1"/>
+                  </a:fontRef>
+                </p:style>
+                <p:txBody>
+                  <a:bodyPr rtlCol="0" anchor="ctr"/>
+                  <a:lstStyle/>
+                  <a:p>
+                    <a:pPr algn="ctr"/>
+                    <a:endParaRPr lang="pt-PT"/>
+                  </a:p>
+                </p:txBody>
+              </p:sp>
+              <p:sp>
+                <p:nvSpPr>
+                  <p:cNvPr id="514" name="Rectangle 513">
+                    <a:extLst>
+                      <a:ext uri="{FF2B5EF4-FFF2-40B4-BE49-F238E27FC236}">
+                        <a16:creationId xmlns:a16="http://schemas.microsoft.com/office/drawing/2014/main" id="{4D3221F4-802B-4D47-A711-487D4599AEF3}"/>
+                      </a:ext>
+                    </a:extLst>
+                  </p:cNvPr>
+                  <p:cNvSpPr/>
+                  <p:nvPr/>
+                </p:nvSpPr>
+                <p:spPr>
+                  <a:xfrm flipH="1">
+                    <a:off x="8666162" y="3254982"/>
+                    <a:ext cx="762000" cy="762000"/>
+                  </a:xfrm>
+                  <a:prstGeom prst="rect">
+                    <a:avLst/>
+                  </a:prstGeom>
+                  <a:grpFill/>
+                  <a:ln w="38100">
+                    <a:solidFill>
+                      <a:schemeClr val="accent4"/>
+                    </a:solidFill>
+                  </a:ln>
+                </p:spPr>
+                <p:style>
+                  <a:lnRef idx="2">
+                    <a:schemeClr val="accent1">
+                      <a:shade val="50000"/>
+                    </a:schemeClr>
+                  </a:lnRef>
+                  <a:fillRef idx="1">
+                    <a:schemeClr val="accent1"/>
+                  </a:fillRef>
+                  <a:effectRef idx="0">
+                    <a:schemeClr val="accent1"/>
+                  </a:effectRef>
+                  <a:fontRef idx="minor">
+                    <a:schemeClr val="lt1"/>
+                  </a:fontRef>
+                </p:style>
+                <p:txBody>
+                  <a:bodyPr rtlCol="0" anchor="ctr"/>
+                  <a:lstStyle/>
+                  <a:p>
+                    <a:pPr algn="ctr"/>
+                    <a:endParaRPr lang="pt-PT"/>
+                  </a:p>
+                </p:txBody>
+              </p:sp>
+              <p:sp>
+                <p:nvSpPr>
+                  <p:cNvPr id="515" name="Rectangle 514">
+                    <a:extLst>
+                      <a:ext uri="{FF2B5EF4-FFF2-40B4-BE49-F238E27FC236}">
+                        <a16:creationId xmlns:a16="http://schemas.microsoft.com/office/drawing/2014/main" id="{F07D12B5-FC39-4068-BA24-8D4EE0C5BDE5}"/>
+                      </a:ext>
+                    </a:extLst>
+                  </p:cNvPr>
+                  <p:cNvSpPr/>
+                  <p:nvPr/>
+                </p:nvSpPr>
+                <p:spPr>
+                  <a:xfrm flipH="1">
+                    <a:off x="8666162" y="4016982"/>
+                    <a:ext cx="762000" cy="762000"/>
+                  </a:xfrm>
+                  <a:prstGeom prst="rect">
+                    <a:avLst/>
+                  </a:prstGeom>
+                  <a:grpFill/>
+                  <a:ln w="38100">
+                    <a:solidFill>
+                      <a:schemeClr val="accent4"/>
+                    </a:solidFill>
+                  </a:ln>
+                </p:spPr>
+                <p:style>
+                  <a:lnRef idx="2">
+                    <a:schemeClr val="accent1">
+                      <a:shade val="50000"/>
+                    </a:schemeClr>
+                  </a:lnRef>
+                  <a:fillRef idx="1">
+                    <a:schemeClr val="accent1"/>
+                  </a:fillRef>
+                  <a:effectRef idx="0">
+                    <a:schemeClr val="accent1"/>
+                  </a:effectRef>
+                  <a:fontRef idx="minor">
+                    <a:schemeClr val="lt1"/>
+                  </a:fontRef>
+                </p:style>
+                <p:txBody>
+                  <a:bodyPr rtlCol="0" anchor="ctr"/>
+                  <a:lstStyle/>
+                  <a:p>
+                    <a:pPr algn="ctr"/>
+                    <a:endParaRPr lang="pt-PT"/>
+                  </a:p>
+                </p:txBody>
+              </p:sp>
+              <p:sp>
+                <p:nvSpPr>
+                  <p:cNvPr id="516" name="Rectangle 515">
+                    <a:extLst>
+                      <a:ext uri="{FF2B5EF4-FFF2-40B4-BE49-F238E27FC236}">
+                        <a16:creationId xmlns:a16="http://schemas.microsoft.com/office/drawing/2014/main" id="{CECB61D7-5571-4C0D-B51A-5748CE5365A0}"/>
+                      </a:ext>
+                    </a:extLst>
+                  </p:cNvPr>
+                  <p:cNvSpPr/>
+                  <p:nvPr/>
+                </p:nvSpPr>
+                <p:spPr>
+                  <a:xfrm flipH="1">
+                    <a:off x="8666162" y="4778982"/>
+                    <a:ext cx="762000" cy="762000"/>
+                  </a:xfrm>
+                  <a:prstGeom prst="rect">
+                    <a:avLst/>
+                  </a:prstGeom>
+                  <a:grpFill/>
+                  <a:ln w="38100">
+                    <a:solidFill>
+                      <a:schemeClr val="accent4"/>
+                    </a:solidFill>
+                  </a:ln>
+                </p:spPr>
+                <p:style>
+                  <a:lnRef idx="2">
+                    <a:schemeClr val="accent1">
+                      <a:shade val="50000"/>
+                    </a:schemeClr>
+                  </a:lnRef>
+                  <a:fillRef idx="1">
+                    <a:schemeClr val="accent1"/>
+                  </a:fillRef>
+                  <a:effectRef idx="0">
+                    <a:schemeClr val="accent1"/>
+                  </a:effectRef>
+                  <a:fontRef idx="minor">
+                    <a:schemeClr val="lt1"/>
+                  </a:fontRef>
+                </p:style>
+                <p:txBody>
+                  <a:bodyPr rtlCol="0" anchor="ctr"/>
+                  <a:lstStyle/>
+                  <a:p>
+                    <a:pPr algn="ctr"/>
+                    <a:endParaRPr lang="pt-PT"/>
+                  </a:p>
+                </p:txBody>
+              </p:sp>
+              <p:sp>
+                <p:nvSpPr>
+                  <p:cNvPr id="517" name="Rectangle 516">
+                    <a:extLst>
+                      <a:ext uri="{FF2B5EF4-FFF2-40B4-BE49-F238E27FC236}">
+                        <a16:creationId xmlns:a16="http://schemas.microsoft.com/office/drawing/2014/main" id="{E70253CA-1E80-4942-A5B9-223882280210}"/>
+                      </a:ext>
+                    </a:extLst>
+                  </p:cNvPr>
+                  <p:cNvSpPr/>
+                  <p:nvPr/>
+                </p:nvSpPr>
+                <p:spPr>
+                  <a:xfrm flipH="1">
+                    <a:off x="8666162" y="5540982"/>
+                    <a:ext cx="762000" cy="762000"/>
+                  </a:xfrm>
+                  <a:prstGeom prst="rect">
+                    <a:avLst/>
+                  </a:prstGeom>
+                  <a:grpFill/>
+                  <a:ln w="38100">
+                    <a:solidFill>
+                      <a:schemeClr val="accent4"/>
+                    </a:solidFill>
+                  </a:ln>
+                </p:spPr>
+                <p:style>
+                  <a:lnRef idx="2">
+                    <a:schemeClr val="accent1">
+                      <a:shade val="50000"/>
+                    </a:schemeClr>
+                  </a:lnRef>
+                  <a:fillRef idx="1">
+                    <a:schemeClr val="accent1"/>
+                  </a:fillRef>
+                  <a:effectRef idx="0">
+                    <a:schemeClr val="accent1"/>
+                  </a:effectRef>
+                  <a:fontRef idx="minor">
+                    <a:schemeClr val="lt1"/>
+                  </a:fontRef>
+                </p:style>
+                <p:txBody>
+                  <a:bodyPr rtlCol="0" anchor="ctr"/>
+                  <a:lstStyle/>
+                  <a:p>
+                    <a:pPr algn="ctr"/>
+                    <a:endParaRPr lang="pt-PT"/>
+                  </a:p>
+                </p:txBody>
+              </p:sp>
+              <p:sp>
+                <p:nvSpPr>
+                  <p:cNvPr id="518" name="Rectangle 517">
+                    <a:extLst>
+                      <a:ext uri="{FF2B5EF4-FFF2-40B4-BE49-F238E27FC236}">
+                        <a16:creationId xmlns:a16="http://schemas.microsoft.com/office/drawing/2014/main" id="{E88068EC-E30B-4D3F-8EC4-E86F6E4C8158}"/>
+                      </a:ext>
+                    </a:extLst>
+                  </p:cNvPr>
+                  <p:cNvSpPr/>
+                  <p:nvPr/>
+                </p:nvSpPr>
+                <p:spPr>
+                  <a:xfrm flipH="1">
+                    <a:off x="9428162" y="3254982"/>
+                    <a:ext cx="762000" cy="762000"/>
+                  </a:xfrm>
+                  <a:prstGeom prst="rect">
+                    <a:avLst/>
+                  </a:prstGeom>
+                  <a:grpFill/>
+                  <a:ln w="38100">
+                    <a:solidFill>
+                      <a:schemeClr val="accent4"/>
+                    </a:solidFill>
+                  </a:ln>
+                </p:spPr>
+                <p:style>
+                  <a:lnRef idx="2">
+                    <a:schemeClr val="accent1">
+                      <a:shade val="50000"/>
+                    </a:schemeClr>
+                  </a:lnRef>
+                  <a:fillRef idx="1">
+                    <a:schemeClr val="accent1"/>
+                  </a:fillRef>
+                  <a:effectRef idx="0">
+                    <a:schemeClr val="accent1"/>
+                  </a:effectRef>
+                  <a:fontRef idx="minor">
+                    <a:schemeClr val="lt1"/>
+                  </a:fontRef>
+                </p:style>
+                <p:txBody>
+                  <a:bodyPr rtlCol="0" anchor="ctr"/>
+                  <a:lstStyle/>
+                  <a:p>
+                    <a:pPr algn="ctr"/>
+                    <a:endParaRPr lang="pt-PT"/>
+                  </a:p>
+                </p:txBody>
+              </p:sp>
+              <p:sp>
+                <p:nvSpPr>
+                  <p:cNvPr id="519" name="Rectangle 518">
+                    <a:extLst>
+                      <a:ext uri="{FF2B5EF4-FFF2-40B4-BE49-F238E27FC236}">
+                        <a16:creationId xmlns:a16="http://schemas.microsoft.com/office/drawing/2014/main" id="{86247766-F3F1-448F-8CCB-58AF1107449E}"/>
+                      </a:ext>
+                    </a:extLst>
+                  </p:cNvPr>
+                  <p:cNvSpPr/>
+                  <p:nvPr/>
+                </p:nvSpPr>
+                <p:spPr>
+                  <a:xfrm flipH="1">
+                    <a:off x="9428162" y="4016982"/>
+                    <a:ext cx="762000" cy="762000"/>
+                  </a:xfrm>
+                  <a:prstGeom prst="rect">
+                    <a:avLst/>
+                  </a:prstGeom>
+                  <a:grpFill/>
+                  <a:ln w="38100">
+                    <a:solidFill>
+                      <a:schemeClr val="accent4"/>
+                    </a:solidFill>
+                  </a:ln>
+                </p:spPr>
+                <p:style>
+                  <a:lnRef idx="2">
+                    <a:schemeClr val="accent1">
+                      <a:shade val="50000"/>
+                    </a:schemeClr>
+                  </a:lnRef>
+                  <a:fillRef idx="1">
+                    <a:schemeClr val="accent1"/>
+                  </a:fillRef>
+                  <a:effectRef idx="0">
+                    <a:schemeClr val="accent1"/>
+                  </a:effectRef>
+                  <a:fontRef idx="minor">
+                    <a:schemeClr val="lt1"/>
+                  </a:fontRef>
+                </p:style>
+                <p:txBody>
+                  <a:bodyPr rtlCol="0" anchor="ctr"/>
+                  <a:lstStyle/>
+                  <a:p>
+                    <a:pPr algn="ctr"/>
+                    <a:endParaRPr lang="pt-PT"/>
+                  </a:p>
+                </p:txBody>
+              </p:sp>
+              <p:sp>
+                <p:nvSpPr>
+                  <p:cNvPr id="520" name="Rectangle 519">
+                    <a:extLst>
+                      <a:ext uri="{FF2B5EF4-FFF2-40B4-BE49-F238E27FC236}">
+                        <a16:creationId xmlns:a16="http://schemas.microsoft.com/office/drawing/2014/main" id="{8F075282-84AD-4A0E-BF43-9E8EE6B4C531}"/>
+                      </a:ext>
+                    </a:extLst>
+                  </p:cNvPr>
+                  <p:cNvSpPr/>
+                  <p:nvPr/>
+                </p:nvSpPr>
+                <p:spPr>
+                  <a:xfrm flipH="1">
+                    <a:off x="9428162" y="4778982"/>
+                    <a:ext cx="762000" cy="762000"/>
+                  </a:xfrm>
+                  <a:prstGeom prst="rect">
+                    <a:avLst/>
+                  </a:prstGeom>
+                  <a:grpFill/>
+                  <a:ln w="38100">
+                    <a:solidFill>
+                      <a:schemeClr val="accent4"/>
+                    </a:solidFill>
+                  </a:ln>
+                </p:spPr>
+                <p:style>
+                  <a:lnRef idx="2">
+                    <a:schemeClr val="accent1">
+                      <a:shade val="50000"/>
+                    </a:schemeClr>
+                  </a:lnRef>
+                  <a:fillRef idx="1">
+                    <a:schemeClr val="accent1"/>
+                  </a:fillRef>
+                  <a:effectRef idx="0">
+                    <a:schemeClr val="accent1"/>
+                  </a:effectRef>
+                  <a:fontRef idx="minor">
+                    <a:schemeClr val="lt1"/>
+                  </a:fontRef>
+                </p:style>
+                <p:txBody>
+                  <a:bodyPr rtlCol="0" anchor="ctr"/>
+                  <a:lstStyle/>
+                  <a:p>
+                    <a:pPr algn="ctr"/>
+                    <a:endParaRPr lang="pt-PT"/>
+                  </a:p>
+                </p:txBody>
+              </p:sp>
+              <p:sp>
+                <p:nvSpPr>
+                  <p:cNvPr id="521" name="Rectangle 520">
+                    <a:extLst>
+                      <a:ext uri="{FF2B5EF4-FFF2-40B4-BE49-F238E27FC236}">
+                        <a16:creationId xmlns:a16="http://schemas.microsoft.com/office/drawing/2014/main" id="{0F0FC488-7032-42A1-BAF9-875D2954252E}"/>
+                      </a:ext>
+                    </a:extLst>
+                  </p:cNvPr>
+                  <p:cNvSpPr/>
+                  <p:nvPr/>
+                </p:nvSpPr>
+                <p:spPr>
+                  <a:xfrm flipH="1">
+                    <a:off x="9428162" y="5540982"/>
+                    <a:ext cx="762000" cy="762000"/>
+                  </a:xfrm>
+                  <a:prstGeom prst="rect">
+                    <a:avLst/>
+                  </a:prstGeom>
+                  <a:grpFill/>
+                  <a:ln w="38100">
+                    <a:solidFill>
+                      <a:schemeClr val="accent4"/>
+                    </a:solidFill>
+                  </a:ln>
+                </p:spPr>
+                <p:style>
+                  <a:lnRef idx="2">
+                    <a:schemeClr val="accent1">
+                      <a:shade val="50000"/>
+                    </a:schemeClr>
+                  </a:lnRef>
+                  <a:fillRef idx="1">
+                    <a:schemeClr val="accent1"/>
+                  </a:fillRef>
+                  <a:effectRef idx="0">
+                    <a:schemeClr val="accent1"/>
+                  </a:effectRef>
+                  <a:fontRef idx="minor">
+                    <a:schemeClr val="lt1"/>
+                  </a:fontRef>
+                </p:style>
+                <p:txBody>
+                  <a:bodyPr rtlCol="0" anchor="ctr"/>
+                  <a:lstStyle/>
+                  <a:p>
+                    <a:pPr algn="ctr"/>
+                    <a:endParaRPr lang="pt-PT"/>
+                  </a:p>
+                </p:txBody>
+              </p:sp>
+              <p:sp>
+                <p:nvSpPr>
+                  <p:cNvPr id="522" name="Rectangle 521">
+                    <a:extLst>
+                      <a:ext uri="{FF2B5EF4-FFF2-40B4-BE49-F238E27FC236}">
+                        <a16:creationId xmlns:a16="http://schemas.microsoft.com/office/drawing/2014/main" id="{CF5E9258-A270-4BF4-B595-272F43AE77BC}"/>
+                      </a:ext>
+                    </a:extLst>
+                  </p:cNvPr>
+                  <p:cNvSpPr/>
+                  <p:nvPr/>
+                </p:nvSpPr>
+                <p:spPr>
+                  <a:xfrm flipH="1">
+                    <a:off x="8666162" y="206982"/>
+                    <a:ext cx="762000" cy="762000"/>
+                  </a:xfrm>
+                  <a:prstGeom prst="rect">
+                    <a:avLst/>
+                  </a:prstGeom>
+                  <a:grpFill/>
+                  <a:ln w="38100">
+                    <a:solidFill>
+                      <a:schemeClr val="accent4"/>
+                    </a:solidFill>
+                  </a:ln>
+                </p:spPr>
+                <p:style>
+                  <a:lnRef idx="2">
+                    <a:schemeClr val="accent1">
+                      <a:shade val="50000"/>
+                    </a:schemeClr>
+                  </a:lnRef>
+                  <a:fillRef idx="1">
+                    <a:schemeClr val="accent1"/>
+                  </a:fillRef>
+                  <a:effectRef idx="0">
+                    <a:schemeClr val="accent1"/>
+                  </a:effectRef>
+                  <a:fontRef idx="minor">
+                    <a:schemeClr val="lt1"/>
+                  </a:fontRef>
+                </p:style>
+                <p:txBody>
+                  <a:bodyPr rtlCol="0" anchor="ctr"/>
+                  <a:lstStyle/>
+                  <a:p>
+                    <a:pPr algn="ctr"/>
+                    <a:endParaRPr lang="pt-PT"/>
+                  </a:p>
+                </p:txBody>
+              </p:sp>
+              <p:sp>
+                <p:nvSpPr>
+                  <p:cNvPr id="523" name="Rectangle 522">
+                    <a:extLst>
+                      <a:ext uri="{FF2B5EF4-FFF2-40B4-BE49-F238E27FC236}">
+                        <a16:creationId xmlns:a16="http://schemas.microsoft.com/office/drawing/2014/main" id="{BC1B3F85-3838-493E-AE11-53F96C628A22}"/>
+                      </a:ext>
+                    </a:extLst>
+                  </p:cNvPr>
+                  <p:cNvSpPr/>
+                  <p:nvPr/>
+                </p:nvSpPr>
+                <p:spPr>
+                  <a:xfrm flipH="1">
+                    <a:off x="8666162" y="968982"/>
+                    <a:ext cx="762000" cy="762000"/>
+                  </a:xfrm>
+                  <a:prstGeom prst="rect">
+                    <a:avLst/>
+                  </a:prstGeom>
+                  <a:grpFill/>
+                  <a:ln w="38100">
+                    <a:solidFill>
+                      <a:schemeClr val="accent4"/>
+                    </a:solidFill>
+                  </a:ln>
+                </p:spPr>
+                <p:style>
+                  <a:lnRef idx="2">
+                    <a:schemeClr val="accent1">
+                      <a:shade val="50000"/>
+                    </a:schemeClr>
+                  </a:lnRef>
+                  <a:fillRef idx="1">
+                    <a:schemeClr val="accent1"/>
+                  </a:fillRef>
+                  <a:effectRef idx="0">
+                    <a:schemeClr val="accent1"/>
+                  </a:effectRef>
+                  <a:fontRef idx="minor">
+                    <a:schemeClr val="lt1"/>
+                  </a:fontRef>
+                </p:style>
+                <p:txBody>
+                  <a:bodyPr rtlCol="0" anchor="ctr"/>
+                  <a:lstStyle/>
+                  <a:p>
+                    <a:pPr algn="ctr"/>
+                    <a:endParaRPr lang="pt-PT"/>
+                  </a:p>
+                </p:txBody>
+              </p:sp>
+              <p:sp>
+                <p:nvSpPr>
+                  <p:cNvPr id="524" name="Rectangle 523">
+                    <a:extLst>
+                      <a:ext uri="{FF2B5EF4-FFF2-40B4-BE49-F238E27FC236}">
+                        <a16:creationId xmlns:a16="http://schemas.microsoft.com/office/drawing/2014/main" id="{16146BF1-83D6-4761-86A6-54FAB26F7A2D}"/>
+                      </a:ext>
+                    </a:extLst>
+                  </p:cNvPr>
+                  <p:cNvSpPr/>
+                  <p:nvPr/>
+                </p:nvSpPr>
+                <p:spPr>
+                  <a:xfrm flipH="1">
+                    <a:off x="8666162" y="1730982"/>
+                    <a:ext cx="762000" cy="762000"/>
+                  </a:xfrm>
+                  <a:prstGeom prst="rect">
+                    <a:avLst/>
+                  </a:prstGeom>
+                  <a:grpFill/>
+                  <a:ln w="38100">
+                    <a:solidFill>
+                      <a:schemeClr val="accent4"/>
+                    </a:solidFill>
+                  </a:ln>
+                </p:spPr>
+                <p:style>
+                  <a:lnRef idx="2">
+                    <a:schemeClr val="accent1">
+                      <a:shade val="50000"/>
+                    </a:schemeClr>
+                  </a:lnRef>
+                  <a:fillRef idx="1">
+                    <a:schemeClr val="accent1"/>
+                  </a:fillRef>
+                  <a:effectRef idx="0">
+                    <a:schemeClr val="accent1"/>
+                  </a:effectRef>
+                  <a:fontRef idx="minor">
+                    <a:schemeClr val="lt1"/>
+                  </a:fontRef>
+                </p:style>
+                <p:txBody>
+                  <a:bodyPr rtlCol="0" anchor="ctr"/>
+                  <a:lstStyle/>
+                  <a:p>
+                    <a:pPr algn="ctr"/>
+                    <a:endParaRPr lang="pt-PT"/>
+                  </a:p>
+                </p:txBody>
+              </p:sp>
+              <p:sp>
+                <p:nvSpPr>
+                  <p:cNvPr id="525" name="Rectangle 524">
+                    <a:extLst>
+                      <a:ext uri="{FF2B5EF4-FFF2-40B4-BE49-F238E27FC236}">
+                        <a16:creationId xmlns:a16="http://schemas.microsoft.com/office/drawing/2014/main" id="{F40A2201-6E4E-4FA4-82DE-1A7D7EFCAE20}"/>
+                      </a:ext>
+                    </a:extLst>
+                  </p:cNvPr>
+                  <p:cNvSpPr/>
+                  <p:nvPr/>
+                </p:nvSpPr>
+                <p:spPr>
+                  <a:xfrm flipH="1">
+                    <a:off x="9428162" y="206982"/>
+                    <a:ext cx="762000" cy="762000"/>
+                  </a:xfrm>
+                  <a:prstGeom prst="rect">
+                    <a:avLst/>
+                  </a:prstGeom>
+                  <a:grpFill/>
+                  <a:ln w="38100">
+                    <a:solidFill>
+                      <a:schemeClr val="accent4"/>
+                    </a:solidFill>
+                  </a:ln>
+                </p:spPr>
+                <p:style>
+                  <a:lnRef idx="2">
+                    <a:schemeClr val="accent1">
+                      <a:shade val="50000"/>
+                    </a:schemeClr>
+                  </a:lnRef>
+                  <a:fillRef idx="1">
+                    <a:schemeClr val="accent1"/>
+                  </a:fillRef>
+                  <a:effectRef idx="0">
+                    <a:schemeClr val="accent1"/>
+                  </a:effectRef>
+                  <a:fontRef idx="minor">
+                    <a:schemeClr val="lt1"/>
+                  </a:fontRef>
+                </p:style>
+                <p:txBody>
+                  <a:bodyPr rtlCol="0" anchor="ctr"/>
+                  <a:lstStyle/>
+                  <a:p>
+                    <a:pPr algn="ctr"/>
+                    <a:endParaRPr lang="pt-PT"/>
+                  </a:p>
+                </p:txBody>
+              </p:sp>
+              <p:sp>
+                <p:nvSpPr>
+                  <p:cNvPr id="526" name="Rectangle 525">
+                    <a:extLst>
+                      <a:ext uri="{FF2B5EF4-FFF2-40B4-BE49-F238E27FC236}">
+                        <a16:creationId xmlns:a16="http://schemas.microsoft.com/office/drawing/2014/main" id="{F2ABD8DD-8A5A-45DF-BDC7-C01A46ECA7DD}"/>
+                      </a:ext>
+                    </a:extLst>
+                  </p:cNvPr>
+                  <p:cNvSpPr/>
+                  <p:nvPr/>
+                </p:nvSpPr>
+                <p:spPr>
+                  <a:xfrm flipH="1">
+                    <a:off x="9428162" y="968982"/>
+                    <a:ext cx="762000" cy="762000"/>
+                  </a:xfrm>
+                  <a:prstGeom prst="rect">
+                    <a:avLst/>
+                  </a:prstGeom>
+                  <a:grpFill/>
+                  <a:ln w="38100">
+                    <a:solidFill>
+                      <a:schemeClr val="accent4"/>
+                    </a:solidFill>
+                  </a:ln>
+                </p:spPr>
+                <p:style>
+                  <a:lnRef idx="2">
+                    <a:schemeClr val="accent1">
+                      <a:shade val="50000"/>
+                    </a:schemeClr>
+                  </a:lnRef>
+                  <a:fillRef idx="1">
+                    <a:schemeClr val="accent1"/>
+                  </a:fillRef>
+                  <a:effectRef idx="0">
+                    <a:schemeClr val="accent1"/>
+                  </a:effectRef>
+                  <a:fontRef idx="minor">
+                    <a:schemeClr val="lt1"/>
+                  </a:fontRef>
+                </p:style>
+                <p:txBody>
+                  <a:bodyPr rtlCol="0" anchor="ctr"/>
+                  <a:lstStyle/>
+                  <a:p>
+                    <a:pPr algn="ctr"/>
+                    <a:endParaRPr lang="pt-PT"/>
+                  </a:p>
+                </p:txBody>
+              </p:sp>
+              <p:sp>
+                <p:nvSpPr>
+                  <p:cNvPr id="527" name="Rectangle 526">
+                    <a:extLst>
+                      <a:ext uri="{FF2B5EF4-FFF2-40B4-BE49-F238E27FC236}">
+                        <a16:creationId xmlns:a16="http://schemas.microsoft.com/office/drawing/2014/main" id="{7E7A9F83-615A-4CF4-83F2-86FA2BC20311}"/>
+                      </a:ext>
+                    </a:extLst>
+                  </p:cNvPr>
+                  <p:cNvSpPr/>
+                  <p:nvPr/>
+                </p:nvSpPr>
+                <p:spPr>
+                  <a:xfrm flipH="1">
+                    <a:off x="9428162" y="1730982"/>
+                    <a:ext cx="762000" cy="762000"/>
+                  </a:xfrm>
+                  <a:prstGeom prst="rect">
+                    <a:avLst/>
+                  </a:prstGeom>
+                  <a:grpFill/>
+                  <a:ln w="38100">
+                    <a:solidFill>
+                      <a:schemeClr val="accent4"/>
+                    </a:solidFill>
+                  </a:ln>
+                </p:spPr>
+                <p:style>
+                  <a:lnRef idx="2">
+                    <a:schemeClr val="accent1">
+                      <a:shade val="50000"/>
+                    </a:schemeClr>
+                  </a:lnRef>
+                  <a:fillRef idx="1">
+                    <a:schemeClr val="accent1"/>
+                  </a:fillRef>
+                  <a:effectRef idx="0">
+                    <a:schemeClr val="accent1"/>
+                  </a:effectRef>
+                  <a:fontRef idx="minor">
+                    <a:schemeClr val="lt1"/>
+                  </a:fontRef>
+                </p:style>
+                <p:txBody>
+                  <a:bodyPr rtlCol="0" anchor="ctr"/>
+                  <a:lstStyle/>
+                  <a:p>
+                    <a:pPr algn="ctr"/>
+                    <a:endParaRPr lang="pt-PT"/>
+                  </a:p>
+                </p:txBody>
+              </p:sp>
+              <p:sp>
+                <p:nvSpPr>
+                  <p:cNvPr id="528" name="Rectangle 527">
+                    <a:extLst>
+                      <a:ext uri="{FF2B5EF4-FFF2-40B4-BE49-F238E27FC236}">
+                        <a16:creationId xmlns:a16="http://schemas.microsoft.com/office/drawing/2014/main" id="{C87D2531-2D47-47F1-BC05-85E02647ABCC}"/>
+                      </a:ext>
+                    </a:extLst>
+                  </p:cNvPr>
+                  <p:cNvSpPr/>
+                  <p:nvPr/>
+                </p:nvSpPr>
+                <p:spPr>
+                  <a:xfrm flipH="1">
+                    <a:off x="8666162" y="2492982"/>
+                    <a:ext cx="762000" cy="762000"/>
+                  </a:xfrm>
+                  <a:prstGeom prst="rect">
+                    <a:avLst/>
+                  </a:prstGeom>
+                  <a:grpFill/>
+                  <a:ln w="38100">
+                    <a:solidFill>
+                      <a:schemeClr val="accent4"/>
+                    </a:solidFill>
+                  </a:ln>
+                </p:spPr>
+                <p:style>
+                  <a:lnRef idx="2">
+                    <a:schemeClr val="accent1">
+                      <a:shade val="50000"/>
+                    </a:schemeClr>
+                  </a:lnRef>
+                  <a:fillRef idx="1">
+                    <a:schemeClr val="accent1"/>
+                  </a:fillRef>
+                  <a:effectRef idx="0">
+                    <a:schemeClr val="accent1"/>
+                  </a:effectRef>
+                  <a:fontRef idx="minor">
+                    <a:schemeClr val="lt1"/>
+                  </a:fontRef>
+                </p:style>
+                <p:txBody>
+                  <a:bodyPr rtlCol="0" anchor="ctr"/>
+                  <a:lstStyle/>
+                  <a:p>
+                    <a:pPr algn="ctr"/>
+                    <a:endParaRPr lang="pt-PT"/>
+                  </a:p>
+                </p:txBody>
+              </p:sp>
+              <p:sp>
+                <p:nvSpPr>
+                  <p:cNvPr id="529" name="Rectangle 528">
+                    <a:extLst>
+                      <a:ext uri="{FF2B5EF4-FFF2-40B4-BE49-F238E27FC236}">
+                        <a16:creationId xmlns:a16="http://schemas.microsoft.com/office/drawing/2014/main" id="{A2466DDE-5161-469B-8708-F594F4ED6F6B}"/>
+                      </a:ext>
+                    </a:extLst>
+                  </p:cNvPr>
+                  <p:cNvSpPr/>
+                  <p:nvPr/>
+                </p:nvSpPr>
+                <p:spPr>
+                  <a:xfrm flipH="1">
+                    <a:off x="9428162" y="2492982"/>
+                    <a:ext cx="762000" cy="762000"/>
+                  </a:xfrm>
+                  <a:prstGeom prst="rect">
+                    <a:avLst/>
+                  </a:prstGeom>
+                  <a:grpFill/>
+                  <a:ln w="38100">
+                    <a:solidFill>
+                      <a:schemeClr val="accent4"/>
+                    </a:solidFill>
+                  </a:ln>
+                </p:spPr>
+                <p:style>
+                  <a:lnRef idx="2">
+                    <a:schemeClr val="accent1">
+                      <a:shade val="50000"/>
+                    </a:schemeClr>
+                  </a:lnRef>
+                  <a:fillRef idx="1">
+                    <a:schemeClr val="accent1"/>
+                  </a:fillRef>
+                  <a:effectRef idx="0">
+                    <a:schemeClr val="accent1"/>
+                  </a:effectRef>
+                  <a:fontRef idx="minor">
+                    <a:schemeClr val="lt1"/>
+                  </a:fontRef>
+                </p:style>
+                <p:txBody>
+                  <a:bodyPr rtlCol="0" anchor="ctr"/>
+                  <a:lstStyle/>
+                  <a:p>
+                    <a:pPr algn="ctr"/>
+                    <a:endParaRPr lang="pt-PT"/>
+                  </a:p>
+                </p:txBody>
+              </p:sp>
+            </p:grpSp>
+          </p:grpSp>
+          <p:cxnSp>
+            <p:nvCxnSpPr>
+              <p:cNvPr id="530" name="Straight Connector 529">
+                <a:extLst>
+                  <a:ext uri="{FF2B5EF4-FFF2-40B4-BE49-F238E27FC236}">
+                    <a16:creationId xmlns:a16="http://schemas.microsoft.com/office/drawing/2014/main" id="{A20ACD95-CC60-4E98-B8C1-059401777F24}"/>
+                  </a:ext>
+                </a:extLst>
+              </p:cNvPr>
+              <p:cNvCxnSpPr>
+                <a:cxnSpLocks/>
+              </p:cNvCxnSpPr>
+              <p:nvPr/>
+            </p:nvCxnSpPr>
+            <p:spPr>
+              <a:xfrm flipH="1">
+                <a:off x="3612265" y="1778850"/>
+                <a:ext cx="8046573" cy="1"/>
+              </a:xfrm>
+              <a:prstGeom prst="line">
+                <a:avLst/>
+              </a:prstGeom>
+              <a:solidFill>
+                <a:schemeClr val="tx1">
+                  <a:lumMod val="95000"/>
+                  <a:lumOff val="5000"/>
+                </a:schemeClr>
+              </a:solidFill>
+              <a:ln w="76200" cap="rnd">
+                <a:solidFill>
+                  <a:schemeClr val="accent4"/>
+                </a:solidFill>
+              </a:ln>
+            </p:spPr>
+            <p:style>
+              <a:lnRef idx="1">
+                <a:schemeClr val="accent1"/>
+              </a:lnRef>
+              <a:fillRef idx="0">
+                <a:schemeClr val="accent1"/>
+              </a:fillRef>
+              <a:effectRef idx="0">
+                <a:schemeClr val="accent1"/>
+              </a:effectRef>
+              <a:fontRef idx="minor">
+                <a:schemeClr val="tx1"/>
+              </a:fontRef>
+            </p:style>
+          </p:cxnSp>
+          <p:cxnSp>
+            <p:nvCxnSpPr>
+              <p:cNvPr id="538" name="Straight Connector 537">
+                <a:extLst>
+                  <a:ext uri="{FF2B5EF4-FFF2-40B4-BE49-F238E27FC236}">
+                    <a16:creationId xmlns:a16="http://schemas.microsoft.com/office/drawing/2014/main" id="{5B4455E4-4D81-440D-992F-18FB6A72962C}"/>
+                  </a:ext>
+                </a:extLst>
+              </p:cNvPr>
+              <p:cNvCxnSpPr>
+                <a:cxnSpLocks/>
+              </p:cNvCxnSpPr>
+              <p:nvPr/>
+            </p:nvCxnSpPr>
+            <p:spPr>
+              <a:xfrm flipH="1">
+                <a:off x="3612265" y="9915416"/>
+                <a:ext cx="8046573" cy="1"/>
+              </a:xfrm>
+              <a:prstGeom prst="line">
+                <a:avLst/>
+              </a:prstGeom>
+              <a:solidFill>
+                <a:schemeClr val="tx1">
+                  <a:lumMod val="95000"/>
+                  <a:lumOff val="5000"/>
+                </a:schemeClr>
+              </a:solidFill>
+              <a:ln w="76200" cap="rnd">
+                <a:solidFill>
+                  <a:schemeClr val="accent4"/>
+                </a:solidFill>
+              </a:ln>
+            </p:spPr>
+            <p:style>
+              <a:lnRef idx="1">
+                <a:schemeClr val="accent1"/>
+              </a:lnRef>
+              <a:fillRef idx="0">
+                <a:schemeClr val="accent1"/>
+              </a:fillRef>
+              <a:effectRef idx="0">
+                <a:schemeClr val="accent1"/>
+              </a:effectRef>
+              <a:fontRef idx="minor">
+                <a:schemeClr val="tx1"/>
+              </a:fontRef>
+            </p:style>
+          </p:cxnSp>
+          <p:cxnSp>
+            <p:nvCxnSpPr>
+              <p:cNvPr id="539" name="Straight Connector 538">
+                <a:extLst>
+                  <a:ext uri="{FF2B5EF4-FFF2-40B4-BE49-F238E27FC236}">
+                    <a16:creationId xmlns:a16="http://schemas.microsoft.com/office/drawing/2014/main" id="{A273E16D-5C54-46D0-AE5A-BFA43AB902AC}"/>
+                  </a:ext>
+                </a:extLst>
+              </p:cNvPr>
+              <p:cNvCxnSpPr>
+                <a:cxnSpLocks/>
+              </p:cNvCxnSpPr>
+              <p:nvPr/>
+            </p:nvCxnSpPr>
+            <p:spPr>
+              <a:xfrm flipH="1">
+                <a:off x="3612265" y="1778849"/>
+                <a:ext cx="1" cy="8136567"/>
+              </a:xfrm>
+              <a:prstGeom prst="line">
+                <a:avLst/>
+              </a:prstGeom>
+              <a:solidFill>
+                <a:schemeClr val="tx1">
+                  <a:lumMod val="95000"/>
+                  <a:lumOff val="5000"/>
+                </a:schemeClr>
+              </a:solidFill>
+              <a:ln w="76200" cap="rnd">
+                <a:solidFill>
+                  <a:schemeClr val="accent4"/>
+                </a:solidFill>
+              </a:ln>
+            </p:spPr>
+            <p:style>
+              <a:lnRef idx="1">
+                <a:schemeClr val="accent1"/>
+              </a:lnRef>
+              <a:fillRef idx="0">
+                <a:schemeClr val="accent1"/>
+              </a:fillRef>
+              <a:effectRef idx="0">
+                <a:schemeClr val="accent1"/>
+              </a:effectRef>
+              <a:fontRef idx="minor">
+                <a:schemeClr val="tx1"/>
+              </a:fontRef>
+            </p:style>
+          </p:cxnSp>
+          <p:cxnSp>
+            <p:nvCxnSpPr>
+              <p:cNvPr id="542" name="Straight Connector 541">
+                <a:extLst>
+                  <a:ext uri="{FF2B5EF4-FFF2-40B4-BE49-F238E27FC236}">
+                    <a16:creationId xmlns:a16="http://schemas.microsoft.com/office/drawing/2014/main" id="{D7977978-5FC5-4686-9EED-0043417AFD2B}"/>
+                  </a:ext>
+                </a:extLst>
+              </p:cNvPr>
+              <p:cNvCxnSpPr>
+                <a:cxnSpLocks/>
+              </p:cNvCxnSpPr>
+              <p:nvPr/>
+            </p:nvCxnSpPr>
+            <p:spPr>
+              <a:xfrm flipH="1">
+                <a:off x="11658843" y="1778849"/>
+                <a:ext cx="1" cy="8136567"/>
+              </a:xfrm>
+              <a:prstGeom prst="line">
+                <a:avLst/>
+              </a:prstGeom>
+              <a:solidFill>
+                <a:schemeClr val="tx1">
+                  <a:lumMod val="95000"/>
+                  <a:lumOff val="5000"/>
+                </a:schemeClr>
+              </a:solidFill>
+              <a:ln w="76200" cap="rnd">
+                <a:solidFill>
+                  <a:schemeClr val="accent4"/>
+                </a:solidFill>
+              </a:ln>
+            </p:spPr>
+            <p:style>
+              <a:lnRef idx="1">
+                <a:schemeClr val="accent1"/>
+              </a:lnRef>
+              <a:fillRef idx="0">
+                <a:schemeClr val="accent1"/>
+              </a:fillRef>
+              <a:effectRef idx="0">
+                <a:schemeClr val="accent1"/>
+              </a:effectRef>
+              <a:fontRef idx="minor">
+                <a:schemeClr val="tx1"/>
+              </a:fontRef>
+            </p:style>
+          </p:cxnSp>
+          <p:grpSp>
+            <p:nvGrpSpPr>
+              <p:cNvPr id="10" name="Group 9">
+                <a:extLst>
+                  <a:ext uri="{FF2B5EF4-FFF2-40B4-BE49-F238E27FC236}">
+                    <a16:creationId xmlns:a16="http://schemas.microsoft.com/office/drawing/2014/main" id="{5721B67E-2FCC-4C7C-9791-244F19152AF5}"/>
+                  </a:ext>
+                </a:extLst>
+              </p:cNvPr>
+              <p:cNvGrpSpPr/>
+              <p:nvPr/>
+            </p:nvGrpSpPr>
+            <p:grpSpPr>
+              <a:xfrm>
+                <a:off x="5361877" y="2023153"/>
+                <a:ext cx="6041785" cy="7128549"/>
+                <a:chOff x="5361877" y="2023153"/>
+                <a:chExt cx="6041785" cy="7128549"/>
+              </a:xfrm>
+            </p:grpSpPr>
+            <p:sp>
+              <p:nvSpPr>
+                <p:cNvPr id="12" name="Oval 11">
+                  <a:extLst>
+                    <a:ext uri="{FF2B5EF4-FFF2-40B4-BE49-F238E27FC236}">
+                      <a16:creationId xmlns:a16="http://schemas.microsoft.com/office/drawing/2014/main" id="{50A94D4D-903A-43B8-AA6C-A16B104FF1E1}"/>
+                    </a:ext>
+                  </a:extLst>
+                </p:cNvPr>
+                <p:cNvSpPr/>
+                <p:nvPr/>
+              </p:nvSpPr>
+              <p:spPr>
+                <a:xfrm>
+                  <a:off x="9385167" y="7130258"/>
+                  <a:ext cx="506715" cy="506715"/>
+                </a:xfrm>
+                <a:prstGeom prst="ellipse">
+                  <a:avLst/>
+                </a:prstGeom>
+                <a:solidFill>
+                  <a:schemeClr val="tx1">
+                    <a:lumMod val="95000"/>
+                    <a:lumOff val="5000"/>
+                  </a:schemeClr>
+                </a:solidFill>
+                <a:ln w="38100" cap="rnd">
+                  <a:solidFill>
+                    <a:schemeClr val="accent4"/>
+                  </a:solidFill>
+                </a:ln>
+              </p:spPr>
+              <p:style>
+                <a:lnRef idx="1">
+                  <a:schemeClr val="accent1"/>
+                </a:lnRef>
+                <a:fillRef idx="0">
+                  <a:schemeClr val="accent1"/>
+                </a:fillRef>
+                <a:effectRef idx="0">
+                  <a:schemeClr val="accent1"/>
+                </a:effectRef>
+                <a:fontRef idx="minor">
+                  <a:schemeClr val="tx1"/>
+                </a:fontRef>
+              </p:style>
+              <p:txBody>
+                <a:bodyPr rtlCol="0" anchor="ctr"/>
+                <a:lstStyle/>
+                <a:p>
+                  <a:pPr algn="ctr"/>
+                  <a:endParaRPr lang="en-US"/>
+                </a:p>
+              </p:txBody>
+            </p:sp>
+            <p:sp>
+              <p:nvSpPr>
+                <p:cNvPr id="547" name="Oval 546">
+                  <a:extLst>
+                    <a:ext uri="{FF2B5EF4-FFF2-40B4-BE49-F238E27FC236}">
+                      <a16:creationId xmlns:a16="http://schemas.microsoft.com/office/drawing/2014/main" id="{460713A9-7A5F-46F4-8E8E-F4C163A93248}"/>
+                    </a:ext>
+                  </a:extLst>
+                </p:cNvPr>
+                <p:cNvSpPr/>
+                <p:nvPr/>
+              </p:nvSpPr>
+              <p:spPr>
+                <a:xfrm>
+                  <a:off x="10896947" y="5582645"/>
+                  <a:ext cx="506715" cy="506715"/>
+                </a:xfrm>
+                <a:prstGeom prst="ellipse">
+                  <a:avLst/>
+                </a:prstGeom>
+                <a:solidFill>
+                  <a:schemeClr val="tx1">
+                    <a:lumMod val="95000"/>
+                    <a:lumOff val="5000"/>
+                  </a:schemeClr>
+                </a:solidFill>
+                <a:ln w="38100" cap="rnd">
+                  <a:solidFill>
+                    <a:schemeClr val="accent4"/>
+                  </a:solidFill>
+                </a:ln>
+              </p:spPr>
+              <p:style>
+                <a:lnRef idx="1">
+                  <a:schemeClr val="accent1"/>
+                </a:lnRef>
+                <a:fillRef idx="0">
+                  <a:schemeClr val="accent1"/>
+                </a:fillRef>
+                <a:effectRef idx="0">
+                  <a:schemeClr val="accent1"/>
+                </a:effectRef>
+                <a:fontRef idx="minor">
+                  <a:schemeClr val="tx1"/>
+                </a:fontRef>
+              </p:style>
+              <p:txBody>
+                <a:bodyPr rtlCol="0" anchor="ctr"/>
+                <a:lstStyle/>
+                <a:p>
+                  <a:pPr algn="ctr"/>
+                  <a:endParaRPr lang="en-US"/>
+                </a:p>
+              </p:txBody>
+            </p:sp>
+            <p:sp>
+              <p:nvSpPr>
+                <p:cNvPr id="548" name="Oval 547">
+                  <a:extLst>
+                    <a:ext uri="{FF2B5EF4-FFF2-40B4-BE49-F238E27FC236}">
+                      <a16:creationId xmlns:a16="http://schemas.microsoft.com/office/drawing/2014/main" id="{7E5CF735-7D94-4C74-A6BD-68C8AA884872}"/>
+                    </a:ext>
+                  </a:extLst>
+                </p:cNvPr>
+                <p:cNvSpPr/>
+                <p:nvPr/>
+              </p:nvSpPr>
+              <p:spPr>
+                <a:xfrm>
+                  <a:off x="6858134" y="2023153"/>
+                  <a:ext cx="506715" cy="506715"/>
+                </a:xfrm>
+                <a:prstGeom prst="ellipse">
+                  <a:avLst/>
+                </a:prstGeom>
+                <a:solidFill>
+                  <a:schemeClr val="tx1">
+                    <a:lumMod val="95000"/>
+                    <a:lumOff val="5000"/>
+                  </a:schemeClr>
+                </a:solidFill>
+                <a:ln w="38100" cap="rnd">
+                  <a:solidFill>
+                    <a:schemeClr val="accent4"/>
+                  </a:solidFill>
+                </a:ln>
+              </p:spPr>
+              <p:style>
+                <a:lnRef idx="1">
+                  <a:schemeClr val="accent1"/>
+                </a:lnRef>
+                <a:fillRef idx="0">
+                  <a:schemeClr val="accent1"/>
+                </a:fillRef>
+                <a:effectRef idx="0">
+                  <a:schemeClr val="accent1"/>
+                </a:effectRef>
+                <a:fontRef idx="minor">
+                  <a:schemeClr val="tx1"/>
+                </a:fontRef>
+              </p:style>
+              <p:txBody>
+                <a:bodyPr rtlCol="0" anchor="ctr"/>
+                <a:lstStyle/>
+                <a:p>
+                  <a:pPr algn="ctr"/>
+                  <a:endParaRPr lang="en-US"/>
+                </a:p>
+              </p:txBody>
+            </p:sp>
+            <p:sp>
+              <p:nvSpPr>
+                <p:cNvPr id="549" name="Oval 548">
+                  <a:extLst>
+                    <a:ext uri="{FF2B5EF4-FFF2-40B4-BE49-F238E27FC236}">
+                      <a16:creationId xmlns:a16="http://schemas.microsoft.com/office/drawing/2014/main" id="{5A04F733-A69A-464A-9FEF-5768BFDF18E8}"/>
+                    </a:ext>
+                  </a:extLst>
+                </p:cNvPr>
+                <p:cNvSpPr/>
+                <p:nvPr/>
+              </p:nvSpPr>
+              <p:spPr>
+                <a:xfrm>
+                  <a:off x="6376460" y="8644987"/>
+                  <a:ext cx="506715" cy="506715"/>
+                </a:xfrm>
+                <a:prstGeom prst="ellipse">
+                  <a:avLst/>
+                </a:prstGeom>
+                <a:solidFill>
+                  <a:schemeClr val="tx1">
+                    <a:lumMod val="95000"/>
+                    <a:lumOff val="5000"/>
+                  </a:schemeClr>
+                </a:solidFill>
+                <a:ln w="38100" cap="rnd">
+                  <a:solidFill>
+                    <a:schemeClr val="accent4"/>
+                  </a:solidFill>
+                </a:ln>
+              </p:spPr>
+              <p:style>
+                <a:lnRef idx="1">
+                  <a:schemeClr val="accent1"/>
+                </a:lnRef>
+                <a:fillRef idx="0">
+                  <a:schemeClr val="accent1"/>
+                </a:fillRef>
+                <a:effectRef idx="0">
+                  <a:schemeClr val="accent1"/>
+                </a:effectRef>
+                <a:fontRef idx="minor">
+                  <a:schemeClr val="tx1"/>
+                </a:fontRef>
+              </p:style>
+              <p:txBody>
+                <a:bodyPr rtlCol="0" anchor="ctr"/>
+                <a:lstStyle/>
+                <a:p>
+                  <a:pPr algn="ctr"/>
+                  <a:endParaRPr lang="en-US"/>
+                </a:p>
+              </p:txBody>
+            </p:sp>
+            <p:sp>
+              <p:nvSpPr>
+                <p:cNvPr id="550" name="Oval 549">
+                  <a:extLst>
+                    <a:ext uri="{FF2B5EF4-FFF2-40B4-BE49-F238E27FC236}">
+                      <a16:creationId xmlns:a16="http://schemas.microsoft.com/office/drawing/2014/main" id="{686DEF48-B2D8-435A-9F90-9B37E996E3E9}"/>
+                    </a:ext>
+                  </a:extLst>
+                </p:cNvPr>
+                <p:cNvSpPr/>
+                <p:nvPr/>
+              </p:nvSpPr>
+              <p:spPr>
+                <a:xfrm>
+                  <a:off x="6858134" y="4042150"/>
+                  <a:ext cx="506715" cy="506715"/>
+                </a:xfrm>
+                <a:prstGeom prst="ellipse">
+                  <a:avLst/>
+                </a:prstGeom>
+                <a:solidFill>
+                  <a:schemeClr val="tx1">
+                    <a:lumMod val="95000"/>
+                    <a:lumOff val="5000"/>
+                  </a:schemeClr>
+                </a:solidFill>
+                <a:ln w="38100" cap="rnd">
+                  <a:solidFill>
+                    <a:schemeClr val="accent4"/>
+                  </a:solidFill>
+                </a:ln>
+              </p:spPr>
+              <p:style>
+                <a:lnRef idx="1">
+                  <a:schemeClr val="accent1"/>
+                </a:lnRef>
+                <a:fillRef idx="0">
+                  <a:schemeClr val="accent1"/>
+                </a:fillRef>
+                <a:effectRef idx="0">
+                  <a:schemeClr val="accent1"/>
+                </a:effectRef>
+                <a:fontRef idx="minor">
+                  <a:schemeClr val="tx1"/>
+                </a:fontRef>
+              </p:style>
+              <p:txBody>
+                <a:bodyPr rtlCol="0" anchor="ctr"/>
+                <a:lstStyle/>
+                <a:p>
+                  <a:pPr algn="ctr"/>
+                  <a:endParaRPr lang="en-US"/>
+                </a:p>
+              </p:txBody>
+            </p:sp>
+            <p:sp>
+              <p:nvSpPr>
+                <p:cNvPr id="551" name="Oval 550">
+                  <a:extLst>
+                    <a:ext uri="{FF2B5EF4-FFF2-40B4-BE49-F238E27FC236}">
+                      <a16:creationId xmlns:a16="http://schemas.microsoft.com/office/drawing/2014/main" id="{81BF1AF5-6326-4928-8B3D-4DC3892698A1}"/>
+                    </a:ext>
+                  </a:extLst>
+                </p:cNvPr>
+                <p:cNvSpPr/>
+                <p:nvPr/>
+              </p:nvSpPr>
+              <p:spPr>
+                <a:xfrm>
+                  <a:off x="6858134" y="3051100"/>
+                  <a:ext cx="506715" cy="506715"/>
+                </a:xfrm>
+                <a:prstGeom prst="ellipse">
+                  <a:avLst/>
+                </a:prstGeom>
+                <a:solidFill>
+                  <a:schemeClr val="tx1">
+                    <a:lumMod val="95000"/>
+                    <a:lumOff val="5000"/>
+                  </a:schemeClr>
+                </a:solidFill>
+                <a:ln w="38100" cap="rnd">
+                  <a:solidFill>
+                    <a:schemeClr val="accent4"/>
+                  </a:solidFill>
+                </a:ln>
+              </p:spPr>
+              <p:style>
+                <a:lnRef idx="1">
+                  <a:schemeClr val="accent1"/>
+                </a:lnRef>
+                <a:fillRef idx="0">
+                  <a:schemeClr val="accent1"/>
+                </a:fillRef>
+                <a:effectRef idx="0">
+                  <a:schemeClr val="accent1"/>
+                </a:effectRef>
+                <a:fontRef idx="minor">
+                  <a:schemeClr val="tx1"/>
+                </a:fontRef>
+              </p:style>
+              <p:txBody>
+                <a:bodyPr rtlCol="0" anchor="ctr"/>
+                <a:lstStyle/>
+                <a:p>
+                  <a:pPr algn="ctr"/>
+                  <a:endParaRPr lang="en-US"/>
+                </a:p>
+              </p:txBody>
+            </p:sp>
+            <p:sp>
+              <p:nvSpPr>
+                <p:cNvPr id="553" name="Oval 552">
+                  <a:extLst>
+                    <a:ext uri="{FF2B5EF4-FFF2-40B4-BE49-F238E27FC236}">
+                      <a16:creationId xmlns:a16="http://schemas.microsoft.com/office/drawing/2014/main" id="{D0397CD0-9FD5-4F5F-B002-68D25392CBB9}"/>
+                    </a:ext>
+                  </a:extLst>
+                </p:cNvPr>
+                <p:cNvSpPr/>
+                <p:nvPr/>
+              </p:nvSpPr>
+              <p:spPr>
+                <a:xfrm>
+                  <a:off x="5361877" y="5593774"/>
+                  <a:ext cx="506715" cy="506715"/>
+                </a:xfrm>
+                <a:prstGeom prst="ellipse">
+                  <a:avLst/>
+                </a:prstGeom>
+                <a:solidFill>
+                  <a:schemeClr val="tx1">
+                    <a:lumMod val="95000"/>
+                    <a:lumOff val="5000"/>
+                  </a:schemeClr>
+                </a:solidFill>
+                <a:ln w="38100" cap="rnd">
+                  <a:solidFill>
+                    <a:schemeClr val="accent4"/>
+                  </a:solidFill>
+                </a:ln>
+              </p:spPr>
+              <p:style>
+                <a:lnRef idx="1">
+                  <a:schemeClr val="accent1"/>
+                </a:lnRef>
+                <a:fillRef idx="0">
+                  <a:schemeClr val="accent1"/>
+                </a:fillRef>
+                <a:effectRef idx="0">
+                  <a:schemeClr val="accent1"/>
+                </a:effectRef>
+                <a:fontRef idx="minor">
+                  <a:schemeClr val="tx1"/>
+                </a:fontRef>
+              </p:style>
+              <p:txBody>
+                <a:bodyPr rtlCol="0" anchor="ctr"/>
+                <a:lstStyle/>
+                <a:p>
+                  <a:pPr algn="ctr"/>
+                  <a:endParaRPr lang="en-US"/>
+                </a:p>
+              </p:txBody>
+            </p:sp>
+            <p:sp>
+              <p:nvSpPr>
+                <p:cNvPr id="554" name="Oval 553">
+                  <a:extLst>
+                    <a:ext uri="{FF2B5EF4-FFF2-40B4-BE49-F238E27FC236}">
+                      <a16:creationId xmlns:a16="http://schemas.microsoft.com/office/drawing/2014/main" id="{A2C29F67-03E5-4423-909E-7E59B6AAD004}"/>
+                    </a:ext>
+                  </a:extLst>
+                </p:cNvPr>
+                <p:cNvSpPr/>
+                <p:nvPr/>
+              </p:nvSpPr>
+              <p:spPr>
+                <a:xfrm>
+                  <a:off x="5870413" y="7122307"/>
+                  <a:ext cx="506715" cy="506715"/>
+                </a:xfrm>
+                <a:prstGeom prst="ellipse">
+                  <a:avLst/>
+                </a:prstGeom>
+                <a:solidFill>
+                  <a:schemeClr val="tx1">
+                    <a:lumMod val="95000"/>
+                    <a:lumOff val="5000"/>
+                  </a:schemeClr>
+                </a:solidFill>
+                <a:ln w="38100" cap="rnd">
+                  <a:solidFill>
+                    <a:schemeClr val="accent4"/>
+                  </a:solidFill>
+                </a:ln>
+              </p:spPr>
+              <p:style>
+                <a:lnRef idx="1">
+                  <a:schemeClr val="accent1"/>
+                </a:lnRef>
+                <a:fillRef idx="0">
+                  <a:schemeClr val="accent1"/>
+                </a:fillRef>
+                <a:effectRef idx="0">
+                  <a:schemeClr val="accent1"/>
+                </a:effectRef>
+                <a:fontRef idx="minor">
+                  <a:schemeClr val="tx1"/>
+                </a:fontRef>
+              </p:style>
+              <p:txBody>
+                <a:bodyPr rtlCol="0" anchor="ctr"/>
+                <a:lstStyle/>
+                <a:p>
+                  <a:pPr algn="ctr"/>
+                  <a:endParaRPr lang="en-US"/>
+                </a:p>
+              </p:txBody>
+            </p:sp>
+          </p:grpSp>
+        </p:grpSp>
+        <p:grpSp>
+          <p:nvGrpSpPr>
+            <p:cNvPr id="17" name="Group 16">
+              <a:extLst>
+                <a:ext uri="{FF2B5EF4-FFF2-40B4-BE49-F238E27FC236}">
+                  <a16:creationId xmlns:a16="http://schemas.microsoft.com/office/drawing/2014/main" id="{A0730E48-922F-4FF4-B85F-FC3512A2CE9F}"/>
+                </a:ext>
+              </a:extLst>
+            </p:cNvPr>
+            <p:cNvGrpSpPr/>
+            <p:nvPr/>
+          </p:nvGrpSpPr>
+          <p:grpSpPr>
+            <a:xfrm>
+              <a:off x="2161131" y="-1065022"/>
+              <a:ext cx="10948848" cy="1898367"/>
+              <a:chOff x="1258032" y="-1144125"/>
+              <a:chExt cx="10948848" cy="1898367"/>
+            </a:xfrm>
+          </p:grpSpPr>
+          <p:sp>
+            <p:nvSpPr>
+              <p:cNvPr id="559" name="TextBox 558">
+                <a:extLst>
+                  <a:ext uri="{FF2B5EF4-FFF2-40B4-BE49-F238E27FC236}">
+                    <a16:creationId xmlns:a16="http://schemas.microsoft.com/office/drawing/2014/main" id="{FE809016-ED02-4F84-896E-CCEB9DB06152}"/>
+                  </a:ext>
+                </a:extLst>
+              </p:cNvPr>
+              <p:cNvSpPr txBox="1"/>
+              <p:nvPr/>
+            </p:nvSpPr>
+            <p:spPr>
+              <a:xfrm>
+                <a:off x="1258032" y="-1144125"/>
+                <a:ext cx="10948848" cy="954107"/>
+              </a:xfrm>
+              <a:prstGeom prst="rect">
+                <a:avLst/>
+              </a:prstGeom>
+              <a:noFill/>
+            </p:spPr>
+            <p:txBody>
+              <a:bodyPr wrap="square" rtlCol="0" anchor="ctr">
+                <a:spAutoFit/>
+              </a:bodyPr>
+              <a:lstStyle/>
+              <a:p>
+                <a:pPr algn="ctr"/>
+                <a:r>
+                  <a:rPr lang="pt-PT" sz="2800" i="1" dirty="0">
+                    <a:solidFill>
+                      <a:schemeClr val="accent4"/>
+                    </a:solidFill>
+                    <a:latin typeface="Arial" panose="020B0604020202020204" pitchFamily="34" charset="0"/>
+                    <a:cs typeface="Arial" panose="020B0604020202020204" pitchFamily="34" charset="0"/>
+                  </a:rPr>
+                  <a:t>Divide </a:t>
+                </a:r>
+                <a:r>
+                  <a:rPr lang="pt-PT" sz="2800" i="1" dirty="0" err="1">
+                    <a:solidFill>
+                      <a:schemeClr val="accent4"/>
+                    </a:solidFill>
+                    <a:latin typeface="Arial" panose="020B0604020202020204" pitchFamily="34" charset="0"/>
+                    <a:cs typeface="Arial" panose="020B0604020202020204" pitchFamily="34" charset="0"/>
+                  </a:rPr>
+                  <a:t>the</a:t>
+                </a:r>
+                <a:r>
+                  <a:rPr lang="pt-PT" sz="2800" i="1" dirty="0">
+                    <a:solidFill>
+                      <a:schemeClr val="accent4"/>
+                    </a:solidFill>
+                    <a:latin typeface="Arial" panose="020B0604020202020204" pitchFamily="34" charset="0"/>
+                    <a:cs typeface="Arial" panose="020B0604020202020204" pitchFamily="34" charset="0"/>
+                  </a:rPr>
+                  <a:t> </a:t>
+                </a:r>
+                <a:r>
+                  <a:rPr lang="pt-PT" sz="2800" i="1" dirty="0" err="1">
+                    <a:solidFill>
+                      <a:schemeClr val="accent4"/>
+                    </a:solidFill>
+                    <a:latin typeface="Arial" panose="020B0604020202020204" pitchFamily="34" charset="0"/>
+                    <a:cs typeface="Arial" panose="020B0604020202020204" pitchFamily="34" charset="0"/>
+                  </a:rPr>
+                  <a:t>grid</a:t>
+                </a:r>
+                <a:r>
+                  <a:rPr lang="pt-PT" sz="2800" i="1" dirty="0">
+                    <a:solidFill>
+                      <a:schemeClr val="accent4"/>
+                    </a:solidFill>
+                    <a:latin typeface="Arial" panose="020B0604020202020204" pitchFamily="34" charset="0"/>
+                    <a:cs typeface="Arial" panose="020B0604020202020204" pitchFamily="34" charset="0"/>
+                  </a:rPr>
+                  <a:t> </a:t>
+                </a:r>
+                <a:r>
+                  <a:rPr lang="pt-PT" sz="2800" i="1" dirty="0" err="1">
+                    <a:solidFill>
+                      <a:schemeClr val="accent4"/>
+                    </a:solidFill>
+                    <a:latin typeface="Arial" panose="020B0604020202020204" pitchFamily="34" charset="0"/>
+                    <a:cs typeface="Arial" panose="020B0604020202020204" pitchFamily="34" charset="0"/>
+                  </a:rPr>
+                  <a:t>orthogonally</a:t>
+                </a:r>
+                <a:r>
+                  <a:rPr lang="pt-PT" sz="2800" i="1" dirty="0">
+                    <a:solidFill>
+                      <a:schemeClr val="accent4"/>
+                    </a:solidFill>
+                    <a:latin typeface="Arial" panose="020B0604020202020204" pitchFamily="34" charset="0"/>
+                    <a:cs typeface="Arial" panose="020B0604020202020204" pitchFamily="34" charset="0"/>
+                  </a:rPr>
+                  <a:t> </a:t>
+                </a:r>
+                <a:r>
+                  <a:rPr lang="pt-PT" sz="2800" i="1" dirty="0" err="1">
+                    <a:solidFill>
+                      <a:schemeClr val="accent4"/>
+                    </a:solidFill>
+                    <a:latin typeface="Arial" panose="020B0604020202020204" pitchFamily="34" charset="0"/>
+                    <a:cs typeface="Arial" panose="020B0604020202020204" pitchFamily="34" charset="0"/>
+                  </a:rPr>
+                  <a:t>into</a:t>
+                </a:r>
+                <a:r>
+                  <a:rPr lang="pt-PT" sz="2800" i="1" dirty="0">
+                    <a:solidFill>
+                      <a:schemeClr val="accent4"/>
+                    </a:solidFill>
+                    <a:latin typeface="Arial" panose="020B0604020202020204" pitchFamily="34" charset="0"/>
+                    <a:cs typeface="Arial" panose="020B0604020202020204" pitchFamily="34" charset="0"/>
+                  </a:rPr>
+                  <a:t> </a:t>
+                </a:r>
+                <a:r>
+                  <a:rPr lang="pt-PT" sz="2800" b="1" i="1" dirty="0" err="1">
+                    <a:solidFill>
+                      <a:schemeClr val="accent4"/>
+                    </a:solidFill>
+                    <a:latin typeface="Arial" panose="020B0604020202020204" pitchFamily="34" charset="0"/>
+                    <a:cs typeface="Arial" panose="020B0604020202020204" pitchFamily="34" charset="0"/>
+                  </a:rPr>
+                  <a:t>rotationally</a:t>
+                </a:r>
+                <a:r>
+                  <a:rPr lang="pt-PT" sz="2800" b="1" i="1" dirty="0">
+                    <a:solidFill>
+                      <a:schemeClr val="accent4"/>
+                    </a:solidFill>
+                    <a:latin typeface="Arial" panose="020B0604020202020204" pitchFamily="34" charset="0"/>
+                    <a:cs typeface="Arial" panose="020B0604020202020204" pitchFamily="34" charset="0"/>
+                  </a:rPr>
+                  <a:t> </a:t>
+                </a:r>
+                <a:r>
+                  <a:rPr lang="pt-PT" sz="2800" b="1" i="1" dirty="0" err="1">
+                    <a:solidFill>
+                      <a:schemeClr val="accent4"/>
+                    </a:solidFill>
+                    <a:latin typeface="Arial" panose="020B0604020202020204" pitchFamily="34" charset="0"/>
+                    <a:cs typeface="Arial" panose="020B0604020202020204" pitchFamily="34" charset="0"/>
+                  </a:rPr>
+                  <a:t>symmetric</a:t>
+                </a:r>
+                <a:r>
+                  <a:rPr lang="pt-PT" sz="2800" i="1" dirty="0">
+                    <a:solidFill>
+                      <a:schemeClr val="accent4"/>
+                    </a:solidFill>
+                    <a:latin typeface="Arial" panose="020B0604020202020204" pitchFamily="34" charset="0"/>
+                    <a:cs typeface="Arial" panose="020B0604020202020204" pitchFamily="34" charset="0"/>
+                  </a:rPr>
+                  <a:t> </a:t>
+                </a:r>
+                <a:r>
+                  <a:rPr lang="pt-PT" sz="2800" i="1" dirty="0" err="1">
+                    <a:solidFill>
+                      <a:schemeClr val="accent4"/>
+                    </a:solidFill>
+                    <a:latin typeface="Arial" panose="020B0604020202020204" pitchFamily="34" charset="0"/>
+                    <a:cs typeface="Arial" panose="020B0604020202020204" pitchFamily="34" charset="0"/>
+                  </a:rPr>
+                  <a:t>regions</a:t>
+                </a:r>
+                <a:r>
+                  <a:rPr lang="pt-PT" sz="2800" i="1" dirty="0">
+                    <a:solidFill>
+                      <a:schemeClr val="accent4"/>
+                    </a:solidFill>
+                    <a:latin typeface="Arial" panose="020B0604020202020204" pitchFamily="34" charset="0"/>
+                    <a:cs typeface="Arial" panose="020B0604020202020204" pitchFamily="34" charset="0"/>
+                  </a:rPr>
+                  <a:t>.</a:t>
+                </a:r>
+              </a:p>
+              <a:p>
+                <a:pPr algn="ctr"/>
+                <a:r>
+                  <a:rPr lang="pt-PT" sz="2800" i="1" dirty="0" err="1">
+                    <a:solidFill>
+                      <a:schemeClr val="accent4"/>
+                    </a:solidFill>
+                    <a:latin typeface="Arial" panose="020B0604020202020204" pitchFamily="34" charset="0"/>
+                    <a:cs typeface="Arial" panose="020B0604020202020204" pitchFamily="34" charset="0"/>
+                  </a:rPr>
+                  <a:t>Each</a:t>
+                </a:r>
+                <a:r>
+                  <a:rPr lang="pt-PT" sz="2800" i="1" dirty="0">
+                    <a:solidFill>
+                      <a:schemeClr val="accent4"/>
+                    </a:solidFill>
+                    <a:latin typeface="Arial" panose="020B0604020202020204" pitchFamily="34" charset="0"/>
+                    <a:cs typeface="Arial" panose="020B0604020202020204" pitchFamily="34" charset="0"/>
+                  </a:rPr>
+                  <a:t> </a:t>
+                </a:r>
+                <a:r>
+                  <a:rPr lang="pt-PT" sz="2800" i="1" dirty="0" err="1">
+                    <a:solidFill>
+                      <a:schemeClr val="accent4"/>
+                    </a:solidFill>
+                    <a:latin typeface="Arial" panose="020B0604020202020204" pitchFamily="34" charset="0"/>
+                    <a:cs typeface="Arial" panose="020B0604020202020204" pitchFamily="34" charset="0"/>
+                  </a:rPr>
+                  <a:t>region</a:t>
+                </a:r>
+                <a:r>
+                  <a:rPr lang="pt-PT" sz="2800" i="1" dirty="0">
+                    <a:solidFill>
+                      <a:schemeClr val="accent4"/>
+                    </a:solidFill>
+                    <a:latin typeface="Arial" panose="020B0604020202020204" pitchFamily="34" charset="0"/>
+                    <a:cs typeface="Arial" panose="020B0604020202020204" pitchFamily="34" charset="0"/>
+                  </a:rPr>
+                  <a:t> (</a:t>
+                </a:r>
+                <a:r>
+                  <a:rPr lang="pt-PT" sz="2800" i="1" dirty="0" err="1">
+                    <a:solidFill>
+                      <a:schemeClr val="accent4"/>
+                    </a:solidFill>
+                    <a:latin typeface="Arial" panose="020B0604020202020204" pitchFamily="34" charset="0"/>
+                    <a:cs typeface="Arial" panose="020B0604020202020204" pitchFamily="34" charset="0"/>
+                  </a:rPr>
+                  <a:t>galaxy</a:t>
+                </a:r>
+                <a:r>
+                  <a:rPr lang="pt-PT" sz="2800" i="1" dirty="0">
+                    <a:solidFill>
+                      <a:schemeClr val="accent4"/>
+                    </a:solidFill>
+                    <a:latin typeface="Arial" panose="020B0604020202020204" pitchFamily="34" charset="0"/>
+                    <a:cs typeface="Arial" panose="020B0604020202020204" pitchFamily="34" charset="0"/>
+                  </a:rPr>
+                  <a:t>) </a:t>
+                </a:r>
+                <a:r>
+                  <a:rPr lang="pt-PT" sz="2800" i="1" dirty="0" err="1">
+                    <a:solidFill>
+                      <a:schemeClr val="accent4"/>
+                    </a:solidFill>
+                    <a:latin typeface="Arial" panose="020B0604020202020204" pitchFamily="34" charset="0"/>
+                    <a:cs typeface="Arial" panose="020B0604020202020204" pitchFamily="34" charset="0"/>
+                  </a:rPr>
+                  <a:t>has</a:t>
+                </a:r>
+                <a:r>
+                  <a:rPr lang="pt-PT" sz="2800" i="1" dirty="0">
+                    <a:solidFill>
+                      <a:schemeClr val="accent4"/>
+                    </a:solidFill>
+                    <a:latin typeface="Arial" panose="020B0604020202020204" pitchFamily="34" charset="0"/>
+                    <a:cs typeface="Arial" panose="020B0604020202020204" pitchFamily="34" charset="0"/>
+                  </a:rPr>
+                  <a:t> a </a:t>
+                </a:r>
+                <a:r>
+                  <a:rPr lang="pt-PT" sz="2800" b="1" i="1" dirty="0" err="1">
+                    <a:solidFill>
+                      <a:schemeClr val="accent4"/>
+                    </a:solidFill>
+                    <a:latin typeface="Arial" panose="020B0604020202020204" pitchFamily="34" charset="0"/>
+                    <a:cs typeface="Arial" panose="020B0604020202020204" pitchFamily="34" charset="0"/>
+                  </a:rPr>
+                  <a:t>black</a:t>
+                </a:r>
+                <a:r>
+                  <a:rPr lang="pt-PT" sz="2800" b="1" i="1" dirty="0">
+                    <a:solidFill>
+                      <a:schemeClr val="accent4"/>
+                    </a:solidFill>
+                    <a:latin typeface="Arial" panose="020B0604020202020204" pitchFamily="34" charset="0"/>
+                    <a:cs typeface="Arial" panose="020B0604020202020204" pitchFamily="34" charset="0"/>
+                  </a:rPr>
+                  <a:t> </a:t>
+                </a:r>
+                <a:r>
+                  <a:rPr lang="pt-PT" sz="2800" b="1" i="1" dirty="0" err="1">
+                    <a:solidFill>
+                      <a:schemeClr val="accent4"/>
+                    </a:solidFill>
+                    <a:latin typeface="Arial" panose="020B0604020202020204" pitchFamily="34" charset="0"/>
+                    <a:cs typeface="Arial" panose="020B0604020202020204" pitchFamily="34" charset="0"/>
+                  </a:rPr>
+                  <a:t>hole</a:t>
+                </a:r>
+                <a:r>
+                  <a:rPr lang="pt-PT" sz="2800" i="1" dirty="0" err="1">
+                    <a:solidFill>
+                      <a:schemeClr val="accent4"/>
+                    </a:solidFill>
+                    <a:latin typeface="Arial" panose="020B0604020202020204" pitchFamily="34" charset="0"/>
+                    <a:cs typeface="Arial" panose="020B0604020202020204" pitchFamily="34" charset="0"/>
+                  </a:rPr>
+                  <a:t>.exactly</a:t>
+                </a:r>
+                <a:r>
+                  <a:rPr lang="pt-PT" sz="2800" i="1" dirty="0">
+                    <a:solidFill>
+                      <a:schemeClr val="accent4"/>
+                    </a:solidFill>
+                    <a:latin typeface="Arial" panose="020B0604020202020204" pitchFamily="34" charset="0"/>
+                    <a:cs typeface="Arial" panose="020B0604020202020204" pitchFamily="34" charset="0"/>
+                  </a:rPr>
+                  <a:t> </a:t>
+                </a:r>
+                <a:r>
+                  <a:rPr lang="pt-PT" sz="2800" i="1" dirty="0" err="1">
+                    <a:solidFill>
+                      <a:schemeClr val="accent4"/>
+                    </a:solidFill>
+                    <a:latin typeface="Arial" panose="020B0604020202020204" pitchFamily="34" charset="0"/>
+                    <a:cs typeface="Arial" panose="020B0604020202020204" pitchFamily="34" charset="0"/>
+                  </a:rPr>
+                  <a:t>at</a:t>
+                </a:r>
+                <a:r>
+                  <a:rPr lang="pt-PT" sz="2800" i="1" dirty="0">
+                    <a:solidFill>
+                      <a:schemeClr val="accent4"/>
+                    </a:solidFill>
+                    <a:latin typeface="Arial" panose="020B0604020202020204" pitchFamily="34" charset="0"/>
+                    <a:cs typeface="Arial" panose="020B0604020202020204" pitchFamily="34" charset="0"/>
+                  </a:rPr>
+                  <a:t> </a:t>
+                </a:r>
+                <a:r>
+                  <a:rPr lang="pt-PT" sz="2800" i="1" dirty="0" err="1">
+                    <a:solidFill>
+                      <a:schemeClr val="accent4"/>
+                    </a:solidFill>
+                    <a:latin typeface="Arial" panose="020B0604020202020204" pitchFamily="34" charset="0"/>
+                    <a:cs typeface="Arial" panose="020B0604020202020204" pitchFamily="34" charset="0"/>
+                  </a:rPr>
+                  <a:t>its</a:t>
+                </a:r>
+                <a:r>
+                  <a:rPr lang="pt-PT" sz="2800" i="1" dirty="0">
+                    <a:solidFill>
+                      <a:schemeClr val="accent4"/>
+                    </a:solidFill>
+                    <a:latin typeface="Arial" panose="020B0604020202020204" pitchFamily="34" charset="0"/>
+                    <a:cs typeface="Arial" panose="020B0604020202020204" pitchFamily="34" charset="0"/>
+                  </a:rPr>
+                  <a:t> centre.</a:t>
+                </a:r>
+              </a:p>
+            </p:txBody>
+          </p:sp>
+          <p:sp>
+            <p:nvSpPr>
+              <p:cNvPr id="16" name="Rectangle 15">
+                <a:extLst>
+                  <a:ext uri="{FF2B5EF4-FFF2-40B4-BE49-F238E27FC236}">
+                    <a16:creationId xmlns:a16="http://schemas.microsoft.com/office/drawing/2014/main" id="{2303FA51-1FF8-4F7D-8D7C-9A3DD8AD7193}"/>
+                  </a:ext>
+                </a:extLst>
+              </p:cNvPr>
+              <p:cNvSpPr/>
+              <p:nvPr/>
+            </p:nvSpPr>
+            <p:spPr>
+              <a:xfrm>
+                <a:off x="1410771" y="-199865"/>
+                <a:ext cx="10643370" cy="954107"/>
+              </a:xfrm>
+              <a:prstGeom prst="rect">
+                <a:avLst/>
+              </a:prstGeom>
+            </p:spPr>
+            <p:txBody>
+              <a:bodyPr wrap="square">
+                <a:spAutoFit/>
+              </a:bodyPr>
+              <a:lstStyle/>
+              <a:p>
+                <a:pPr lvl="0" algn="ctr"/>
+                <a:r>
+                  <a:rPr lang="pt-PT" sz="2800" i="1" dirty="0">
+                    <a:solidFill>
+                      <a:srgbClr val="FFC000"/>
+                    </a:solidFill>
+                    <a:latin typeface="Arial" panose="020B0604020202020204" pitchFamily="34" charset="0"/>
+                    <a:cs typeface="Arial" panose="020B0604020202020204" pitchFamily="34" charset="0"/>
+                  </a:rPr>
+                  <a:t>Also </a:t>
+                </a:r>
+                <a:r>
+                  <a:rPr lang="pt-PT" sz="2800" i="1" dirty="0" err="1">
+                    <a:solidFill>
+                      <a:srgbClr val="FFC000"/>
+                    </a:solidFill>
+                    <a:latin typeface="Arial" panose="020B0604020202020204" pitchFamily="34" charset="0"/>
+                    <a:cs typeface="Arial" panose="020B0604020202020204" pitchFamily="34" charset="0"/>
+                  </a:rPr>
+                  <a:t>place</a:t>
+                </a:r>
+                <a:r>
+                  <a:rPr lang="pt-PT" sz="2800" i="1" dirty="0">
+                    <a:solidFill>
+                      <a:srgbClr val="FFC000"/>
+                    </a:solidFill>
+                    <a:latin typeface="Arial" panose="020B0604020202020204" pitchFamily="34" charset="0"/>
+                    <a:cs typeface="Arial" panose="020B0604020202020204" pitchFamily="34" charset="0"/>
+                  </a:rPr>
+                  <a:t> </a:t>
+                </a:r>
+                <a:r>
+                  <a:rPr lang="pt-PT" sz="2800" i="1" dirty="0" err="1">
+                    <a:solidFill>
+                      <a:srgbClr val="FFC000"/>
+                    </a:solidFill>
+                    <a:latin typeface="Arial" panose="020B0604020202020204" pitchFamily="34" charset="0"/>
+                    <a:cs typeface="Arial" panose="020B0604020202020204" pitchFamily="34" charset="0"/>
+                  </a:rPr>
+                  <a:t>exactly</a:t>
+                </a:r>
+                <a:r>
+                  <a:rPr lang="pt-PT" sz="2800" i="1" dirty="0">
+                    <a:solidFill>
+                      <a:srgbClr val="FFC000"/>
+                    </a:solidFill>
+                    <a:latin typeface="Arial" panose="020B0604020202020204" pitchFamily="34" charset="0"/>
+                    <a:cs typeface="Arial" panose="020B0604020202020204" pitchFamily="34" charset="0"/>
+                  </a:rPr>
+                  <a:t> </a:t>
+                </a:r>
+                <a:r>
+                  <a:rPr lang="pt-PT" sz="2800" b="1" i="1" dirty="0" err="1">
+                    <a:solidFill>
+                      <a:srgbClr val="FFC000"/>
+                    </a:solidFill>
+                    <a:latin typeface="Arial" panose="020B0604020202020204" pitchFamily="34" charset="0"/>
+                    <a:cs typeface="Arial" panose="020B0604020202020204" pitchFamily="34" charset="0"/>
+                  </a:rPr>
+                  <a:t>two</a:t>
+                </a:r>
+                <a:r>
+                  <a:rPr lang="pt-PT" sz="2800" i="1" dirty="0">
+                    <a:solidFill>
+                      <a:srgbClr val="FFC000"/>
+                    </a:solidFill>
+                    <a:latin typeface="Arial" panose="020B0604020202020204" pitchFamily="34" charset="0"/>
+                    <a:cs typeface="Arial" panose="020B0604020202020204" pitchFamily="34" charset="0"/>
+                  </a:rPr>
+                  <a:t> stars per </a:t>
+                </a:r>
+                <a:r>
+                  <a:rPr lang="pt-PT" sz="2800" b="1" i="1" dirty="0" err="1">
+                    <a:solidFill>
+                      <a:srgbClr val="FFC000"/>
+                    </a:solidFill>
+                    <a:latin typeface="Arial" panose="020B0604020202020204" pitchFamily="34" charset="0"/>
+                    <a:cs typeface="Arial" panose="020B0604020202020204" pitchFamily="34" charset="0"/>
+                  </a:rPr>
+                  <a:t>region</a:t>
+                </a:r>
+                <a:r>
+                  <a:rPr lang="pt-PT" sz="2800" i="1" dirty="0">
+                    <a:solidFill>
+                      <a:srgbClr val="FFC000"/>
+                    </a:solidFill>
+                    <a:latin typeface="Arial" panose="020B0604020202020204" pitchFamily="34" charset="0"/>
+                    <a:cs typeface="Arial" panose="020B0604020202020204" pitchFamily="34" charset="0"/>
+                  </a:rPr>
+                  <a:t> </a:t>
+                </a:r>
+                <a:r>
+                  <a:rPr lang="pt-PT" sz="2800" i="1" dirty="0" err="1">
+                    <a:solidFill>
+                      <a:srgbClr val="FFC000"/>
+                    </a:solidFill>
+                    <a:latin typeface="Arial" panose="020B0604020202020204" pitchFamily="34" charset="0"/>
+                    <a:cs typeface="Arial" panose="020B0604020202020204" pitchFamily="34" charset="0"/>
+                  </a:rPr>
+                  <a:t>and</a:t>
+                </a:r>
+                <a:r>
+                  <a:rPr lang="pt-PT" sz="2800" i="1" dirty="0">
+                    <a:solidFill>
+                      <a:srgbClr val="FFC000"/>
+                    </a:solidFill>
+                    <a:latin typeface="Arial" panose="020B0604020202020204" pitchFamily="34" charset="0"/>
+                    <a:cs typeface="Arial" panose="020B0604020202020204" pitchFamily="34" charset="0"/>
+                  </a:rPr>
+                  <a:t> </a:t>
+                </a:r>
+                <a:r>
+                  <a:rPr lang="pt-PT" sz="2800" b="1" i="1" dirty="0" err="1">
+                    <a:solidFill>
+                      <a:srgbClr val="FFC000"/>
+                    </a:solidFill>
+                    <a:latin typeface="Arial" panose="020B0604020202020204" pitchFamily="34" charset="0"/>
+                    <a:cs typeface="Arial" panose="020B0604020202020204" pitchFamily="34" charset="0"/>
+                  </a:rPr>
+                  <a:t>line</a:t>
+                </a:r>
+                <a:r>
+                  <a:rPr lang="pt-PT" sz="2800" i="1" dirty="0">
+                    <a:solidFill>
+                      <a:srgbClr val="FFC000"/>
+                    </a:solidFill>
+                    <a:latin typeface="Arial" panose="020B0604020202020204" pitchFamily="34" charset="0"/>
+                    <a:cs typeface="Arial" panose="020B0604020202020204" pitchFamily="34" charset="0"/>
+                  </a:rPr>
+                  <a:t>.</a:t>
+                </a:r>
+              </a:p>
+              <a:p>
+                <a:pPr lvl="0" algn="ctr"/>
+                <a:r>
+                  <a:rPr lang="pt-PT" sz="2800" i="1" dirty="0" err="1">
+                    <a:solidFill>
+                      <a:srgbClr val="FFC000"/>
+                    </a:solidFill>
+                    <a:latin typeface="Arial" panose="020B0604020202020204" pitchFamily="34" charset="0"/>
+                    <a:cs typeface="Arial" panose="020B0604020202020204" pitchFamily="34" charset="0"/>
+                  </a:rPr>
+                  <a:t>Cells</a:t>
+                </a:r>
+                <a:r>
+                  <a:rPr lang="pt-PT" sz="2800" i="1" dirty="0">
+                    <a:solidFill>
+                      <a:srgbClr val="FFC000"/>
+                    </a:solidFill>
+                    <a:latin typeface="Arial" panose="020B0604020202020204" pitchFamily="34" charset="0"/>
+                    <a:cs typeface="Arial" panose="020B0604020202020204" pitchFamily="34" charset="0"/>
+                  </a:rPr>
+                  <a:t> </a:t>
+                </a:r>
+                <a:r>
+                  <a:rPr lang="pt-PT" sz="2800" i="1" dirty="0" err="1">
+                    <a:solidFill>
+                      <a:srgbClr val="FFC000"/>
+                    </a:solidFill>
+                    <a:latin typeface="Arial" panose="020B0604020202020204" pitchFamily="34" charset="0"/>
+                    <a:cs typeface="Arial" panose="020B0604020202020204" pitchFamily="34" charset="0"/>
+                  </a:rPr>
+                  <a:t>containing</a:t>
+                </a:r>
+                <a:r>
+                  <a:rPr lang="pt-PT" sz="2800" i="1" dirty="0">
+                    <a:solidFill>
+                      <a:srgbClr val="FFC000"/>
+                    </a:solidFill>
+                    <a:latin typeface="Arial" panose="020B0604020202020204" pitchFamily="34" charset="0"/>
+                    <a:cs typeface="Arial" panose="020B0604020202020204" pitchFamily="34" charset="0"/>
+                  </a:rPr>
+                  <a:t> stars share no </a:t>
+                </a:r>
+                <a:r>
+                  <a:rPr lang="pt-PT" sz="2800" i="1" dirty="0" err="1">
+                    <a:solidFill>
+                      <a:srgbClr val="FFC000"/>
+                    </a:solidFill>
+                    <a:latin typeface="Arial" panose="020B0604020202020204" pitchFamily="34" charset="0"/>
+                    <a:cs typeface="Arial" panose="020B0604020202020204" pitchFamily="34" charset="0"/>
+                  </a:rPr>
+                  <a:t>vertices</a:t>
+                </a:r>
+                <a:r>
+                  <a:rPr lang="pt-PT" sz="2800" i="1" dirty="0">
+                    <a:solidFill>
+                      <a:srgbClr val="FFC000"/>
+                    </a:solidFill>
+                    <a:latin typeface="Arial" panose="020B0604020202020204" pitchFamily="34" charset="0"/>
+                    <a:cs typeface="Arial" panose="020B0604020202020204" pitchFamily="34" charset="0"/>
+                  </a:rPr>
+                  <a:t>.</a:t>
+                </a:r>
+              </a:p>
+            </p:txBody>
+          </p:sp>
+        </p:grpSp>
+      </p:grpSp>
+      <p:pic>
+        <p:nvPicPr>
+          <p:cNvPr id="3" name="Picture 2">
+            <a:extLst>
+              <a:ext uri="{FF2B5EF4-FFF2-40B4-BE49-F238E27FC236}">
+                <a16:creationId xmlns:a16="http://schemas.microsoft.com/office/drawing/2014/main" id="{E50CE364-C6B7-49FD-9CEF-85AA89BE178A}"/>
+              </a:ext>
+            </a:extLst>
+          </p:cNvPr>
+          <p:cNvPicPr>
+            <a:picLocks noChangeAspect="1"/>
+          </p:cNvPicPr>
+          <p:nvPr/>
+        </p:nvPicPr>
+        <p:blipFill>
+          <a:blip r:embed="rId2"/>
+          <a:stretch>
+            <a:fillRect/>
+          </a:stretch>
+        </p:blipFill>
+        <p:spPr>
+          <a:xfrm>
+            <a:off x="-11674582" y="-2686585"/>
+            <a:ext cx="4704437" cy="5482506"/>
+          </a:xfrm>
+          <a:prstGeom prst="rect">
+            <a:avLst/>
+          </a:prstGeom>
+        </p:spPr>
+      </p:pic>
+      <p:pic>
+        <p:nvPicPr>
+          <p:cNvPr id="6" name="Picture 5">
+            <a:extLst>
+              <a:ext uri="{FF2B5EF4-FFF2-40B4-BE49-F238E27FC236}">
+                <a16:creationId xmlns:a16="http://schemas.microsoft.com/office/drawing/2014/main" id="{20CE6F36-A825-49C0-8947-76A359B1F99D}"/>
+              </a:ext>
+            </a:extLst>
+          </p:cNvPr>
+          <p:cNvPicPr>
+            <a:picLocks noChangeAspect="1"/>
+          </p:cNvPicPr>
+          <p:nvPr/>
+        </p:nvPicPr>
+        <p:blipFill>
+          <a:blip r:embed="rId3"/>
+          <a:stretch>
+            <a:fillRect/>
+          </a:stretch>
+        </p:blipFill>
+        <p:spPr>
+          <a:xfrm>
+            <a:off x="-6717010" y="-1339161"/>
+            <a:ext cx="4285630" cy="4294376"/>
+          </a:xfrm>
+          <a:prstGeom prst="rect">
+            <a:avLst/>
+          </a:prstGeom>
+        </p:spPr>
+      </p:pic>
+      <p:pic>
+        <p:nvPicPr>
+          <p:cNvPr id="7" name="Picture 6">
+            <a:extLst>
+              <a:ext uri="{FF2B5EF4-FFF2-40B4-BE49-F238E27FC236}">
+                <a16:creationId xmlns:a16="http://schemas.microsoft.com/office/drawing/2014/main" id="{28FD7DE6-6020-4414-8B51-64DFAF579D95}"/>
+              </a:ext>
+            </a:extLst>
+          </p:cNvPr>
+          <p:cNvPicPr>
+            <a:picLocks noChangeAspect="1"/>
+          </p:cNvPicPr>
+          <p:nvPr/>
+        </p:nvPicPr>
+        <p:blipFill>
+          <a:blip r:embed="rId4"/>
+          <a:stretch>
+            <a:fillRect/>
+          </a:stretch>
+        </p:blipFill>
+        <p:spPr>
+          <a:xfrm>
+            <a:off x="-3946448" y="87411"/>
+            <a:ext cx="3092609" cy="3035456"/>
+          </a:xfrm>
+          <a:prstGeom prst="rect">
+            <a:avLst/>
+          </a:prstGeom>
+        </p:spPr>
+      </p:pic>
+      <p:pic>
+        <p:nvPicPr>
+          <p:cNvPr id="8" name="Picture 7">
+            <a:extLst>
+              <a:ext uri="{FF2B5EF4-FFF2-40B4-BE49-F238E27FC236}">
+                <a16:creationId xmlns:a16="http://schemas.microsoft.com/office/drawing/2014/main" id="{9D0DB3AC-C0A2-40FF-9092-50AA33FB5E9A}"/>
+              </a:ext>
+            </a:extLst>
+          </p:cNvPr>
+          <p:cNvPicPr>
+            <a:picLocks noChangeAspect="1"/>
+          </p:cNvPicPr>
+          <p:nvPr/>
+        </p:nvPicPr>
+        <p:blipFill>
+          <a:blip r:embed="rId5"/>
+          <a:stretch>
+            <a:fillRect/>
+          </a:stretch>
+        </p:blipFill>
+        <p:spPr>
+          <a:xfrm>
+            <a:off x="-2734907" y="1228299"/>
+            <a:ext cx="3035456" cy="3067208"/>
+          </a:xfrm>
+          <a:prstGeom prst="rect">
+            <a:avLst/>
+          </a:prstGeom>
+        </p:spPr>
+      </p:pic>
+    </p:spTree>
+    <p:extLst>
+      <p:ext uri="{BB962C8B-B14F-4D97-AF65-F5344CB8AC3E}">
+        <p14:creationId xmlns:p14="http://schemas.microsoft.com/office/powerpoint/2010/main" val="2422890730"/>
+      </p:ext>
+    </p:extLst>
+  </p:cSld>
+  <p:clrMapOvr>
+    <a:masterClrMapping/>
+  </p:clrMapOvr>
+</p:sld>
+</file>
+
+<file path=ppt/slides/slide2.xml><?xml version="1.0" encoding="utf-8"?>
+<p:sld xmlns:a="http://schemas.openxmlformats.org/drawingml/2006/main" xmlns:r="http://schemas.openxmlformats.org/officeDocument/2006/relationships" xmlns:p="http://schemas.openxmlformats.org/presentationml/2006/main">
+  <p:cSld>
+    <p:spTree>
+      <p:nvGrpSpPr>
+        <p:cNvPr id="1" name=""/>
+        <p:cNvGrpSpPr/>
+        <p:nvPr/>
+      </p:nvGrpSpPr>
+      <p:grpSpPr>
+        <a:xfrm>
+          <a:off x="0" y="0"/>
+          <a:ext cx="0" cy="0"/>
+          <a:chOff x="0" y="0"/>
+          <a:chExt cx="0" cy="0"/>
+        </a:xfrm>
+      </p:grpSpPr>
       <p:sp>
         <p:nvSpPr>
           <p:cNvPr id="556" name="Rectangle 555">
@@ -3379,7 +8504,7 @@
             <a:avLst/>
           </a:prstGeom>
           <a:solidFill>
-            <a:schemeClr val="tx1"/>
+            <a:srgbClr val="C00000"/>
           </a:solidFill>
           <a:ln w="76200">
             <a:solidFill>
@@ -8414,7 +13539,7 @@
     </p:spTree>
     <p:extLst>
       <p:ext uri="{BB962C8B-B14F-4D97-AF65-F5344CB8AC3E}">
-        <p14:creationId xmlns:p14="http://schemas.microsoft.com/office/powerpoint/2010/main" val="2422890730"/>
+        <p14:creationId xmlns:p14="http://schemas.microsoft.com/office/powerpoint/2010/main" val="2627450269"/>
       </p:ext>
     </p:extLst>
   </p:cSld>

--- a/images/star-battle/templates/33-battle of the galaxies.pptx
+++ b/images/star-battle/templates/33-battle of the galaxies.pptx
@@ -273,7 +273,7 @@
           <a:p>
             <a:fld id="{082CB7C4-9810-433B-A50A-DC01EC0EDDAD}" type="datetimeFigureOut">
               <a:rPr lang="pt-PT" smtClean="0"/>
-              <a:t>06/01/2021</a:t>
+              <a:t>08/01/2021</a:t>
             </a:fld>
             <a:endParaRPr lang="pt-PT"/>
           </a:p>
@@ -473,7 +473,7 @@
           <a:p>
             <a:fld id="{082CB7C4-9810-433B-A50A-DC01EC0EDDAD}" type="datetimeFigureOut">
               <a:rPr lang="pt-PT" smtClean="0"/>
-              <a:t>06/01/2021</a:t>
+              <a:t>08/01/2021</a:t>
             </a:fld>
             <a:endParaRPr lang="pt-PT"/>
           </a:p>
@@ -683,7 +683,7 @@
           <a:p>
             <a:fld id="{082CB7C4-9810-433B-A50A-DC01EC0EDDAD}" type="datetimeFigureOut">
               <a:rPr lang="pt-PT" smtClean="0"/>
-              <a:t>06/01/2021</a:t>
+              <a:t>08/01/2021</a:t>
             </a:fld>
             <a:endParaRPr lang="pt-PT"/>
           </a:p>
@@ -883,7 +883,7 @@
           <a:p>
             <a:fld id="{082CB7C4-9810-433B-A50A-DC01EC0EDDAD}" type="datetimeFigureOut">
               <a:rPr lang="pt-PT" smtClean="0"/>
-              <a:t>06/01/2021</a:t>
+              <a:t>08/01/2021</a:t>
             </a:fld>
             <a:endParaRPr lang="pt-PT"/>
           </a:p>
@@ -1159,7 +1159,7 @@
           <a:p>
             <a:fld id="{082CB7C4-9810-433B-A50A-DC01EC0EDDAD}" type="datetimeFigureOut">
               <a:rPr lang="pt-PT" smtClean="0"/>
-              <a:t>06/01/2021</a:t>
+              <a:t>08/01/2021</a:t>
             </a:fld>
             <a:endParaRPr lang="pt-PT"/>
           </a:p>
@@ -1427,7 +1427,7 @@
           <a:p>
             <a:fld id="{082CB7C4-9810-433B-A50A-DC01EC0EDDAD}" type="datetimeFigureOut">
               <a:rPr lang="pt-PT" smtClean="0"/>
-              <a:t>06/01/2021</a:t>
+              <a:t>08/01/2021</a:t>
             </a:fld>
             <a:endParaRPr lang="pt-PT"/>
           </a:p>
@@ -1842,7 +1842,7 @@
           <a:p>
             <a:fld id="{082CB7C4-9810-433B-A50A-DC01EC0EDDAD}" type="datetimeFigureOut">
               <a:rPr lang="pt-PT" smtClean="0"/>
-              <a:t>06/01/2021</a:t>
+              <a:t>08/01/2021</a:t>
             </a:fld>
             <a:endParaRPr lang="pt-PT"/>
           </a:p>
@@ -1984,7 +1984,7 @@
           <a:p>
             <a:fld id="{082CB7C4-9810-433B-A50A-DC01EC0EDDAD}" type="datetimeFigureOut">
               <a:rPr lang="pt-PT" smtClean="0"/>
-              <a:t>06/01/2021</a:t>
+              <a:t>08/01/2021</a:t>
             </a:fld>
             <a:endParaRPr lang="pt-PT"/>
           </a:p>
@@ -2097,7 +2097,7 @@
           <a:p>
             <a:fld id="{082CB7C4-9810-433B-A50A-DC01EC0EDDAD}" type="datetimeFigureOut">
               <a:rPr lang="pt-PT" smtClean="0"/>
-              <a:t>06/01/2021</a:t>
+              <a:t>08/01/2021</a:t>
             </a:fld>
             <a:endParaRPr lang="pt-PT"/>
           </a:p>
@@ -2410,7 +2410,7 @@
           <a:p>
             <a:fld id="{082CB7C4-9810-433B-A50A-DC01EC0EDDAD}" type="datetimeFigureOut">
               <a:rPr lang="pt-PT" smtClean="0"/>
-              <a:t>06/01/2021</a:t>
+              <a:t>08/01/2021</a:t>
             </a:fld>
             <a:endParaRPr lang="pt-PT"/>
           </a:p>
@@ -2699,7 +2699,7 @@
           <a:p>
             <a:fld id="{082CB7C4-9810-433B-A50A-DC01EC0EDDAD}" type="datetimeFigureOut">
               <a:rPr lang="pt-PT" smtClean="0"/>
-              <a:t>06/01/2021</a:t>
+              <a:t>08/01/2021</a:t>
             </a:fld>
             <a:endParaRPr lang="pt-PT"/>
           </a:p>
@@ -2942,7 +2942,7 @@
           <a:p>
             <a:fld id="{082CB7C4-9810-433B-A50A-DC01EC0EDDAD}" type="datetimeFigureOut">
               <a:rPr lang="pt-PT" smtClean="0"/>
-              <a:t>06/01/2021</a:t>
+              <a:t>08/01/2021</a:t>
             </a:fld>
             <a:endParaRPr lang="pt-PT"/>
           </a:p>
@@ -8045,6 +8045,16 @@
                   <a:t>hole</a:t>
                 </a:r>
                 <a:r>
+                  <a:rPr lang="pt-PT" sz="2800" i="1" dirty="0">
+                    <a:solidFill>
+                      <a:schemeClr val="accent4"/>
+                    </a:solidFill>
+                    <a:latin typeface="Arial" panose="020B0604020202020204" pitchFamily="34" charset="0"/>
+                    <a:cs typeface="Arial" panose="020B0604020202020204" pitchFamily="34" charset="0"/>
+                  </a:rPr>
+                  <a:t> </a:t>
+                </a:r>
+                <a:r>
                   <a:rPr lang="pt-PT" sz="2800" i="1" dirty="0" err="1">
                     <a:solidFill>
                       <a:schemeClr val="accent4"/>
@@ -8052,7 +8062,7 @@
                     <a:latin typeface="Arial" panose="020B0604020202020204" pitchFamily="34" charset="0"/>
                     <a:cs typeface="Arial" panose="020B0604020202020204" pitchFamily="34" charset="0"/>
                   </a:rPr>
-                  <a:t>.exactly</a:t>
+                  <a:t>exactly</a:t>
                 </a:r>
                 <a:r>
                   <a:rPr lang="pt-PT" sz="2800" i="1" dirty="0">
